--- a/Pre/pre.pptx
+++ b/Pre/pre.pptx
@@ -4,19 +4,22 @@
   <p:sldMasterIdLst>
     <p:sldMasterId id="2147483648" r:id="rId1"/>
   </p:sldMasterIdLst>
+  <p:notesMasterIdLst>
+    <p:notesMasterId r:id="rId4"/>
+  </p:notesMasterIdLst>
   <p:sldIdLst>
     <p:sldId id="256" r:id="rId3"/>
-    <p:sldId id="257" r:id="rId4"/>
-    <p:sldId id="258" r:id="rId5"/>
-    <p:sldId id="259" r:id="rId6"/>
-    <p:sldId id="260" r:id="rId7"/>
-    <p:sldId id="261" r:id="rId8"/>
-    <p:sldId id="262" r:id="rId9"/>
-    <p:sldId id="263" r:id="rId10"/>
-    <p:sldId id="264" r:id="rId11"/>
-    <p:sldId id="265" r:id="rId12"/>
-    <p:sldId id="266" r:id="rId13"/>
-    <p:sldId id="267" r:id="rId14"/>
+    <p:sldId id="257" r:id="rId5"/>
+    <p:sldId id="258" r:id="rId6"/>
+    <p:sldId id="259" r:id="rId7"/>
+    <p:sldId id="260" r:id="rId8"/>
+    <p:sldId id="261" r:id="rId9"/>
+    <p:sldId id="262" r:id="rId10"/>
+    <p:sldId id="263" r:id="rId11"/>
+    <p:sldId id="264" r:id="rId12"/>
+    <p:sldId id="265" r:id="rId13"/>
+    <p:sldId id="266" r:id="rId14"/>
+    <p:sldId id="267" r:id="rId15"/>
   </p:sldIdLst>
   <p:sldSz cx="12192000" cy="6858000"/>
   <p:notesSz cx="6858000" cy="9144000"/>
@@ -118,6 +121,1770 @@
 </p:presentation>
 </file>
 
+<file path=ppt/notesMasters/notesMaster1.xml><?xml version="1.0" encoding="utf-8"?>
+<p:notesMaster xmlns:a="http://schemas.openxmlformats.org/drawingml/2006/main" xmlns:r="http://schemas.openxmlformats.org/officeDocument/2006/relationships" xmlns:p="http://schemas.openxmlformats.org/presentationml/2006/main">
+  <p:cSld>
+    <p:bg>
+      <p:bgRef idx="1001">
+        <a:schemeClr val="bg1"/>
+      </p:bgRef>
+    </p:bg>
+    <p:spTree>
+      <p:nvGrpSpPr>
+        <p:cNvPr id="1" name=""/>
+        <p:cNvGrpSpPr/>
+        <p:nvPr/>
+      </p:nvGrpSpPr>
+      <p:grpSpPr>
+        <a:xfrm>
+          <a:off x="0" y="0"/>
+          <a:ext cx="0" cy="0"/>
+          <a:chOff x="0" y="0"/>
+          <a:chExt cx="0" cy="0"/>
+        </a:xfrm>
+      </p:grpSpPr>
+      <p:sp>
+        <p:nvSpPr>
+          <p:cNvPr id="2" name="页眉占位符 1"/>
+          <p:cNvSpPr>
+            <a:spLocks noGrp="1"/>
+          </p:cNvSpPr>
+          <p:nvPr>
+            <p:ph type="hdr" sz="quarter"/>
+          </p:nvPr>
+        </p:nvSpPr>
+        <p:spPr>
+          <a:xfrm>
+            <a:off x="0" y="0"/>
+            <a:ext cx="2971800" cy="458788"/>
+          </a:xfrm>
+          <a:prstGeom prst="rect">
+            <a:avLst/>
+          </a:prstGeom>
+        </p:spPr>
+        <p:txBody>
+          <a:bodyPr vert="horz" lIns="91440" tIns="45720" rIns="91440" bIns="45720" rtlCol="0"/>
+          <a:lstStyle>
+            <a:lvl1pPr algn="l">
+              <a:defRPr sz="1200"/>
+            </a:lvl1pPr>
+          </a:lstStyle>
+          <a:p>
+            <a:endParaRPr lang="zh-CN" altLang="en-US"/>
+          </a:p>
+        </p:txBody>
+      </p:sp>
+      <p:sp>
+        <p:nvSpPr>
+          <p:cNvPr id="3" name="日期占位符 2"/>
+          <p:cNvSpPr>
+            <a:spLocks noGrp="1"/>
+          </p:cNvSpPr>
+          <p:nvPr>
+            <p:ph type="dt" idx="1"/>
+          </p:nvPr>
+        </p:nvSpPr>
+        <p:spPr>
+          <a:xfrm>
+            <a:off x="3884613" y="0"/>
+            <a:ext cx="2971800" cy="458788"/>
+          </a:xfrm>
+          <a:prstGeom prst="rect">
+            <a:avLst/>
+          </a:prstGeom>
+        </p:spPr>
+        <p:txBody>
+          <a:bodyPr vert="horz" lIns="91440" tIns="45720" rIns="91440" bIns="45720" rtlCol="0"/>
+          <a:lstStyle>
+            <a:lvl1pPr algn="r">
+              <a:defRPr sz="1200"/>
+            </a:lvl1pPr>
+          </a:lstStyle>
+          <a:p>
+            <a:fld id="{D2A48B96-639E-45A3-A0BA-2464DFDB1FAA}" type="datetimeFigureOut">
+              <a:rPr lang="zh-CN" altLang="en-US" smtClean="0"/>
+            </a:fld>
+            <a:endParaRPr lang="zh-CN" altLang="en-US"/>
+          </a:p>
+        </p:txBody>
+      </p:sp>
+      <p:sp>
+        <p:nvSpPr>
+          <p:cNvPr id="4" name="幻灯片图像占位符 3"/>
+          <p:cNvSpPr>
+            <a:spLocks noGrp="1" noRot="1" noChangeAspect="1"/>
+          </p:cNvSpPr>
+          <p:nvPr>
+            <p:ph type="sldImg" idx="2"/>
+          </p:nvPr>
+        </p:nvSpPr>
+        <p:spPr>
+          <a:xfrm>
+            <a:off x="685800" y="1143000"/>
+            <a:ext cx="5486400" cy="3086100"/>
+          </a:xfrm>
+          <a:prstGeom prst="rect">
+            <a:avLst/>
+          </a:prstGeom>
+          <a:noFill/>
+          <a:ln w="12700">
+            <a:solidFill>
+              <a:prstClr val="black"/>
+            </a:solidFill>
+          </a:ln>
+        </p:spPr>
+        <p:txBody>
+          <a:bodyPr vert="horz" lIns="91440" tIns="45720" rIns="91440" bIns="45720" rtlCol="0" anchor="ctr"/>
+          <a:lstStyle/>
+          <a:p>
+            <a:endParaRPr lang="zh-CN" altLang="en-US"/>
+          </a:p>
+        </p:txBody>
+      </p:sp>
+      <p:sp>
+        <p:nvSpPr>
+          <p:cNvPr id="5" name="备注占位符 4"/>
+          <p:cNvSpPr>
+            <a:spLocks noGrp="1"/>
+          </p:cNvSpPr>
+          <p:nvPr>
+            <p:ph type="body" sz="quarter" idx="3"/>
+          </p:nvPr>
+        </p:nvSpPr>
+        <p:spPr>
+          <a:xfrm>
+            <a:off x="685800" y="4400550"/>
+            <a:ext cx="5486400" cy="3600450"/>
+          </a:xfrm>
+          <a:prstGeom prst="rect">
+            <a:avLst/>
+          </a:prstGeom>
+        </p:spPr>
+        <p:txBody>
+          <a:bodyPr vert="horz" lIns="91440" tIns="45720" rIns="91440" bIns="45720" rtlCol="0"/>
+          <a:lstStyle/>
+          <a:p>
+            <a:pPr lvl="0"/>
+            <a:r>
+              <a:rPr lang="zh-CN" altLang="en-US" smtClean="0"/>
+              <a:t>单击此处编辑母版文本样式</a:t>
+            </a:r>
+            <a:endParaRPr lang="zh-CN" altLang="en-US" smtClean="0"/>
+          </a:p>
+          <a:p>
+            <a:pPr lvl="1"/>
+            <a:r>
+              <a:rPr lang="zh-CN" altLang="en-US" smtClean="0"/>
+              <a:t>第二级</a:t>
+            </a:r>
+            <a:endParaRPr lang="zh-CN" altLang="en-US" smtClean="0"/>
+          </a:p>
+          <a:p>
+            <a:pPr lvl="2"/>
+            <a:r>
+              <a:rPr lang="zh-CN" altLang="en-US" smtClean="0"/>
+              <a:t>第三级</a:t>
+            </a:r>
+            <a:endParaRPr lang="zh-CN" altLang="en-US" smtClean="0"/>
+          </a:p>
+          <a:p>
+            <a:pPr lvl="3"/>
+            <a:r>
+              <a:rPr lang="zh-CN" altLang="en-US" smtClean="0"/>
+              <a:t>第四级</a:t>
+            </a:r>
+            <a:endParaRPr lang="zh-CN" altLang="en-US" smtClean="0"/>
+          </a:p>
+          <a:p>
+            <a:pPr lvl="4"/>
+            <a:r>
+              <a:rPr lang="zh-CN" altLang="en-US" smtClean="0"/>
+              <a:t>第五级</a:t>
+            </a:r>
+            <a:endParaRPr lang="zh-CN" altLang="en-US"/>
+          </a:p>
+        </p:txBody>
+      </p:sp>
+      <p:sp>
+        <p:nvSpPr>
+          <p:cNvPr id="6" name="页脚占位符 5"/>
+          <p:cNvSpPr>
+            <a:spLocks noGrp="1"/>
+          </p:cNvSpPr>
+          <p:nvPr>
+            <p:ph type="ftr" sz="quarter" idx="4"/>
+          </p:nvPr>
+        </p:nvSpPr>
+        <p:spPr>
+          <a:xfrm>
+            <a:off x="0" y="8685213"/>
+            <a:ext cx="2971800" cy="458787"/>
+          </a:xfrm>
+          <a:prstGeom prst="rect">
+            <a:avLst/>
+          </a:prstGeom>
+        </p:spPr>
+        <p:txBody>
+          <a:bodyPr vert="horz" lIns="91440" tIns="45720" rIns="91440" bIns="45720" rtlCol="0" anchor="b"/>
+          <a:lstStyle>
+            <a:lvl1pPr algn="l">
+              <a:defRPr sz="1200"/>
+            </a:lvl1pPr>
+          </a:lstStyle>
+          <a:p>
+            <a:endParaRPr lang="zh-CN" altLang="en-US"/>
+          </a:p>
+        </p:txBody>
+      </p:sp>
+      <p:sp>
+        <p:nvSpPr>
+          <p:cNvPr id="7" name="灯片编号占位符 6"/>
+          <p:cNvSpPr>
+            <a:spLocks noGrp="1"/>
+          </p:cNvSpPr>
+          <p:nvPr>
+            <p:ph type="sldNum" sz="quarter" idx="5"/>
+          </p:nvPr>
+        </p:nvSpPr>
+        <p:spPr>
+          <a:xfrm>
+            <a:off x="3884613" y="8685213"/>
+            <a:ext cx="2971800" cy="458787"/>
+          </a:xfrm>
+          <a:prstGeom prst="rect">
+            <a:avLst/>
+          </a:prstGeom>
+        </p:spPr>
+        <p:txBody>
+          <a:bodyPr vert="horz" lIns="91440" tIns="45720" rIns="91440" bIns="45720" rtlCol="0" anchor="b"/>
+          <a:lstStyle>
+            <a:lvl1pPr algn="r">
+              <a:defRPr sz="1200"/>
+            </a:lvl1pPr>
+          </a:lstStyle>
+          <a:p>
+            <a:fld id="{A6837353-30EB-4A48-80EB-173D804AEFBD}" type="slidenum">
+              <a:rPr lang="zh-CN" altLang="en-US" smtClean="0"/>
+            </a:fld>
+            <a:endParaRPr lang="zh-CN" altLang="en-US"/>
+          </a:p>
+        </p:txBody>
+      </p:sp>
+    </p:spTree>
+  </p:cSld>
+  <p:clrMap bg1="lt1" tx1="dk1" bg2="lt2" tx2="dk2" accent1="accent1" accent2="accent2" accent3="accent3" accent4="accent4" accent5="accent5" accent6="accent6" hlink="hlink" folHlink="folHlink"/>
+  <p:notesStyle>
+    <a:lvl1pPr marL="0" algn="l" defTabSz="914400" rtl="0" eaLnBrk="1" latinLnBrk="0" hangingPunct="1">
+      <a:defRPr sz="1200" kern="1200">
+        <a:solidFill>
+          <a:schemeClr val="tx1"/>
+        </a:solidFill>
+        <a:latin typeface="+mn-lt"/>
+        <a:ea typeface="+mn-ea"/>
+        <a:cs typeface="+mn-cs"/>
+      </a:defRPr>
+    </a:lvl1pPr>
+    <a:lvl2pPr marL="457200" algn="l" defTabSz="914400" rtl="0" eaLnBrk="1" latinLnBrk="0" hangingPunct="1">
+      <a:defRPr sz="1200" kern="1200">
+        <a:solidFill>
+          <a:schemeClr val="tx1"/>
+        </a:solidFill>
+        <a:latin typeface="+mn-lt"/>
+        <a:ea typeface="+mn-ea"/>
+        <a:cs typeface="+mn-cs"/>
+      </a:defRPr>
+    </a:lvl2pPr>
+    <a:lvl3pPr marL="914400" algn="l" defTabSz="914400" rtl="0" eaLnBrk="1" latinLnBrk="0" hangingPunct="1">
+      <a:defRPr sz="1200" kern="1200">
+        <a:solidFill>
+          <a:schemeClr val="tx1"/>
+        </a:solidFill>
+        <a:latin typeface="+mn-lt"/>
+        <a:ea typeface="+mn-ea"/>
+        <a:cs typeface="+mn-cs"/>
+      </a:defRPr>
+    </a:lvl3pPr>
+    <a:lvl4pPr marL="1371600" algn="l" defTabSz="914400" rtl="0" eaLnBrk="1" latinLnBrk="0" hangingPunct="1">
+      <a:defRPr sz="1200" kern="1200">
+        <a:solidFill>
+          <a:schemeClr val="tx1"/>
+        </a:solidFill>
+        <a:latin typeface="+mn-lt"/>
+        <a:ea typeface="+mn-ea"/>
+        <a:cs typeface="+mn-cs"/>
+      </a:defRPr>
+    </a:lvl4pPr>
+    <a:lvl5pPr marL="1828800" algn="l" defTabSz="914400" rtl="0" eaLnBrk="1" latinLnBrk="0" hangingPunct="1">
+      <a:defRPr sz="1200" kern="1200">
+        <a:solidFill>
+          <a:schemeClr val="tx1"/>
+        </a:solidFill>
+        <a:latin typeface="+mn-lt"/>
+        <a:ea typeface="+mn-ea"/>
+        <a:cs typeface="+mn-cs"/>
+      </a:defRPr>
+    </a:lvl5pPr>
+    <a:lvl6pPr marL="2286000" algn="l" defTabSz="914400" rtl="0" eaLnBrk="1" latinLnBrk="0" hangingPunct="1">
+      <a:defRPr sz="1200" kern="1200">
+        <a:solidFill>
+          <a:schemeClr val="tx1"/>
+        </a:solidFill>
+        <a:latin typeface="+mn-lt"/>
+        <a:ea typeface="+mn-ea"/>
+        <a:cs typeface="+mn-cs"/>
+      </a:defRPr>
+    </a:lvl6pPr>
+    <a:lvl7pPr marL="2743200" algn="l" defTabSz="914400" rtl="0" eaLnBrk="1" latinLnBrk="0" hangingPunct="1">
+      <a:defRPr sz="1200" kern="1200">
+        <a:solidFill>
+          <a:schemeClr val="tx1"/>
+        </a:solidFill>
+        <a:latin typeface="+mn-lt"/>
+        <a:ea typeface="+mn-ea"/>
+        <a:cs typeface="+mn-cs"/>
+      </a:defRPr>
+    </a:lvl7pPr>
+    <a:lvl8pPr marL="3200400" algn="l" defTabSz="914400" rtl="0" eaLnBrk="1" latinLnBrk="0" hangingPunct="1">
+      <a:defRPr sz="1200" kern="1200">
+        <a:solidFill>
+          <a:schemeClr val="tx1"/>
+        </a:solidFill>
+        <a:latin typeface="+mn-lt"/>
+        <a:ea typeface="+mn-ea"/>
+        <a:cs typeface="+mn-cs"/>
+      </a:defRPr>
+    </a:lvl8pPr>
+    <a:lvl9pPr marL="3657600" algn="l" defTabSz="914400" rtl="0" eaLnBrk="1" latinLnBrk="0" hangingPunct="1">
+      <a:defRPr sz="1200" kern="1200">
+        <a:solidFill>
+          <a:schemeClr val="tx1"/>
+        </a:solidFill>
+        <a:latin typeface="+mn-lt"/>
+        <a:ea typeface="+mn-ea"/>
+        <a:cs typeface="+mn-cs"/>
+      </a:defRPr>
+    </a:lvl9pPr>
+  </p:notesStyle>
+</p:notesMaster>
+</file>
+
+<file path=ppt/notesSlides/notesSlide1.xml><?xml version="1.0" encoding="utf-8"?>
+<p:notes xmlns:a="http://schemas.openxmlformats.org/drawingml/2006/main" xmlns:r="http://schemas.openxmlformats.org/officeDocument/2006/relationships" xmlns:p="http://schemas.openxmlformats.org/presentationml/2006/main">
+  <p:cSld>
+    <p:spTree>
+      <p:nvGrpSpPr>
+        <p:cNvPr id="1" name=""/>
+        <p:cNvGrpSpPr/>
+        <p:nvPr/>
+      </p:nvGrpSpPr>
+      <p:grpSpPr/>
+      <p:sp>
+        <p:nvSpPr>
+          <p:cNvPr id="2" name="幻灯片图像占位符 1"/>
+          <p:cNvSpPr>
+            <a:spLocks noGrp="1"/>
+          </p:cNvSpPr>
+          <p:nvPr>
+            <p:ph type="sldImg" idx="2"/>
+          </p:nvPr>
+        </p:nvSpPr>
+        <p:spPr/>
+      </p:sp>
+      <p:sp>
+        <p:nvSpPr>
+          <p:cNvPr id="3" name="文本占位符 2"/>
+          <p:cNvSpPr>
+            <a:spLocks noGrp="1"/>
+          </p:cNvSpPr>
+          <p:nvPr>
+            <p:ph type="body" idx="3"/>
+          </p:nvPr>
+        </p:nvSpPr>
+        <p:spPr/>
+        <p:txBody>
+          <a:bodyPr/>
+          <a:p>
+            <a:r>
+              <a:rPr lang="zh-CN" altLang="en-US"/>
+              <a:t>大家好</a:t>
+            </a:r>
+            <a:endParaRPr lang="zh-CN" altLang="en-US"/>
+          </a:p>
+          <a:p>
+            <a:endParaRPr lang="en-US" altLang="zh-CN"/>
+          </a:p>
+          <a:p>
+            <a:r>
+              <a:rPr lang="zh-CN" altLang="en-US"/>
+              <a:t>我们这次的 </a:t>
+            </a:r>
+            <a:r>
+              <a:rPr lang="en-US" altLang="zh-CN"/>
+              <a:t>CS181 Final Project </a:t>
+            </a:r>
+            <a:r>
+              <a:rPr lang="zh-CN" altLang="en-US"/>
+              <a:t>主题是 </a:t>
+            </a:r>
+            <a:r>
+              <a:rPr lang="en-US" altLang="zh-CN"/>
+              <a:t>Fight the Landlord，</a:t>
+            </a:r>
+            <a:r>
+              <a:rPr lang="zh-CN" altLang="en-US"/>
+              <a:t>也就是斗地主 </a:t>
+            </a:r>
+            <a:r>
+              <a:rPr lang="en-US" altLang="zh-CN"/>
+              <a:t>AI</a:t>
+            </a:r>
+            <a:endParaRPr lang="en-US" altLang="zh-CN"/>
+          </a:p>
+          <a:p>
+            <a:endParaRPr lang="en-US" altLang="zh-CN"/>
+          </a:p>
+          <a:p>
+            <a:r>
+              <a:rPr lang="zh-CN" altLang="en-US"/>
+              <a:t>在这次展示中，我们会介绍为什么斗地主是一个具有代表性的 </a:t>
+            </a:r>
+            <a:r>
+              <a:rPr lang="en-US" altLang="zh-CN"/>
+              <a:t>AI </a:t>
+            </a:r>
+            <a:r>
+              <a:rPr lang="zh-CN" altLang="en-US"/>
+              <a:t>问题，以及如何利用不同的人工智能方法来解决这个游戏中的决策问题。</a:t>
+            </a:r>
+            <a:endParaRPr lang="zh-CN" altLang="en-US"/>
+          </a:p>
+        </p:txBody>
+      </p:sp>
+    </p:spTree>
+  </p:cSld>
+  <p:clrMapOvr>
+    <a:masterClrMapping/>
+  </p:clrMapOvr>
+</p:notes>
+</file>
+
+<file path=ppt/notesSlides/notesSlide10.xml><?xml version="1.0" encoding="utf-8"?>
+<p:notes xmlns:a="http://schemas.openxmlformats.org/drawingml/2006/main" xmlns:r="http://schemas.openxmlformats.org/officeDocument/2006/relationships" xmlns:p="http://schemas.openxmlformats.org/presentationml/2006/main">
+  <p:cSld>
+    <p:spTree>
+      <p:nvGrpSpPr>
+        <p:cNvPr id="1" name=""/>
+        <p:cNvGrpSpPr/>
+        <p:nvPr/>
+      </p:nvGrpSpPr>
+      <p:grpSpPr/>
+      <p:sp>
+        <p:nvSpPr>
+          <p:cNvPr id="2" name="幻灯片图像占位符 1"/>
+          <p:cNvSpPr>
+            <a:spLocks noGrp="1"/>
+          </p:cNvSpPr>
+          <p:nvPr>
+            <p:ph type="sldImg" idx="2"/>
+          </p:nvPr>
+        </p:nvSpPr>
+        <p:spPr/>
+      </p:sp>
+      <p:sp>
+        <p:nvSpPr>
+          <p:cNvPr id="3" name="文本占位符 2"/>
+          <p:cNvSpPr>
+            <a:spLocks noGrp="1"/>
+          </p:cNvSpPr>
+          <p:nvPr>
+            <p:ph type="body" idx="3"/>
+          </p:nvPr>
+        </p:nvSpPr>
+        <p:spPr/>
+        <p:txBody>
+          <a:bodyPr/>
+          <a:p>
+            <a:r>
+              <a:rPr lang="zh-CN" altLang="en-US"/>
+              <a:t>另一种建模框架是 马尔可夫决策过程，也就是 </a:t>
+            </a:r>
+            <a:r>
+              <a:rPr lang="en-US" altLang="zh-CN"/>
+              <a:t>MDP。</a:t>
+            </a:r>
+            <a:endParaRPr lang="en-US" altLang="zh-CN"/>
+          </a:p>
+          <a:p>
+            <a:endParaRPr lang="en-US" altLang="zh-CN"/>
+          </a:p>
+          <a:p>
+            <a:r>
+              <a:rPr lang="zh-CN" altLang="en-US"/>
+              <a:t>在 </a:t>
+            </a:r>
+            <a:r>
+              <a:rPr lang="en-US" altLang="zh-CN"/>
+              <a:t>MDP </a:t>
+            </a:r>
+            <a:r>
+              <a:rPr lang="zh-CN" altLang="en-US"/>
+              <a:t>中，我们定义：</a:t>
+            </a:r>
+            <a:endParaRPr lang="en-US" altLang="zh-CN"/>
+          </a:p>
+          <a:p>
+            <a:r>
+              <a:rPr lang="zh-CN" altLang="en-US"/>
+              <a:t>状态、</a:t>
+            </a:r>
+            <a:endParaRPr lang="en-US" altLang="zh-CN"/>
+          </a:p>
+          <a:p>
+            <a:r>
+              <a:rPr lang="zh-CN" altLang="en-US"/>
+              <a:t>动作、</a:t>
+            </a:r>
+            <a:endParaRPr lang="en-US" altLang="zh-CN"/>
+          </a:p>
+          <a:p>
+            <a:r>
+              <a:rPr lang="zh-CN" altLang="en-US"/>
+              <a:t>状态转移，</a:t>
+            </a:r>
+            <a:endParaRPr lang="en-US" altLang="zh-CN"/>
+          </a:p>
+          <a:p>
+            <a:r>
+              <a:rPr lang="zh-CN" altLang="en-US"/>
+              <a:t>以及奖励函数。</a:t>
+            </a:r>
+            <a:endParaRPr lang="en-US" altLang="zh-CN"/>
+          </a:p>
+          <a:p>
+            <a:r>
+              <a:rPr lang="zh-CN" altLang="en-US"/>
+              <a:t>其中一个核心概念是 状态价值函数。</a:t>
+            </a:r>
+            <a:endParaRPr lang="en-US" altLang="zh-CN"/>
+          </a:p>
+          <a:p>
+            <a:r>
+              <a:rPr lang="zh-CN" altLang="en-US"/>
+              <a:t>它用于衡量一个游戏状态的好坏程度。</a:t>
+            </a:r>
+            <a:endParaRPr lang="en-US" altLang="zh-CN"/>
+          </a:p>
+          <a:p>
+            <a:r>
+              <a:rPr lang="en-US" altLang="zh-CN"/>
+              <a:t>AI </a:t>
+            </a:r>
+            <a:r>
+              <a:rPr lang="zh-CN" altLang="en-US"/>
+              <a:t>可以根据这些价值估计来选择行动，从而优化长期收益。</a:t>
+            </a:r>
+            <a:endParaRPr lang="en-US" altLang="zh-CN"/>
+          </a:p>
+          <a:p>
+            <a:r>
+              <a:rPr lang="zh-CN" altLang="en-US"/>
+              <a:t>这种方法提供了一种比较系统的决策分析框架。</a:t>
+            </a:r>
+            <a:endParaRPr lang="zh-CN" altLang="en-US"/>
+          </a:p>
+        </p:txBody>
+      </p:sp>
+    </p:spTree>
+  </p:cSld>
+  <p:clrMapOvr>
+    <a:masterClrMapping/>
+  </p:clrMapOvr>
+</p:notes>
+</file>
+
+<file path=ppt/notesSlides/notesSlide11.xml><?xml version="1.0" encoding="utf-8"?>
+<p:notes xmlns:a="http://schemas.openxmlformats.org/drawingml/2006/main" xmlns:r="http://schemas.openxmlformats.org/officeDocument/2006/relationships" xmlns:p="http://schemas.openxmlformats.org/presentationml/2006/main">
+  <p:cSld>
+    <p:spTree>
+      <p:nvGrpSpPr>
+        <p:cNvPr id="1" name=""/>
+        <p:cNvGrpSpPr/>
+        <p:nvPr/>
+      </p:nvGrpSpPr>
+      <p:grpSpPr/>
+      <p:sp>
+        <p:nvSpPr>
+          <p:cNvPr id="2" name="幻灯片图像占位符 1"/>
+          <p:cNvSpPr>
+            <a:spLocks noGrp="1"/>
+          </p:cNvSpPr>
+          <p:nvPr>
+            <p:ph type="sldImg" idx="2"/>
+          </p:nvPr>
+        </p:nvSpPr>
+        <p:spPr/>
+      </p:sp>
+      <p:sp>
+        <p:nvSpPr>
+          <p:cNvPr id="3" name="文本占位符 2"/>
+          <p:cNvSpPr>
+            <a:spLocks noGrp="1"/>
+          </p:cNvSpPr>
+          <p:nvPr>
+            <p:ph type="body" idx="3"/>
+          </p:nvPr>
+        </p:nvSpPr>
+        <p:spPr/>
+        <p:txBody>
+          <a:bodyPr/>
+          <a:p>
+            <a:r>
+              <a:rPr lang="zh-CN" altLang="en-US"/>
+              <a:t>最后，我们考虑 强化学习方法。</a:t>
+            </a:r>
+            <a:endParaRPr lang="zh-CN" altLang="en-US"/>
+          </a:p>
+          <a:p>
+            <a:r>
+              <a:rPr lang="zh-CN" altLang="en-US"/>
+              <a:t>利用 </a:t>
+            </a:r>
+            <a:r>
+              <a:rPr lang="en-US" altLang="zh-CN"/>
+              <a:t>Q-learning，AI </a:t>
+            </a:r>
+            <a:r>
+              <a:rPr lang="zh-CN" altLang="en-US"/>
+              <a:t>可以通过大量自我对局学习不同动作的价值。</a:t>
+            </a:r>
+            <a:endParaRPr lang="zh-CN" altLang="en-US"/>
+          </a:p>
+          <a:p>
+            <a:r>
+              <a:rPr lang="zh-CN" altLang="en-US"/>
+              <a:t>为了平衡探索和利用，我们采用 </a:t>
+            </a:r>
+            <a:r>
+              <a:rPr lang="en-US" altLang="zh-CN"/>
+              <a:t>ε-greedy </a:t>
+            </a:r>
+            <a:r>
+              <a:rPr lang="zh-CN" altLang="en-US"/>
+              <a:t>策略。</a:t>
+            </a:r>
+            <a:endParaRPr lang="zh-CN" altLang="en-US"/>
+          </a:p>
+          <a:p>
+            <a:r>
+              <a:rPr lang="zh-CN" altLang="en-US"/>
+              <a:t>此外，还可以采用 策略搜索方法，直接优化出牌策略本身。</a:t>
+            </a:r>
+            <a:endParaRPr lang="zh-CN" altLang="en-US"/>
+          </a:p>
+          <a:p>
+            <a:r>
+              <a:rPr lang="zh-CN" altLang="en-US"/>
+              <a:t>强化学习的优势在于：</a:t>
+            </a:r>
+            <a:endParaRPr lang="zh-CN" altLang="en-US"/>
+          </a:p>
+          <a:p>
+            <a:r>
+              <a:rPr lang="en-US" altLang="zh-CN"/>
+              <a:t>AI </a:t>
+            </a:r>
+            <a:r>
+              <a:rPr lang="zh-CN" altLang="en-US"/>
+              <a:t>不需要完全依赖人工设计规则，而是能够通过经验不断提升自身表现。</a:t>
+            </a:r>
+            <a:endParaRPr lang="zh-CN" altLang="en-US"/>
+          </a:p>
+        </p:txBody>
+      </p:sp>
+    </p:spTree>
+  </p:cSld>
+  <p:clrMapOvr>
+    <a:masterClrMapping/>
+  </p:clrMapOvr>
+</p:notes>
+</file>
+
+<file path=ppt/notesSlides/notesSlide12.xml><?xml version="1.0" encoding="utf-8"?>
+<p:notes xmlns:a="http://schemas.openxmlformats.org/drawingml/2006/main" xmlns:r="http://schemas.openxmlformats.org/officeDocument/2006/relationships" xmlns:p="http://schemas.openxmlformats.org/presentationml/2006/main">
+  <p:cSld>
+    <p:spTree>
+      <p:nvGrpSpPr>
+        <p:cNvPr id="1" name=""/>
+        <p:cNvGrpSpPr/>
+        <p:nvPr/>
+      </p:nvGrpSpPr>
+      <p:grpSpPr/>
+      <p:sp>
+        <p:nvSpPr>
+          <p:cNvPr id="2" name="幻灯片图像占位符 1"/>
+          <p:cNvSpPr>
+            <a:spLocks noGrp="1"/>
+          </p:cNvSpPr>
+          <p:nvPr>
+            <p:ph type="sldImg" idx="2"/>
+          </p:nvPr>
+        </p:nvSpPr>
+        <p:spPr/>
+      </p:sp>
+      <p:sp>
+        <p:nvSpPr>
+          <p:cNvPr id="3" name="文本占位符 2"/>
+          <p:cNvSpPr>
+            <a:spLocks noGrp="1"/>
+          </p:cNvSpPr>
+          <p:nvPr>
+            <p:ph type="body" idx="3"/>
+          </p:nvPr>
+        </p:nvSpPr>
+        <p:spPr/>
+        <p:txBody>
+          <a:bodyPr/>
+          <a:p>
+            <a:r>
+              <a:rPr lang="zh-CN" altLang="en-US"/>
+              <a:t>以上就是我们关于斗地主的项目介绍</a:t>
+            </a:r>
+            <a:endParaRPr lang="en-US" altLang="zh-CN"/>
+          </a:p>
+          <a:p>
+            <a:r>
+              <a:rPr lang="zh-CN" altLang="en-US"/>
+              <a:t>感谢大家的聆听</a:t>
+            </a:r>
+            <a:endParaRPr lang="en-US" altLang="zh-CN"/>
+          </a:p>
+          <a:p>
+            <a:r>
+              <a:rPr lang="zh-CN" altLang="en-US"/>
+              <a:t>欢迎提问</a:t>
+            </a:r>
+            <a:endParaRPr lang="zh-CN" altLang="en-US"/>
+          </a:p>
+        </p:txBody>
+      </p:sp>
+    </p:spTree>
+  </p:cSld>
+  <p:clrMapOvr>
+    <a:masterClrMapping/>
+  </p:clrMapOvr>
+</p:notes>
+</file>
+
+<file path=ppt/notesSlides/notesSlide2.xml><?xml version="1.0" encoding="utf-8"?>
+<p:notes xmlns:a="http://schemas.openxmlformats.org/drawingml/2006/main" xmlns:r="http://schemas.openxmlformats.org/officeDocument/2006/relationships" xmlns:p="http://schemas.openxmlformats.org/presentationml/2006/main">
+  <p:cSld>
+    <p:spTree>
+      <p:nvGrpSpPr>
+        <p:cNvPr id="1" name=""/>
+        <p:cNvGrpSpPr/>
+        <p:nvPr/>
+      </p:nvGrpSpPr>
+      <p:grpSpPr/>
+      <p:sp>
+        <p:nvSpPr>
+          <p:cNvPr id="2" name="幻灯片图像占位符 1"/>
+          <p:cNvSpPr>
+            <a:spLocks noGrp="1"/>
+          </p:cNvSpPr>
+          <p:nvPr>
+            <p:ph type="sldImg" idx="2"/>
+          </p:nvPr>
+        </p:nvSpPr>
+        <p:spPr/>
+      </p:sp>
+      <p:sp>
+        <p:nvSpPr>
+          <p:cNvPr id="3" name="文本占位符 2"/>
+          <p:cNvSpPr>
+            <a:spLocks noGrp="1"/>
+          </p:cNvSpPr>
+          <p:nvPr>
+            <p:ph type="body" idx="3"/>
+          </p:nvPr>
+        </p:nvSpPr>
+        <p:spPr/>
+        <p:txBody>
+          <a:bodyPr/>
+          <a:p>
+            <a:r>
+              <a:rPr lang="zh-CN" altLang="en-US"/>
+              <a:t>我们选择斗地主，是因为它同时包含了很多经典 </a:t>
+            </a:r>
+            <a:r>
+              <a:rPr lang="en-US" altLang="zh-CN"/>
+              <a:t>AI </a:t>
+            </a:r>
+            <a:r>
+              <a:rPr lang="zh-CN" altLang="en-US"/>
+              <a:t>问题。</a:t>
+            </a:r>
+            <a:endParaRPr lang="zh-CN" altLang="en-US"/>
+          </a:p>
+          <a:p>
+            <a:endParaRPr lang="en-US" altLang="zh-CN"/>
+          </a:p>
+          <a:p>
+            <a:r>
+              <a:rPr lang="zh-CN" altLang="en-US"/>
+              <a:t>首先，它是一个对抗性游戏，玩家需要不断和对手博弈。</a:t>
+            </a:r>
+            <a:endParaRPr lang="zh-CN" altLang="en-US"/>
+          </a:p>
+          <a:p>
+            <a:endParaRPr lang="en-US" altLang="zh-CN"/>
+          </a:p>
+          <a:p>
+            <a:r>
+              <a:rPr lang="zh-CN" altLang="en-US"/>
+              <a:t>其次，它还包含合作因素。因为两名农民需要合作对抗地主，因此不仅存在竞争，也存在团队协作。</a:t>
+            </a:r>
+            <a:endParaRPr lang="zh-CN" altLang="en-US"/>
+          </a:p>
+          <a:p>
+            <a:endParaRPr lang="en-US" altLang="zh-CN"/>
+          </a:p>
+          <a:p>
+            <a:r>
+              <a:rPr lang="zh-CN" altLang="en-US"/>
+              <a:t>第三，斗地主属于不完全信息游戏，玩家无法直接看到对手手牌。</a:t>
+            </a:r>
+            <a:endParaRPr lang="zh-CN" altLang="en-US"/>
+          </a:p>
+          <a:p>
+            <a:endParaRPr lang="en-US" altLang="zh-CN"/>
+          </a:p>
+          <a:p>
+            <a:r>
+              <a:rPr lang="zh-CN" altLang="en-US"/>
+              <a:t>最后，这个游戏的动作空间非常大，玩家可以打出大量不同的牌型组合。</a:t>
+            </a:r>
+            <a:endParaRPr lang="zh-CN" altLang="en-US"/>
+          </a:p>
+          <a:p>
+            <a:endParaRPr lang="en-US" altLang="zh-CN"/>
+          </a:p>
+          <a:p>
+            <a:r>
+              <a:rPr lang="zh-CN" altLang="en-US"/>
+              <a:t>因此，斗地主是一个非常适合研究 </a:t>
+            </a:r>
+            <a:r>
+              <a:rPr lang="en-US" altLang="zh-CN"/>
+              <a:t>AI </a:t>
+            </a:r>
+            <a:r>
+              <a:rPr lang="zh-CN" altLang="en-US"/>
+              <a:t>搜索、推理和学习算法的实验环境。</a:t>
+            </a:r>
+            <a:endParaRPr lang="zh-CN" altLang="en-US"/>
+          </a:p>
+        </p:txBody>
+      </p:sp>
+    </p:spTree>
+  </p:cSld>
+  <p:clrMapOvr>
+    <a:masterClrMapping/>
+  </p:clrMapOvr>
+</p:notes>
+</file>
+
+<file path=ppt/notesSlides/notesSlide3.xml><?xml version="1.0" encoding="utf-8"?>
+<p:notes xmlns:a="http://schemas.openxmlformats.org/drawingml/2006/main" xmlns:r="http://schemas.openxmlformats.org/officeDocument/2006/relationships" xmlns:p="http://schemas.openxmlformats.org/presentationml/2006/main">
+  <p:cSld>
+    <p:spTree>
+      <p:nvGrpSpPr>
+        <p:cNvPr id="1" name=""/>
+        <p:cNvGrpSpPr/>
+        <p:nvPr/>
+      </p:nvGrpSpPr>
+      <p:grpSpPr/>
+      <p:sp>
+        <p:nvSpPr>
+          <p:cNvPr id="2" name="幻灯片图像占位符 1"/>
+          <p:cNvSpPr>
+            <a:spLocks noGrp="1"/>
+          </p:cNvSpPr>
+          <p:nvPr>
+            <p:ph type="sldImg" idx="2"/>
+          </p:nvPr>
+        </p:nvSpPr>
+        <p:spPr/>
+      </p:sp>
+      <p:sp>
+        <p:nvSpPr>
+          <p:cNvPr id="3" name="文本占位符 2"/>
+          <p:cNvSpPr>
+            <a:spLocks noGrp="1"/>
+          </p:cNvSpPr>
+          <p:nvPr>
+            <p:ph type="body" idx="3"/>
+          </p:nvPr>
+        </p:nvSpPr>
+        <p:spPr/>
+        <p:txBody>
+          <a:bodyPr/>
+          <a:p>
+            <a:r>
+              <a:rPr lang="zh-CN" altLang="en-US"/>
+              <a:t>下面介绍我们的问题建模。</a:t>
+            </a:r>
+            <a:endParaRPr lang="en-US" altLang="zh-CN"/>
+          </a:p>
+          <a:p>
+            <a:r>
+              <a:rPr lang="zh-CN" altLang="en-US"/>
+              <a:t>斗地主中共有 3 名玩家，包括 1 名地主和 2 名农民。</a:t>
+            </a:r>
+            <a:endParaRPr lang="en-US" altLang="zh-CN"/>
+          </a:p>
+          <a:p>
+            <a:r>
+              <a:rPr lang="zh-CN" altLang="en-US"/>
+              <a:t>游戏使用 54 张牌，包括大小王。</a:t>
+            </a:r>
+            <a:endParaRPr lang="en-US" altLang="zh-CN"/>
+          </a:p>
+          <a:p>
+            <a:r>
+              <a:rPr lang="zh-CN" altLang="en-US"/>
+              <a:t>目标很简单：哪一方先出完所有牌，哪一方获胜。</a:t>
+            </a:r>
+            <a:endParaRPr lang="en-US" altLang="zh-CN"/>
+          </a:p>
+          <a:p>
+            <a:r>
+              <a:rPr lang="zh-CN" altLang="en-US"/>
+              <a:t>游戏状态主要包括：</a:t>
+            </a:r>
+            <a:endParaRPr lang="en-US" altLang="zh-CN"/>
+          </a:p>
+          <a:p>
+            <a:r>
+              <a:rPr lang="zh-CN" altLang="en-US"/>
+              <a:t>玩家当前手牌、</a:t>
+            </a:r>
+            <a:endParaRPr lang="en-US" altLang="zh-CN"/>
+          </a:p>
+          <a:p>
+            <a:r>
+              <a:rPr lang="zh-CN" altLang="en-US"/>
+              <a:t>公共出牌历史、</a:t>
+            </a:r>
+            <a:endParaRPr lang="en-US" altLang="zh-CN"/>
+          </a:p>
+          <a:p>
+            <a:r>
+              <a:rPr lang="zh-CN" altLang="en-US"/>
+              <a:t>当前轮次，</a:t>
+            </a:r>
+            <a:endParaRPr lang="en-US" altLang="zh-CN"/>
+          </a:p>
+          <a:p>
+            <a:r>
+              <a:rPr lang="zh-CN" altLang="en-US"/>
+              <a:t>以及各玩家剩余牌数。</a:t>
+            </a:r>
+            <a:endParaRPr lang="en-US" altLang="zh-CN"/>
+          </a:p>
+          <a:p>
+            <a:r>
+              <a:rPr lang="zh-CN" altLang="en-US"/>
+              <a:t>动作空间则定义为：当前状态下所有合法的出牌组合。</a:t>
+            </a:r>
+            <a:endParaRPr lang="en-US" altLang="zh-CN"/>
+          </a:p>
+          <a:p>
+            <a:r>
+              <a:rPr lang="zh-CN" altLang="en-US"/>
+              <a:t>由于手牌分布和行动组合数量巨大，因此整个游戏拥有非常庞大的状态空间。</a:t>
+            </a:r>
+            <a:endParaRPr lang="zh-CN" altLang="en-US"/>
+          </a:p>
+        </p:txBody>
+      </p:sp>
+    </p:spTree>
+  </p:cSld>
+  <p:clrMapOvr>
+    <a:masterClrMapping/>
+  </p:clrMapOvr>
+</p:notes>
+</file>
+
+<file path=ppt/notesSlides/notesSlide4.xml><?xml version="1.0" encoding="utf-8"?>
+<p:notes xmlns:a="http://schemas.openxmlformats.org/drawingml/2006/main" xmlns:r="http://schemas.openxmlformats.org/officeDocument/2006/relationships" xmlns:p="http://schemas.openxmlformats.org/presentationml/2006/main">
+  <p:cSld>
+    <p:spTree>
+      <p:nvGrpSpPr>
+        <p:cNvPr id="1" name=""/>
+        <p:cNvGrpSpPr/>
+        <p:nvPr/>
+      </p:nvGrpSpPr>
+      <p:grpSpPr/>
+      <p:sp>
+        <p:nvSpPr>
+          <p:cNvPr id="2" name="幻灯片图像占位符 1"/>
+          <p:cNvSpPr>
+            <a:spLocks noGrp="1"/>
+          </p:cNvSpPr>
+          <p:nvPr>
+            <p:ph type="sldImg" idx="2"/>
+          </p:nvPr>
+        </p:nvSpPr>
+        <p:spPr/>
+      </p:sp>
+      <p:sp>
+        <p:nvSpPr>
+          <p:cNvPr id="3" name="文本占位符 2"/>
+          <p:cNvSpPr>
+            <a:spLocks noGrp="1"/>
+          </p:cNvSpPr>
+          <p:nvPr>
+            <p:ph type="body" idx="3"/>
+          </p:nvPr>
+        </p:nvSpPr>
+        <p:spPr/>
+        <p:txBody>
+          <a:bodyPr/>
+          <a:p>
+            <a:r>
+              <a:rPr lang="zh-CN" altLang="en-US"/>
+              <a:t>这里介绍斗地主的一些基础规则。</a:t>
+            </a:r>
+            <a:endParaRPr lang="zh-CN" altLang="en-US"/>
+          </a:p>
+          <a:p>
+            <a:endParaRPr lang="en-US" altLang="zh-CN"/>
+          </a:p>
+          <a:p>
+            <a:r>
+              <a:rPr lang="zh-CN" altLang="en-US"/>
+              <a:t>牌的大小顺序为：</a:t>
+            </a:r>
+            <a:endParaRPr lang="zh-CN" altLang="en-US"/>
+          </a:p>
+          <a:p>
+            <a:endParaRPr lang="en-US" altLang="zh-CN"/>
+          </a:p>
+          <a:p>
+            <a:r>
+              <a:rPr lang="zh-CN" altLang="en-US"/>
+              <a:t>大王、小王、2、</a:t>
+            </a:r>
+            <a:r>
+              <a:rPr lang="en-US" altLang="zh-CN"/>
+              <a:t>A、K、Q、J、10，</a:t>
+            </a:r>
+            <a:r>
+              <a:rPr lang="zh-CN" altLang="en-US"/>
+              <a:t>一直到3。</a:t>
+            </a:r>
+            <a:endParaRPr lang="zh-CN" altLang="en-US"/>
+          </a:p>
+          <a:p>
+            <a:endParaRPr lang="en-US" altLang="zh-CN"/>
+          </a:p>
+          <a:p>
+            <a:r>
+              <a:rPr lang="zh-CN" altLang="en-US"/>
+              <a:t>与扑克不同的是，花色不会影响牌力大小。</a:t>
+            </a:r>
+            <a:endParaRPr lang="zh-CN" altLang="en-US"/>
+          </a:p>
+          <a:p>
+            <a:endParaRPr lang="en-US" altLang="zh-CN"/>
+          </a:p>
+          <a:p>
+            <a:r>
+              <a:rPr lang="zh-CN" altLang="en-US"/>
+              <a:t>游戏开始时，每位玩家先发 17 张牌。</a:t>
+            </a:r>
+            <a:endParaRPr lang="zh-CN" altLang="en-US"/>
+          </a:p>
+          <a:p>
+            <a:endParaRPr lang="en-US" altLang="zh-CN"/>
+          </a:p>
+          <a:p>
+            <a:r>
+              <a:rPr lang="zh-CN" altLang="en-US"/>
+              <a:t>剩余 3 张底牌 在叫地主结束后给地主。</a:t>
+            </a:r>
+            <a:endParaRPr lang="zh-CN" altLang="en-US"/>
+          </a:p>
+          <a:p>
+            <a:endParaRPr lang="en-US" altLang="zh-CN"/>
+          </a:p>
+          <a:p>
+            <a:r>
+              <a:rPr lang="zh-CN" altLang="en-US"/>
+              <a:t>因此地主最终拥有 20 张牌，单独作战；而两名农民组成同一阵营进行合作。</a:t>
+            </a:r>
+            <a:endParaRPr lang="zh-CN" altLang="en-US"/>
+          </a:p>
+        </p:txBody>
+      </p:sp>
+    </p:spTree>
+  </p:cSld>
+  <p:clrMapOvr>
+    <a:masterClrMapping/>
+  </p:clrMapOvr>
+</p:notes>
+</file>
+
+<file path=ppt/notesSlides/notesSlide5.xml><?xml version="1.0" encoding="utf-8"?>
+<p:notes xmlns:a="http://schemas.openxmlformats.org/drawingml/2006/main" xmlns:r="http://schemas.openxmlformats.org/officeDocument/2006/relationships" xmlns:p="http://schemas.openxmlformats.org/presentationml/2006/main">
+  <p:cSld>
+    <p:spTree>
+      <p:nvGrpSpPr>
+        <p:cNvPr id="1" name=""/>
+        <p:cNvGrpSpPr/>
+        <p:nvPr/>
+      </p:nvGrpSpPr>
+      <p:grpSpPr/>
+      <p:sp>
+        <p:nvSpPr>
+          <p:cNvPr id="2" name="幻灯片图像占位符 1"/>
+          <p:cNvSpPr>
+            <a:spLocks noGrp="1"/>
+          </p:cNvSpPr>
+          <p:nvPr>
+            <p:ph type="sldImg" idx="2"/>
+          </p:nvPr>
+        </p:nvSpPr>
+        <p:spPr/>
+      </p:sp>
+      <p:sp>
+        <p:nvSpPr>
+          <p:cNvPr id="3" name="文本占位符 2"/>
+          <p:cNvSpPr>
+            <a:spLocks noGrp="1"/>
+          </p:cNvSpPr>
+          <p:nvPr>
+            <p:ph type="body" idx="3"/>
+          </p:nvPr>
+        </p:nvSpPr>
+        <p:spPr/>
+        <p:txBody>
+          <a:bodyPr/>
+          <a:p>
+            <a:r>
+              <a:rPr lang="zh-CN" altLang="en-US"/>
+              <a:t>斗地主允许很多不同的牌型组合。</a:t>
+            </a:r>
+            <a:endParaRPr lang="zh-CN" altLang="en-US"/>
+          </a:p>
+          <a:p>
+            <a:endParaRPr lang="en-US" altLang="zh-CN"/>
+          </a:p>
+          <a:p>
+            <a:r>
+              <a:rPr lang="zh-CN" altLang="en-US"/>
+              <a:t>常见牌型包括：</a:t>
+            </a:r>
+            <a:endParaRPr lang="zh-CN" altLang="en-US"/>
+          </a:p>
+          <a:p>
+            <a:endParaRPr lang="en-US" altLang="zh-CN"/>
+          </a:p>
+          <a:p>
+            <a:r>
+              <a:rPr lang="zh-CN" altLang="en-US"/>
+              <a:t>单张、对子、三张。</a:t>
+            </a:r>
+            <a:endParaRPr lang="zh-CN" altLang="en-US"/>
+          </a:p>
+          <a:p>
+            <a:endParaRPr lang="en-US" altLang="zh-CN"/>
+          </a:p>
+          <a:p>
+            <a:r>
+              <a:rPr lang="zh-CN" altLang="en-US"/>
+              <a:t>也可以有更复杂的形式，例如：</a:t>
+            </a:r>
+            <a:endParaRPr lang="zh-CN" altLang="en-US"/>
+          </a:p>
+          <a:p>
+            <a:endParaRPr lang="en-US" altLang="zh-CN"/>
+          </a:p>
+          <a:p>
+            <a:r>
+              <a:rPr lang="zh-CN" altLang="en-US"/>
+              <a:t>三带一、三带二。</a:t>
+            </a:r>
+            <a:endParaRPr lang="zh-CN" altLang="en-US"/>
+          </a:p>
+          <a:p>
+            <a:endParaRPr lang="en-US" altLang="zh-CN"/>
+          </a:p>
+          <a:p>
+            <a:r>
+              <a:rPr lang="zh-CN" altLang="en-US"/>
+              <a:t>此外还有 顺子，即连续的单牌组合。</a:t>
+            </a:r>
+            <a:endParaRPr lang="zh-CN" altLang="en-US"/>
+          </a:p>
+          <a:p>
+            <a:endParaRPr lang="en-US" altLang="zh-CN"/>
+          </a:p>
+          <a:p>
+            <a:r>
+              <a:rPr lang="zh-CN" altLang="en-US"/>
+              <a:t>游戏中还存在特殊强力牌型。</a:t>
+            </a:r>
+            <a:endParaRPr lang="zh-CN" altLang="en-US"/>
+          </a:p>
+          <a:p>
+            <a:endParaRPr lang="en-US" altLang="zh-CN"/>
+          </a:p>
+          <a:p>
+            <a:r>
+              <a:rPr lang="zh-CN" altLang="en-US"/>
+              <a:t>例如 炸弹，即四张相同点数的牌。</a:t>
+            </a:r>
+            <a:endParaRPr lang="zh-CN" altLang="en-US"/>
+          </a:p>
+          <a:p>
+            <a:endParaRPr lang="en-US" altLang="zh-CN"/>
+          </a:p>
+          <a:p>
+            <a:r>
+              <a:rPr lang="zh-CN" altLang="en-US"/>
+              <a:t>以及 王炸，也就是大小王组合，它是游戏中最强的牌型。</a:t>
+            </a:r>
+            <a:endParaRPr lang="zh-CN" altLang="en-US"/>
+          </a:p>
+          <a:p>
+            <a:endParaRPr lang="en-US" altLang="zh-CN"/>
+          </a:p>
+          <a:p>
+            <a:r>
+              <a:rPr lang="zh-CN" altLang="en-US"/>
+              <a:t>这些丰富的组合结构进一步增加了游戏动作空间的复杂度。</a:t>
+            </a:r>
+            <a:endParaRPr lang="zh-CN" altLang="en-US"/>
+          </a:p>
+        </p:txBody>
+      </p:sp>
+    </p:spTree>
+  </p:cSld>
+  <p:clrMapOvr>
+    <a:masterClrMapping/>
+  </p:clrMapOvr>
+</p:notes>
+</file>
+
+<file path=ppt/notesSlides/notesSlide6.xml><?xml version="1.0" encoding="utf-8"?>
+<p:notes xmlns:a="http://schemas.openxmlformats.org/drawingml/2006/main" xmlns:r="http://schemas.openxmlformats.org/officeDocument/2006/relationships" xmlns:p="http://schemas.openxmlformats.org/presentationml/2006/main">
+  <p:cSld>
+    <p:spTree>
+      <p:nvGrpSpPr>
+        <p:cNvPr id="1" name=""/>
+        <p:cNvGrpSpPr/>
+        <p:nvPr/>
+      </p:nvGrpSpPr>
+      <p:grpSpPr/>
+      <p:sp>
+        <p:nvSpPr>
+          <p:cNvPr id="2" name="幻灯片图像占位符 1"/>
+          <p:cNvSpPr>
+            <a:spLocks noGrp="1"/>
+          </p:cNvSpPr>
+          <p:nvPr>
+            <p:ph type="sldImg" idx="2"/>
+          </p:nvPr>
+        </p:nvSpPr>
+        <p:spPr/>
+      </p:sp>
+      <p:sp>
+        <p:nvSpPr>
+          <p:cNvPr id="3" name="文本占位符 2"/>
+          <p:cNvSpPr>
+            <a:spLocks noGrp="1"/>
+          </p:cNvSpPr>
+          <p:nvPr>
+            <p:ph type="body" idx="3"/>
+          </p:nvPr>
+        </p:nvSpPr>
+        <p:spPr/>
+        <p:txBody>
+          <a:bodyPr/>
+          <a:p>
+            <a:r>
+              <a:rPr lang="zh-CN" altLang="en-US"/>
+              <a:t>下面</a:t>
+            </a:r>
+            <a:r>
+              <a:rPr lang="zh-CN" altLang="en-US"/>
+              <a:t>是斗地主的计分方式。</a:t>
+            </a:r>
+            <a:endParaRPr lang="zh-CN" altLang="en-US"/>
+          </a:p>
+          <a:p>
+            <a:endParaRPr lang="en-US" altLang="zh-CN"/>
+          </a:p>
+          <a:p>
+            <a:r>
+              <a:rPr lang="zh-CN" altLang="en-US"/>
+              <a:t>游戏开始时，玩家可以叫 1分、2分或3分。</a:t>
+            </a:r>
+            <a:endParaRPr lang="zh-CN" altLang="en-US"/>
+          </a:p>
+          <a:p>
+            <a:endParaRPr lang="en-US" altLang="zh-CN"/>
+          </a:p>
+          <a:p>
+            <a:r>
+              <a:rPr lang="zh-CN" altLang="en-US"/>
+              <a:t>最高叫分者成为地主。</a:t>
+            </a:r>
+            <a:endParaRPr lang="zh-CN" altLang="en-US"/>
+          </a:p>
+          <a:p>
+            <a:endParaRPr lang="en-US" altLang="zh-CN"/>
+          </a:p>
+          <a:p>
+            <a:r>
+              <a:rPr lang="zh-CN" altLang="en-US"/>
+              <a:t>叫分决定游戏的基础分数。</a:t>
+            </a:r>
+            <a:endParaRPr lang="zh-CN" altLang="en-US"/>
+          </a:p>
+          <a:p>
+            <a:endParaRPr lang="en-US" altLang="zh-CN"/>
+          </a:p>
+          <a:p>
+            <a:r>
+              <a:rPr lang="zh-CN" altLang="en-US"/>
+              <a:t>在游戏过程中，一些特殊牌型会提高最终得分。</a:t>
+            </a:r>
+            <a:endParaRPr lang="zh-CN" altLang="en-US"/>
+          </a:p>
+          <a:p>
+            <a:endParaRPr lang="en-US" altLang="zh-CN"/>
+          </a:p>
+          <a:p>
+            <a:r>
+              <a:rPr lang="zh-CN" altLang="en-US"/>
+              <a:t>每出现一个 炸弹，总分翻倍。</a:t>
+            </a:r>
+            <a:endParaRPr lang="zh-CN" altLang="en-US"/>
+          </a:p>
+          <a:p>
+            <a:endParaRPr lang="en-US" altLang="zh-CN"/>
+          </a:p>
+          <a:p>
+            <a:r>
+              <a:rPr lang="zh-CN" altLang="en-US"/>
+              <a:t>每出现一个 王炸，总分也会翻倍。</a:t>
+            </a:r>
+            <a:endParaRPr lang="zh-CN" altLang="en-US"/>
+          </a:p>
+          <a:p>
+            <a:endParaRPr lang="en-US" altLang="zh-CN"/>
+          </a:p>
+          <a:p>
+            <a:r>
+              <a:rPr lang="zh-CN" altLang="en-US"/>
+              <a:t>因此，最终得分等于：</a:t>
+            </a:r>
+            <a:endParaRPr lang="zh-CN" altLang="en-US"/>
+          </a:p>
+          <a:p>
+            <a:endParaRPr lang="en-US" altLang="zh-CN"/>
+          </a:p>
+          <a:p>
+            <a:r>
+              <a:rPr lang="zh-CN" altLang="en-US"/>
+              <a:t>基础分 × 所有倍数加成。</a:t>
+            </a:r>
+            <a:endParaRPr lang="zh-CN" altLang="en-US"/>
+          </a:p>
+        </p:txBody>
+      </p:sp>
+    </p:spTree>
+  </p:cSld>
+  <p:clrMapOvr>
+    <a:masterClrMapping/>
+  </p:clrMapOvr>
+</p:notes>
+</file>
+
+<file path=ppt/notesSlides/notesSlide7.xml><?xml version="1.0" encoding="utf-8"?>
+<p:notes xmlns:a="http://schemas.openxmlformats.org/drawingml/2006/main" xmlns:r="http://schemas.openxmlformats.org/officeDocument/2006/relationships" xmlns:p="http://schemas.openxmlformats.org/presentationml/2006/main">
+  <p:cSld>
+    <p:spTree>
+      <p:nvGrpSpPr>
+        <p:cNvPr id="1" name=""/>
+        <p:cNvGrpSpPr/>
+        <p:nvPr/>
+      </p:nvGrpSpPr>
+      <p:grpSpPr/>
+      <p:sp>
+        <p:nvSpPr>
+          <p:cNvPr id="2" name="幻灯片图像占位符 1"/>
+          <p:cNvSpPr>
+            <a:spLocks noGrp="1"/>
+          </p:cNvSpPr>
+          <p:nvPr>
+            <p:ph type="sldImg" idx="2"/>
+          </p:nvPr>
+        </p:nvSpPr>
+        <p:spPr/>
+      </p:sp>
+      <p:sp>
+        <p:nvSpPr>
+          <p:cNvPr id="3" name="文本占位符 2"/>
+          <p:cNvSpPr>
+            <a:spLocks noGrp="1"/>
+          </p:cNvSpPr>
+          <p:nvPr>
+            <p:ph type="body" idx="3"/>
+          </p:nvPr>
+        </p:nvSpPr>
+        <p:spPr/>
+        <p:txBody>
+          <a:bodyPr/>
+          <a:p>
+            <a:r>
+              <a:rPr lang="zh-CN" altLang="en-US"/>
+              <a:t>第一个方法是 </a:t>
+            </a:r>
+            <a:r>
+              <a:rPr lang="en-US" altLang="zh-CN"/>
+              <a:t>Adversarial Search，</a:t>
+            </a:r>
+            <a:r>
+              <a:rPr lang="zh-CN" altLang="en-US"/>
+              <a:t>对抗搜索。</a:t>
+            </a:r>
+            <a:endParaRPr lang="en-US" altLang="zh-CN"/>
+          </a:p>
+          <a:p>
+            <a:r>
+              <a:rPr lang="zh-CN" altLang="en-US"/>
+              <a:t>我们把地主与农民视为两个相互对抗的阵营。</a:t>
+            </a:r>
+            <a:endParaRPr lang="en-US" altLang="zh-CN"/>
+          </a:p>
+          <a:p>
+            <a:r>
+              <a:rPr lang="zh-CN" altLang="en-US"/>
+              <a:t>首先可以采用 </a:t>
+            </a:r>
+            <a:r>
+              <a:rPr lang="en-US" altLang="zh-CN"/>
+              <a:t>Minimax </a:t>
+            </a:r>
+            <a:r>
+              <a:rPr lang="zh-CN" altLang="en-US"/>
+              <a:t>算法，在双方博弈过程中寻找最优行动。</a:t>
+            </a:r>
+            <a:endParaRPr lang="en-US" altLang="zh-CN"/>
+          </a:p>
+          <a:p>
+            <a:r>
+              <a:rPr lang="zh-CN" altLang="en-US"/>
+              <a:t>由于完整搜索代价太高，我们采用 深度限制搜索 来降低计算复杂度。</a:t>
+            </a:r>
+            <a:endParaRPr lang="en-US" altLang="zh-CN"/>
+          </a:p>
+          <a:p>
+            <a:r>
+              <a:rPr lang="zh-CN" altLang="en-US"/>
+              <a:t>同时，我们设计 启发式状态评价函数。</a:t>
+            </a:r>
+            <a:endParaRPr lang="en-US" altLang="zh-CN"/>
+          </a:p>
+          <a:p>
+            <a:r>
+              <a:rPr lang="zh-CN" altLang="en-US"/>
+              <a:t>评价指标包括：</a:t>
+            </a:r>
+            <a:endParaRPr lang="en-US" altLang="zh-CN"/>
+          </a:p>
+          <a:p>
+            <a:r>
+              <a:rPr lang="zh-CN" altLang="en-US"/>
+              <a:t>手牌强度、</a:t>
+            </a:r>
+            <a:endParaRPr lang="en-US" altLang="zh-CN"/>
+          </a:p>
+          <a:p>
+            <a:r>
+              <a:rPr lang="zh-CN" altLang="en-US"/>
+              <a:t>剩余牌数，</a:t>
+            </a:r>
+            <a:endParaRPr lang="en-US" altLang="zh-CN"/>
+          </a:p>
+          <a:p>
+            <a:r>
+              <a:rPr lang="zh-CN" altLang="en-US"/>
+              <a:t>以及当前局面的控制能力。</a:t>
+            </a:r>
+            <a:endParaRPr lang="en-US" altLang="zh-CN"/>
+          </a:p>
+          <a:p>
+            <a:r>
+              <a:rPr lang="zh-CN" altLang="en-US"/>
+              <a:t>由于斗地主存在隐藏信息问题，我们还可以进一步使用 </a:t>
+            </a:r>
+            <a:r>
+              <a:rPr lang="en-US" altLang="zh-CN"/>
+              <a:t>Expectimax，</a:t>
+            </a:r>
+            <a:r>
+              <a:rPr lang="zh-CN" altLang="en-US"/>
+              <a:t>通过概率方式建模未知手牌的不确定性。</a:t>
+            </a:r>
+            <a:endParaRPr lang="zh-CN" altLang="en-US"/>
+          </a:p>
+        </p:txBody>
+      </p:sp>
+    </p:spTree>
+  </p:cSld>
+  <p:clrMapOvr>
+    <a:masterClrMapping/>
+  </p:clrMapOvr>
+</p:notes>
+</file>
+
+<file path=ppt/notesSlides/notesSlide8.xml><?xml version="1.0" encoding="utf-8"?>
+<p:notes xmlns:a="http://schemas.openxmlformats.org/drawingml/2006/main" xmlns:r="http://schemas.openxmlformats.org/officeDocument/2006/relationships" xmlns:p="http://schemas.openxmlformats.org/presentationml/2006/main">
+  <p:cSld>
+    <p:spTree>
+      <p:nvGrpSpPr>
+        <p:cNvPr id="1" name=""/>
+        <p:cNvGrpSpPr/>
+        <p:nvPr/>
+      </p:nvGrpSpPr>
+      <p:grpSpPr/>
+      <p:sp>
+        <p:nvSpPr>
+          <p:cNvPr id="2" name="幻灯片图像占位符 1"/>
+          <p:cNvSpPr>
+            <a:spLocks noGrp="1"/>
+          </p:cNvSpPr>
+          <p:nvPr>
+            <p:ph type="sldImg" idx="2"/>
+          </p:nvPr>
+        </p:nvSpPr>
+        <p:spPr/>
+      </p:sp>
+      <p:sp>
+        <p:nvSpPr>
+          <p:cNvPr id="3" name="文本占位符 2"/>
+          <p:cNvSpPr>
+            <a:spLocks noGrp="1"/>
+          </p:cNvSpPr>
+          <p:nvPr>
+            <p:ph type="body" idx="3"/>
+          </p:nvPr>
+        </p:nvSpPr>
+        <p:spPr/>
+        <p:txBody>
+          <a:bodyPr/>
+          <a:p>
+            <a:r>
+              <a:rPr lang="zh-CN" altLang="en-US"/>
+              <a:t>第二种方法是 约束满足问题，也就是 </a:t>
+            </a:r>
+            <a:r>
+              <a:rPr lang="en-US" altLang="zh-CN"/>
+              <a:t>CSP。</a:t>
+            </a:r>
+            <a:endParaRPr lang="en-US" altLang="zh-CN"/>
+          </a:p>
+          <a:p>
+            <a:endParaRPr lang="en-US" altLang="zh-CN"/>
+          </a:p>
+          <a:p>
+            <a:r>
+              <a:rPr lang="zh-CN" altLang="en-US"/>
+              <a:t>这里我们利用 </a:t>
+            </a:r>
+            <a:r>
+              <a:rPr lang="en-US" altLang="zh-CN"/>
+              <a:t>CSP </a:t>
+            </a:r>
+            <a:r>
+              <a:rPr lang="zh-CN" altLang="en-US"/>
+              <a:t>来描述手牌的合法分组问题。</a:t>
+            </a:r>
+            <a:endParaRPr lang="zh-CN" altLang="en-US"/>
+          </a:p>
+          <a:p>
+            <a:endParaRPr lang="en-US" altLang="zh-CN"/>
+          </a:p>
+          <a:p>
+            <a:r>
+              <a:rPr lang="zh-CN" altLang="en-US"/>
+              <a:t>给定一手牌，我们希望找到所有满足规则的牌型划分方式。</a:t>
+            </a:r>
+            <a:endParaRPr lang="zh-CN" altLang="en-US"/>
+          </a:p>
+          <a:p>
+            <a:endParaRPr lang="en-US" altLang="zh-CN"/>
+          </a:p>
+          <a:p>
+            <a:r>
+              <a:rPr lang="zh-CN" altLang="en-US"/>
+              <a:t>在所有可行方案中，我们更偏向于：</a:t>
+            </a:r>
+            <a:endParaRPr lang="zh-CN" altLang="en-US"/>
+          </a:p>
+          <a:p>
+            <a:endParaRPr lang="en-US" altLang="zh-CN"/>
+          </a:p>
+          <a:p>
+            <a:r>
+              <a:rPr lang="zh-CN" altLang="en-US"/>
+              <a:t>更少的分组数量，</a:t>
+            </a:r>
+            <a:endParaRPr lang="zh-CN" altLang="en-US"/>
+          </a:p>
+          <a:p>
+            <a:endParaRPr lang="en-US" altLang="zh-CN"/>
+          </a:p>
+          <a:p>
+            <a:r>
+              <a:rPr lang="zh-CN" altLang="en-US"/>
+              <a:t>以及 更强的牌型组合。</a:t>
+            </a:r>
+            <a:endParaRPr lang="zh-CN" altLang="en-US"/>
+          </a:p>
+          <a:p>
+            <a:endParaRPr lang="en-US" altLang="zh-CN"/>
+          </a:p>
+          <a:p>
+            <a:r>
+              <a:rPr lang="zh-CN" altLang="en-US"/>
+              <a:t>这样能够帮助构建更加高效的出牌结构，从而提升决策质量。</a:t>
+            </a:r>
+            <a:endParaRPr lang="zh-CN" altLang="en-US"/>
+          </a:p>
+        </p:txBody>
+      </p:sp>
+    </p:spTree>
+  </p:cSld>
+  <p:clrMapOvr>
+    <a:masterClrMapping/>
+  </p:clrMapOvr>
+</p:notes>
+</file>
+
+<file path=ppt/notesSlides/notesSlide9.xml><?xml version="1.0" encoding="utf-8"?>
+<p:notes xmlns:a="http://schemas.openxmlformats.org/drawingml/2006/main" xmlns:r="http://schemas.openxmlformats.org/officeDocument/2006/relationships" xmlns:p="http://schemas.openxmlformats.org/presentationml/2006/main">
+  <p:cSld>
+    <p:spTree>
+      <p:nvGrpSpPr>
+        <p:cNvPr id="1" name=""/>
+        <p:cNvGrpSpPr/>
+        <p:nvPr/>
+      </p:nvGrpSpPr>
+      <p:grpSpPr/>
+      <p:sp>
+        <p:nvSpPr>
+          <p:cNvPr id="2" name="幻灯片图像占位符 1"/>
+          <p:cNvSpPr>
+            <a:spLocks noGrp="1"/>
+          </p:cNvSpPr>
+          <p:nvPr>
+            <p:ph type="sldImg" idx="2"/>
+          </p:nvPr>
+        </p:nvSpPr>
+        <p:spPr/>
+      </p:sp>
+      <p:sp>
+        <p:nvSpPr>
+          <p:cNvPr id="3" name="文本占位符 2"/>
+          <p:cNvSpPr>
+            <a:spLocks noGrp="1"/>
+          </p:cNvSpPr>
+          <p:nvPr>
+            <p:ph type="body" idx="3"/>
+          </p:nvPr>
+        </p:nvSpPr>
+        <p:spPr/>
+        <p:txBody>
+          <a:bodyPr/>
+          <a:p>
+            <a:r>
+              <a:rPr lang="zh-CN" altLang="en-US"/>
+              <a:t>由于斗地主属于不完全信息游戏，因此推理能力非常重要。</a:t>
+            </a:r>
+            <a:endParaRPr lang="zh-CN" altLang="en-US"/>
+          </a:p>
+          <a:p>
+            <a:r>
+              <a:rPr lang="zh-CN" altLang="en-US"/>
+              <a:t>在 精确推理 中，我们会严格追踪所有已经打出的牌。</a:t>
+            </a:r>
+            <a:endParaRPr lang="zh-CN" altLang="en-US"/>
+          </a:p>
+          <a:p>
+            <a:r>
+              <a:rPr lang="zh-CN" altLang="en-US"/>
+              <a:t>已知牌会从未知牌池中移除。</a:t>
+            </a:r>
+            <a:endParaRPr lang="zh-CN" altLang="en-US"/>
+          </a:p>
+          <a:p>
+            <a:r>
+              <a:rPr lang="zh-CN" altLang="en-US"/>
+              <a:t>但随着状态空间增长，精确计算可能变得非常昂贵。</a:t>
+            </a:r>
+            <a:endParaRPr lang="zh-CN" altLang="en-US"/>
+          </a:p>
+          <a:p>
+            <a:r>
+              <a:rPr lang="zh-CN" altLang="en-US"/>
+              <a:t>因此我们还考虑 近似推理方法。</a:t>
+            </a:r>
+            <a:endParaRPr lang="zh-CN" altLang="en-US"/>
+          </a:p>
+          <a:p>
+            <a:r>
+              <a:rPr lang="zh-CN" altLang="en-US"/>
+              <a:t>通过采样等方式，我们估计对手可能持有的手牌。</a:t>
+            </a:r>
+            <a:endParaRPr lang="zh-CN" altLang="en-US"/>
+          </a:p>
+          <a:p>
+            <a:r>
+              <a:rPr lang="zh-CN" altLang="en-US"/>
+              <a:t>同时，根据玩家的叫分行为和出牌行为，不断更新我们的概率判断。</a:t>
+            </a:r>
+            <a:endParaRPr lang="zh-CN" altLang="en-US"/>
+          </a:p>
+          <a:p>
+            <a:r>
+              <a:rPr lang="zh-CN" altLang="en-US"/>
+              <a:t>这样 </a:t>
+            </a:r>
+            <a:r>
+              <a:rPr lang="en-US" altLang="zh-CN"/>
+              <a:t>AI </a:t>
+            </a:r>
+            <a:r>
+              <a:rPr lang="zh-CN" altLang="en-US"/>
+              <a:t>就能够在信息不完整条件下做出更合理的决策。</a:t>
+            </a:r>
+            <a:endParaRPr lang="zh-CN" altLang="en-US"/>
+          </a:p>
+        </p:txBody>
+      </p:sp>
+    </p:spTree>
+  </p:cSld>
+  <p:clrMapOvr>
+    <a:masterClrMapping/>
+  </p:clrMapOvr>
+</p:notes>
+</file>
+
 <file path=ppt/slideLayouts/slideLayout1.xml><?xml version="1.0" encoding="utf-8"?>
 <p:sldLayout xmlns:a="http://schemas.openxmlformats.org/drawingml/2006/main" xmlns:r="http://schemas.openxmlformats.org/officeDocument/2006/relationships" xmlns:p="http://schemas.openxmlformats.org/presentationml/2006/main" preserve="1" userDrawn="1">
   <p:cSld name="Title">
@@ -199,7 +1966,7 @@
         <a:spcBef>
           <a:spcPts val="1000"/>
         </a:spcBef>
-        <a:buFont typeface="Arial" panose="020B0604020202090204" pitchFamily="34" charset="0"/>
+        <a:buFont typeface="Arial" panose="020B0604020202020204" pitchFamily="34" charset="0"/>
         <a:buChar char="•"/>
         <a:defRPr sz="2800" kern="1200">
           <a:solidFill>
@@ -217,7 +1984,7 @@
         <a:spcBef>
           <a:spcPts val="500"/>
         </a:spcBef>
-        <a:buFont typeface="Arial" panose="020B0604020202090204" pitchFamily="34" charset="0"/>
+        <a:buFont typeface="Arial" panose="020B0604020202020204" pitchFamily="34" charset="0"/>
         <a:buChar char="•"/>
         <a:defRPr sz="2400" kern="1200">
           <a:solidFill>
@@ -235,7 +2002,7 @@
         <a:spcBef>
           <a:spcPts val="500"/>
         </a:spcBef>
-        <a:buFont typeface="Arial" panose="020B0604020202090204" pitchFamily="34" charset="0"/>
+        <a:buFont typeface="Arial" panose="020B0604020202020204" pitchFamily="34" charset="0"/>
         <a:buChar char="•"/>
         <a:defRPr sz="2000" kern="1200">
           <a:solidFill>
@@ -253,7 +2020,7 @@
         <a:spcBef>
           <a:spcPts val="500"/>
         </a:spcBef>
-        <a:buFont typeface="Arial" panose="020B0604020202090204" pitchFamily="34" charset="0"/>
+        <a:buFont typeface="Arial" panose="020B0604020202020204" pitchFamily="34" charset="0"/>
         <a:buChar char="•"/>
         <a:defRPr sz="1800" kern="1200">
           <a:solidFill>
@@ -271,7 +2038,7 @@
         <a:spcBef>
           <a:spcPts val="500"/>
         </a:spcBef>
-        <a:buFont typeface="Arial" panose="020B0604020202090204" pitchFamily="34" charset="0"/>
+        <a:buFont typeface="Arial" panose="020B0604020202020204" pitchFamily="34" charset="0"/>
         <a:buChar char="•"/>
         <a:defRPr sz="1800" kern="1200">
           <a:solidFill>
@@ -289,7 +2056,7 @@
         <a:spcBef>
           <a:spcPts val="500"/>
         </a:spcBef>
-        <a:buFont typeface="Arial" panose="020B0604020202090204" pitchFamily="34" charset="0"/>
+        <a:buFont typeface="Arial" panose="020B0604020202020204" pitchFamily="34" charset="0"/>
         <a:buChar char="•"/>
         <a:defRPr sz="1800" kern="1200">
           <a:solidFill>
@@ -307,7 +2074,7 @@
         <a:spcBef>
           <a:spcPts val="500"/>
         </a:spcBef>
-        <a:buFont typeface="Arial" panose="020B0604020202090204" pitchFamily="34" charset="0"/>
+        <a:buFont typeface="Arial" panose="020B0604020202020204" pitchFamily="34" charset="0"/>
         <a:buChar char="•"/>
         <a:defRPr sz="1800" kern="1200">
           <a:solidFill>
@@ -325,7 +2092,7 @@
         <a:spcBef>
           <a:spcPts val="500"/>
         </a:spcBef>
-        <a:buFont typeface="Arial" panose="020B0604020202090204" pitchFamily="34" charset="0"/>
+        <a:buFont typeface="Arial" panose="020B0604020202020204" pitchFamily="34" charset="0"/>
         <a:buChar char="•"/>
         <a:defRPr sz="1800" kern="1200">
           <a:solidFill>
@@ -343,7 +2110,7 @@
         <a:spcBef>
           <a:spcPts val="500"/>
         </a:spcBef>
-        <a:buFont typeface="Arial" panose="020B0604020202090204" pitchFamily="34" charset="0"/>
+        <a:buFont typeface="Arial" panose="020B0604020202020204" pitchFamily="34" charset="0"/>
         <a:buChar char="•"/>
         <a:defRPr sz="1800" kern="1200">
           <a:solidFill>
@@ -502,9 +2269,9 @@
               </a:lnSpc>
             </a:pPr>
             <a:endParaRPr sz="100" dirty="0">
-              <a:latin typeface="Arial" panose="020B0604020202090204"/>
-              <a:ea typeface="Arial" panose="020B0604020202090204"/>
-              <a:cs typeface="Arial" panose="020B0604020202090204"/>
+              <a:latin typeface="Arial" panose="020B0604020202020204"/>
+              <a:ea typeface="Arial" panose="020B0604020202020204"/>
+              <a:cs typeface="Arial" panose="020B0604020202020204"/>
             </a:endParaRPr>
           </a:p>
           <a:p>
@@ -520,9 +2287,9 @@
                     <a:alpha val="100000"/>
                   </a:srgbClr>
                 </a:solidFill>
-                <a:latin typeface="Trebuchet MS" panose="020B0703020202090204"/>
-                <a:ea typeface="Trebuchet MS" panose="020B0703020202090204"/>
-                <a:cs typeface="Trebuchet MS" panose="020B0703020202090204"/>
+                <a:latin typeface="Trebuchet MS" panose="020B0603020202020204"/>
+                <a:ea typeface="Trebuchet MS" panose="020B0603020202020204"/>
+                <a:cs typeface="Trebuchet MS" panose="020B0603020202020204"/>
               </a:rPr>
               <a:t>Fight</a:t>
             </a:r>
@@ -533,9 +2300,9 @@
                     <a:alpha val="100000"/>
                   </a:srgbClr>
                 </a:solidFill>
-                <a:latin typeface="Trebuchet MS" panose="020B0703020202090204"/>
-                <a:ea typeface="Trebuchet MS" panose="020B0703020202090204"/>
-                <a:cs typeface="Trebuchet MS" panose="020B0703020202090204"/>
+                <a:latin typeface="Trebuchet MS" panose="020B0603020202020204"/>
+                <a:ea typeface="Trebuchet MS" panose="020B0603020202020204"/>
+                <a:cs typeface="Trebuchet MS" panose="020B0603020202020204"/>
               </a:rPr>
               <a:t> </a:t>
             </a:r>
@@ -546,9 +2313,9 @@
                     <a:alpha val="100000"/>
                   </a:srgbClr>
                 </a:solidFill>
-                <a:latin typeface="Trebuchet MS" panose="020B0703020202090204"/>
-                <a:ea typeface="Trebuchet MS" panose="020B0703020202090204"/>
-                <a:cs typeface="Trebuchet MS" panose="020B0703020202090204"/>
+                <a:latin typeface="Trebuchet MS" panose="020B0603020202020204"/>
+                <a:ea typeface="Trebuchet MS" panose="020B0603020202020204"/>
+                <a:cs typeface="Trebuchet MS" panose="020B0603020202020204"/>
               </a:rPr>
               <a:t>the</a:t>
             </a:r>
@@ -559,9 +2326,9 @@
                     <a:alpha val="100000"/>
                   </a:srgbClr>
                 </a:solidFill>
-                <a:latin typeface="Trebuchet MS" panose="020B0703020202090204"/>
-                <a:ea typeface="Trebuchet MS" panose="020B0703020202090204"/>
-                <a:cs typeface="Trebuchet MS" panose="020B0703020202090204"/>
+                <a:latin typeface="Trebuchet MS" panose="020B0603020202020204"/>
+                <a:ea typeface="Trebuchet MS" panose="020B0603020202020204"/>
+                <a:cs typeface="Trebuchet MS" panose="020B0603020202020204"/>
               </a:rPr>
               <a:t> </a:t>
             </a:r>
@@ -572,16 +2339,16 @@
                     <a:alpha val="100000"/>
                   </a:srgbClr>
                 </a:solidFill>
-                <a:latin typeface="Trebuchet MS" panose="020B0703020202090204"/>
-                <a:ea typeface="Trebuchet MS" panose="020B0703020202090204"/>
-                <a:cs typeface="Trebuchet MS" panose="020B0703020202090204"/>
+                <a:latin typeface="Trebuchet MS" panose="020B0603020202020204"/>
+                <a:ea typeface="Trebuchet MS" panose="020B0603020202020204"/>
+                <a:cs typeface="Trebuchet MS" panose="020B0603020202020204"/>
               </a:rPr>
               <a:t>landlord</a:t>
             </a:r>
             <a:endParaRPr sz="4600" dirty="0">
-              <a:latin typeface="Trebuchet MS" panose="020B0703020202090204"/>
-              <a:ea typeface="Trebuchet MS" panose="020B0703020202090204"/>
-              <a:cs typeface="Trebuchet MS" panose="020B0703020202090204"/>
+              <a:latin typeface="Trebuchet MS" panose="020B0603020202020204"/>
+              <a:ea typeface="Trebuchet MS" panose="020B0603020202020204"/>
+              <a:cs typeface="Trebuchet MS" panose="020B0603020202020204"/>
             </a:endParaRPr>
           </a:p>
           <a:p>
@@ -591,9 +2358,9 @@
               </a:lnSpc>
             </a:pPr>
             <a:endParaRPr sz="1000" dirty="0">
-              <a:latin typeface="Arial" panose="020B0604020202090204"/>
-              <a:ea typeface="Arial" panose="020B0604020202090204"/>
-              <a:cs typeface="Arial" panose="020B0604020202090204"/>
+              <a:latin typeface="Arial" panose="020B0604020202020204"/>
+              <a:ea typeface="Arial" panose="020B0604020202020204"/>
+              <a:cs typeface="Arial" panose="020B0604020202020204"/>
             </a:endParaRPr>
           </a:p>
           <a:p>
@@ -603,9 +2370,9 @@
               </a:lnSpc>
             </a:pPr>
             <a:endParaRPr sz="1000" dirty="0">
-              <a:latin typeface="Arial" panose="020B0604020202090204"/>
-              <a:ea typeface="Arial" panose="020B0604020202090204"/>
-              <a:cs typeface="Arial" panose="020B0604020202090204"/>
+              <a:latin typeface="Arial" panose="020B0604020202020204"/>
+              <a:ea typeface="Arial" panose="020B0604020202020204"/>
+              <a:cs typeface="Arial" panose="020B0604020202020204"/>
             </a:endParaRPr>
           </a:p>
           <a:p>
@@ -723,9 +2490,9 @@
               </a:lnSpc>
             </a:pPr>
             <a:endParaRPr sz="1000" dirty="0">
-              <a:latin typeface="Arial" panose="020B0604020202090204"/>
-              <a:ea typeface="Arial" panose="020B0604020202090204"/>
-              <a:cs typeface="Arial" panose="020B0604020202090204"/>
+              <a:latin typeface="Arial" panose="020B0604020202020204"/>
+              <a:ea typeface="Arial" panose="020B0604020202020204"/>
+              <a:cs typeface="Arial" panose="020B0604020202020204"/>
             </a:endParaRPr>
           </a:p>
           <a:p>
@@ -735,9 +2502,9 @@
               </a:lnSpc>
             </a:pPr>
             <a:endParaRPr sz="1000" dirty="0">
-              <a:latin typeface="Arial" panose="020B0604020202090204"/>
-              <a:ea typeface="Arial" panose="020B0604020202090204"/>
-              <a:cs typeface="Arial" panose="020B0604020202090204"/>
+              <a:latin typeface="Arial" panose="020B0604020202020204"/>
+              <a:ea typeface="Arial" panose="020B0604020202020204"/>
+              <a:cs typeface="Arial" panose="020B0604020202020204"/>
             </a:endParaRPr>
           </a:p>
           <a:p>
@@ -747,9 +2514,9 @@
               </a:lnSpc>
             </a:pPr>
             <a:endParaRPr sz="1000" dirty="0">
-              <a:latin typeface="Arial" panose="020B0604020202090204"/>
-              <a:ea typeface="Arial" panose="020B0604020202090204"/>
-              <a:cs typeface="Arial" panose="020B0604020202090204"/>
+              <a:latin typeface="Arial" panose="020B0604020202020204"/>
+              <a:ea typeface="Arial" panose="020B0604020202020204"/>
+              <a:cs typeface="Arial" panose="020B0604020202020204"/>
             </a:endParaRPr>
           </a:p>
           <a:p>
@@ -759,9 +2526,9 @@
               </a:lnSpc>
             </a:pPr>
             <a:endParaRPr sz="1000" dirty="0">
-              <a:latin typeface="Arial" panose="020B0604020202090204"/>
-              <a:ea typeface="Arial" panose="020B0604020202090204"/>
-              <a:cs typeface="Arial" panose="020B0604020202090204"/>
+              <a:latin typeface="Arial" panose="020B0604020202020204"/>
+              <a:ea typeface="Arial" panose="020B0604020202020204"/>
+              <a:cs typeface="Arial" panose="020B0604020202020204"/>
             </a:endParaRPr>
           </a:p>
           <a:p>
@@ -771,9 +2538,9 @@
               </a:lnSpc>
             </a:pPr>
             <a:endParaRPr sz="1000" dirty="0">
-              <a:latin typeface="Arial" panose="020B0604020202090204"/>
-              <a:ea typeface="Arial" panose="020B0604020202090204"/>
-              <a:cs typeface="Arial" panose="020B0604020202090204"/>
+              <a:latin typeface="Arial" panose="020B0604020202020204"/>
+              <a:ea typeface="Arial" panose="020B0604020202020204"/>
+              <a:cs typeface="Arial" panose="020B0604020202020204"/>
             </a:endParaRPr>
           </a:p>
           <a:p>
@@ -783,9 +2550,9 @@
               </a:lnSpc>
             </a:pPr>
             <a:endParaRPr sz="400" dirty="0">
-              <a:latin typeface="Arial" panose="020B0604020202090204"/>
-              <a:ea typeface="Arial" panose="020B0604020202090204"/>
-              <a:cs typeface="Arial" panose="020B0604020202090204"/>
+              <a:latin typeface="Arial" panose="020B0604020202020204"/>
+              <a:ea typeface="Arial" panose="020B0604020202020204"/>
+              <a:cs typeface="Arial" panose="020B0604020202020204"/>
             </a:endParaRPr>
           </a:p>
           <a:p>
@@ -899,9 +2666,9 @@
               </a:lnSpc>
             </a:pPr>
             <a:endParaRPr sz="100" dirty="0">
-              <a:latin typeface="Arial" panose="020B0604020202090204"/>
-              <a:ea typeface="Arial" panose="020B0604020202090204"/>
-              <a:cs typeface="Arial" panose="020B0604020202090204"/>
+              <a:latin typeface="Arial" panose="020B0604020202020204"/>
+              <a:ea typeface="Arial" panose="020B0604020202020204"/>
+              <a:cs typeface="Arial" panose="020B0604020202020204"/>
             </a:endParaRPr>
           </a:p>
           <a:p>
@@ -1065,9 +2832,9 @@
               </a:lnSpc>
             </a:pPr>
             <a:endParaRPr sz="100" dirty="0">
-              <a:latin typeface="Arial" panose="020B0604020202090204"/>
-              <a:ea typeface="Arial" panose="020B0604020202090204"/>
-              <a:cs typeface="Arial" panose="020B0604020202090204"/>
+              <a:latin typeface="Arial" panose="020B0604020202020204"/>
+              <a:ea typeface="Arial" panose="020B0604020202020204"/>
+              <a:cs typeface="Arial" panose="020B0604020202020204"/>
             </a:endParaRPr>
           </a:p>
           <a:p>
@@ -1083,16 +2850,16 @@
                     <a:alpha val="100000"/>
                   </a:srgbClr>
                 </a:solidFill>
-                <a:latin typeface="Trebuchet MS" panose="020B0703020202090204"/>
-                <a:ea typeface="Trebuchet MS" panose="020B0703020202090204"/>
-                <a:cs typeface="Trebuchet MS" panose="020B0703020202090204"/>
+                <a:latin typeface="Trebuchet MS" panose="020B0603020202020204"/>
+                <a:ea typeface="Trebuchet MS" panose="020B0603020202020204"/>
+                <a:cs typeface="Trebuchet MS" panose="020B0603020202020204"/>
               </a:rPr>
               <a:t>Implementmethods</a:t>
             </a:r>
             <a:endParaRPr sz="3600" dirty="0">
-              <a:latin typeface="Trebuchet MS" panose="020B0703020202090204"/>
-              <a:ea typeface="Trebuchet MS" panose="020B0703020202090204"/>
-              <a:cs typeface="Trebuchet MS" panose="020B0703020202090204"/>
+              <a:latin typeface="Trebuchet MS" panose="020B0603020202020204"/>
+              <a:ea typeface="Trebuchet MS" panose="020B0603020202020204"/>
+              <a:cs typeface="Trebuchet MS" panose="020B0603020202020204"/>
             </a:endParaRPr>
           </a:p>
           <a:p>
@@ -1102,9 +2869,9 @@
               </a:lnSpc>
             </a:pPr>
             <a:endParaRPr sz="1000" dirty="0">
-              <a:latin typeface="Arial" panose="020B0604020202090204"/>
-              <a:ea typeface="Arial" panose="020B0604020202090204"/>
-              <a:cs typeface="Arial" panose="020B0604020202090204"/>
+              <a:latin typeface="Arial" panose="020B0604020202020204"/>
+              <a:ea typeface="Arial" panose="020B0604020202020204"/>
+              <a:cs typeface="Arial" panose="020B0604020202020204"/>
             </a:endParaRPr>
           </a:p>
           <a:p>
@@ -1114,9 +2881,9 @@
               </a:lnSpc>
             </a:pPr>
             <a:endParaRPr sz="1000" dirty="0">
-              <a:latin typeface="Arial" panose="020B0604020202090204"/>
-              <a:ea typeface="Arial" panose="020B0604020202090204"/>
-              <a:cs typeface="Arial" panose="020B0604020202090204"/>
+              <a:latin typeface="Arial" panose="020B0604020202020204"/>
+              <a:ea typeface="Arial" panose="020B0604020202020204"/>
+              <a:cs typeface="Arial" panose="020B0604020202020204"/>
             </a:endParaRPr>
           </a:p>
           <a:p>
@@ -1135,9 +2902,9 @@
                     <a:alpha val="100000"/>
                   </a:srgbClr>
                 </a:solidFill>
-                <a:latin typeface="Trebuchet MS" panose="020B0703020202090204"/>
-                <a:ea typeface="Trebuchet MS" panose="020B0703020202090204"/>
-                <a:cs typeface="Trebuchet MS" panose="020B0703020202090204"/>
+                <a:latin typeface="Trebuchet MS" panose="020B0603020202020204"/>
+                <a:ea typeface="Trebuchet MS" panose="020B0603020202020204"/>
+                <a:cs typeface="Trebuchet MS" panose="020B0603020202020204"/>
               </a:rPr>
               <a:t>4.</a:t>
             </a:r>
@@ -1148,9 +2915,9 @@
                     <a:alpha val="100000"/>
                   </a:srgbClr>
                 </a:solidFill>
-                <a:latin typeface="Trebuchet MS" panose="020B0703020202090204"/>
-                <a:ea typeface="Trebuchet MS" panose="020B0703020202090204"/>
-                <a:cs typeface="Trebuchet MS" panose="020B0703020202090204"/>
+                <a:latin typeface="Trebuchet MS" panose="020B0603020202020204"/>
+                <a:ea typeface="Trebuchet MS" panose="020B0603020202020204"/>
+                <a:cs typeface="Trebuchet MS" panose="020B0603020202020204"/>
               </a:rPr>
               <a:t> </a:t>
             </a:r>
@@ -1161,16 +2928,16 @@
                     <a:alpha val="100000"/>
                   </a:srgbClr>
                 </a:solidFill>
-                <a:latin typeface="Trebuchet MS" panose="020B0703020202090204"/>
-                <a:ea typeface="Trebuchet MS" panose="020B0703020202090204"/>
-                <a:cs typeface="Trebuchet MS" panose="020B0703020202090204"/>
+                <a:latin typeface="Trebuchet MS" panose="020B0603020202020204"/>
+                <a:ea typeface="Trebuchet MS" panose="020B0603020202020204"/>
+                <a:cs typeface="Trebuchet MS" panose="020B0603020202020204"/>
               </a:rPr>
               <a:t>MDP</a:t>
             </a:r>
             <a:endParaRPr sz="2300" dirty="0">
-              <a:latin typeface="Trebuchet MS" panose="020B0703020202090204"/>
-              <a:ea typeface="Trebuchet MS" panose="020B0703020202090204"/>
-              <a:cs typeface="Trebuchet MS" panose="020B0703020202090204"/>
+              <a:latin typeface="Trebuchet MS" panose="020B0603020202020204"/>
+              <a:ea typeface="Trebuchet MS" panose="020B0603020202020204"/>
+              <a:cs typeface="Trebuchet MS" panose="020B0603020202020204"/>
             </a:endParaRPr>
           </a:p>
           <a:p>
@@ -1180,9 +2947,9 @@
               </a:lnSpc>
             </a:pPr>
             <a:endParaRPr sz="1000" dirty="0">
-              <a:latin typeface="Arial" panose="020B0604020202090204"/>
-              <a:ea typeface="Arial" panose="020B0604020202090204"/>
-              <a:cs typeface="Arial" panose="020B0604020202090204"/>
+              <a:latin typeface="Arial" panose="020B0604020202020204"/>
+              <a:ea typeface="Arial" panose="020B0604020202020204"/>
+              <a:cs typeface="Arial" panose="020B0604020202020204"/>
             </a:endParaRPr>
           </a:p>
           <a:p>
@@ -1204,9 +2971,9 @@
                     <a:alpha val="100000"/>
                   </a:srgbClr>
                 </a:solidFill>
-                <a:latin typeface="Trebuchet MS" panose="020B0703020202090204"/>
-                <a:ea typeface="Trebuchet MS" panose="020B0703020202090204"/>
-                <a:cs typeface="Trebuchet MS" panose="020B0703020202090204"/>
+                <a:latin typeface="Trebuchet MS" panose="020B0603020202020204"/>
+                <a:ea typeface="Trebuchet MS" panose="020B0603020202020204"/>
+                <a:cs typeface="Trebuchet MS" panose="020B0603020202020204"/>
               </a:rPr>
               <a:t>	</a:t>
             </a:r>
@@ -1217,9 +2984,9 @@
                     <a:alpha val="100000"/>
                   </a:srgbClr>
                 </a:solidFill>
-                <a:latin typeface="Trebuchet MS" panose="020B0703020202090204"/>
-                <a:ea typeface="Trebuchet MS" panose="020B0703020202090204"/>
-                <a:cs typeface="Trebuchet MS" panose="020B0703020202090204"/>
+                <a:latin typeface="Trebuchet MS" panose="020B0603020202020204"/>
+                <a:ea typeface="Trebuchet MS" panose="020B0603020202020204"/>
+                <a:cs typeface="Trebuchet MS" panose="020B0603020202020204"/>
               </a:rPr>
               <a:t>Markov</a:t>
             </a:r>
@@ -1230,9 +2997,9 @@
                     <a:alpha val="100000"/>
                   </a:srgbClr>
                 </a:solidFill>
-                <a:latin typeface="Trebuchet MS" panose="020B0703020202090204"/>
-                <a:ea typeface="Trebuchet MS" panose="020B0703020202090204"/>
-                <a:cs typeface="Trebuchet MS" panose="020B0703020202090204"/>
+                <a:latin typeface="Trebuchet MS" panose="020B0603020202020204"/>
+                <a:ea typeface="Trebuchet MS" panose="020B0603020202020204"/>
+                <a:cs typeface="Trebuchet MS" panose="020B0603020202020204"/>
               </a:rPr>
               <a:t> </a:t>
             </a:r>
@@ -1243,9 +3010,9 @@
                     <a:alpha val="100000"/>
                   </a:srgbClr>
                 </a:solidFill>
-                <a:latin typeface="Trebuchet MS" panose="020B0703020202090204"/>
-                <a:ea typeface="Trebuchet MS" panose="020B0703020202090204"/>
-                <a:cs typeface="Trebuchet MS" panose="020B0703020202090204"/>
+                <a:latin typeface="Trebuchet MS" panose="020B0603020202020204"/>
+                <a:ea typeface="Trebuchet MS" panose="020B0603020202020204"/>
+                <a:cs typeface="Trebuchet MS" panose="020B0603020202020204"/>
               </a:rPr>
               <a:t>Decisio</a:t>
             </a:r>
@@ -1256,9 +3023,9 @@
                     <a:alpha val="100000"/>
                   </a:srgbClr>
                 </a:solidFill>
-                <a:latin typeface="Trebuchet MS" panose="020B0703020202090204"/>
-                <a:ea typeface="Trebuchet MS" panose="020B0703020202090204"/>
-                <a:cs typeface="Trebuchet MS" panose="020B0703020202090204"/>
+                <a:latin typeface="Trebuchet MS" panose="020B0603020202020204"/>
+                <a:ea typeface="Trebuchet MS" panose="020B0603020202020204"/>
+                <a:cs typeface="Trebuchet MS" panose="020B0603020202020204"/>
               </a:rPr>
               <a:t>n</a:t>
             </a:r>
@@ -1269,9 +3036,9 @@
                     <a:alpha val="100000"/>
                   </a:srgbClr>
                 </a:solidFill>
-                <a:latin typeface="Trebuchet MS" panose="020B0703020202090204"/>
-                <a:ea typeface="Trebuchet MS" panose="020B0703020202090204"/>
-                <a:cs typeface="Trebuchet MS" panose="020B0703020202090204"/>
+                <a:latin typeface="Trebuchet MS" panose="020B0603020202020204"/>
+                <a:ea typeface="Trebuchet MS" panose="020B0603020202020204"/>
+                <a:cs typeface="Trebuchet MS" panose="020B0603020202020204"/>
               </a:rPr>
               <a:t> </a:t>
             </a:r>
@@ -1282,9 +3049,9 @@
                     <a:alpha val="100000"/>
                   </a:srgbClr>
                 </a:solidFill>
-                <a:latin typeface="Trebuchet MS" panose="020B0703020202090204"/>
-                <a:ea typeface="Trebuchet MS" panose="020B0703020202090204"/>
-                <a:cs typeface="Trebuchet MS" panose="020B0703020202090204"/>
+                <a:latin typeface="Trebuchet MS" panose="020B0603020202020204"/>
+                <a:ea typeface="Trebuchet MS" panose="020B0603020202020204"/>
+                <a:cs typeface="Trebuchet MS" panose="020B0603020202020204"/>
               </a:rPr>
               <a:t>Process</a:t>
             </a:r>
@@ -1295,9 +3062,9 @@
                     <a:alpha val="100000"/>
                   </a:srgbClr>
                 </a:solidFill>
-                <a:latin typeface="Trebuchet MS" panose="020B0703020202090204"/>
-                <a:ea typeface="Trebuchet MS" panose="020B0703020202090204"/>
-                <a:cs typeface="Trebuchet MS" panose="020B0703020202090204"/>
+                <a:latin typeface="Trebuchet MS" panose="020B0603020202020204"/>
+                <a:ea typeface="Trebuchet MS" panose="020B0603020202020204"/>
+                <a:cs typeface="Trebuchet MS" panose="020B0603020202020204"/>
               </a:rPr>
               <a:t> </a:t>
             </a:r>
@@ -1308,16 +3075,16 @@
                     <a:alpha val="100000"/>
                   </a:srgbClr>
                 </a:solidFill>
-                <a:latin typeface="Trebuchet MS" panose="020B0703020202090204"/>
-                <a:ea typeface="Trebuchet MS" panose="020B0703020202090204"/>
-                <a:cs typeface="Trebuchet MS" panose="020B0703020202090204"/>
+                <a:latin typeface="Trebuchet MS" panose="020B0603020202020204"/>
+                <a:ea typeface="Trebuchet MS" panose="020B0603020202020204"/>
+                <a:cs typeface="Trebuchet MS" panose="020B0603020202020204"/>
               </a:rPr>
               <a:t>(MDP)</a:t>
             </a:r>
             <a:endParaRPr sz="2100" dirty="0">
-              <a:latin typeface="Trebuchet MS" panose="020B0703020202090204"/>
-              <a:ea typeface="Trebuchet MS" panose="020B0703020202090204"/>
-              <a:cs typeface="Trebuchet MS" panose="020B0703020202090204"/>
+              <a:latin typeface="Trebuchet MS" panose="020B0603020202020204"/>
+              <a:ea typeface="Trebuchet MS" panose="020B0603020202020204"/>
+              <a:cs typeface="Trebuchet MS" panose="020B0603020202020204"/>
             </a:endParaRPr>
           </a:p>
           <a:p>
@@ -1383,9 +3150,9 @@
                     <a:alpha val="100000"/>
                   </a:srgbClr>
                 </a:solidFill>
-                <a:latin typeface="Trebuchet MS" panose="020B0703020202090204"/>
-                <a:ea typeface="Trebuchet MS" panose="020B0703020202090204"/>
-                <a:cs typeface="Trebuchet MS" panose="020B0703020202090204"/>
+                <a:latin typeface="Trebuchet MS" panose="020B0603020202020204"/>
+                <a:ea typeface="Trebuchet MS" panose="020B0603020202020204"/>
+                <a:cs typeface="Trebuchet MS" panose="020B0603020202020204"/>
               </a:rPr>
               <a:t>	</a:t>
             </a:r>
@@ -1396,9 +3163,9 @@
                     <a:alpha val="100000"/>
                   </a:srgbClr>
                 </a:solidFill>
-                <a:latin typeface="Trebuchet MS" panose="020B0703020202090204"/>
-                <a:ea typeface="Trebuchet MS" panose="020B0703020202090204"/>
-                <a:cs typeface="Trebuchet MS" panose="020B0703020202090204"/>
+                <a:latin typeface="Trebuchet MS" panose="020B0603020202020204"/>
+                <a:ea typeface="Trebuchet MS" panose="020B0603020202020204"/>
+                <a:cs typeface="Trebuchet MS" panose="020B0603020202020204"/>
               </a:rPr>
               <a:t>State</a:t>
             </a:r>
@@ -1409,9 +3176,9 @@
                     <a:alpha val="100000"/>
                   </a:srgbClr>
                 </a:solidFill>
-                <a:latin typeface="Trebuchet MS" panose="020B0703020202090204"/>
-                <a:ea typeface="Trebuchet MS" panose="020B0703020202090204"/>
-                <a:cs typeface="Trebuchet MS" panose="020B0703020202090204"/>
+                <a:latin typeface="Trebuchet MS" panose="020B0603020202020204"/>
+                <a:ea typeface="Trebuchet MS" panose="020B0603020202020204"/>
+                <a:cs typeface="Trebuchet MS" panose="020B0603020202020204"/>
               </a:rPr>
               <a:t> </a:t>
             </a:r>
@@ -1422,9 +3189,9 @@
                     <a:alpha val="100000"/>
                   </a:srgbClr>
                 </a:solidFill>
-                <a:latin typeface="Trebuchet MS" panose="020B0703020202090204"/>
-                <a:ea typeface="Trebuchet MS" panose="020B0703020202090204"/>
-                <a:cs typeface="Trebuchet MS" panose="020B0703020202090204"/>
+                <a:latin typeface="Trebuchet MS" panose="020B0603020202020204"/>
+                <a:ea typeface="Trebuchet MS" panose="020B0603020202020204"/>
+                <a:cs typeface="Trebuchet MS" panose="020B0603020202020204"/>
               </a:rPr>
               <a:t>Value</a:t>
             </a:r>
@@ -1435,9 +3202,9 @@
                     <a:alpha val="100000"/>
                   </a:srgbClr>
                 </a:solidFill>
-                <a:latin typeface="Trebuchet MS" panose="020B0703020202090204"/>
-                <a:ea typeface="Trebuchet MS" panose="020B0703020202090204"/>
-                <a:cs typeface="Trebuchet MS" panose="020B0703020202090204"/>
+                <a:latin typeface="Trebuchet MS" panose="020B0603020202020204"/>
+                <a:ea typeface="Trebuchet MS" panose="020B0603020202020204"/>
+                <a:cs typeface="Trebuchet MS" panose="020B0603020202020204"/>
               </a:rPr>
               <a:t> </a:t>
             </a:r>
@@ -1448,16 +3215,16 @@
                     <a:alpha val="100000"/>
                   </a:srgbClr>
                 </a:solidFill>
-                <a:latin typeface="Trebuchet MS" panose="020B0703020202090204"/>
-                <a:ea typeface="Trebuchet MS" panose="020B0703020202090204"/>
-                <a:cs typeface="Trebuchet MS" panose="020B0703020202090204"/>
+                <a:latin typeface="Trebuchet MS" panose="020B0603020202020204"/>
+                <a:ea typeface="Trebuchet MS" panose="020B0603020202020204"/>
+                <a:cs typeface="Trebuchet MS" panose="020B0603020202020204"/>
               </a:rPr>
               <a:t>Function</a:t>
             </a:r>
             <a:endParaRPr sz="2100" dirty="0">
-              <a:latin typeface="Trebuchet MS" panose="020B0703020202090204"/>
-              <a:ea typeface="Trebuchet MS" panose="020B0703020202090204"/>
-              <a:cs typeface="Trebuchet MS" panose="020B0703020202090204"/>
+              <a:latin typeface="Trebuchet MS" panose="020B0603020202020204"/>
+              <a:ea typeface="Trebuchet MS" panose="020B0603020202020204"/>
+              <a:cs typeface="Trebuchet MS" panose="020B0603020202020204"/>
             </a:endParaRPr>
           </a:p>
           <a:p>
@@ -1576,9 +3343,9 @@
               </a:lnSpc>
             </a:pPr>
             <a:endParaRPr sz="1200" dirty="0">
-              <a:latin typeface="Arial" panose="020B0604020202090204"/>
-              <a:ea typeface="Arial" panose="020B0604020202090204"/>
-              <a:cs typeface="Arial" panose="020B0604020202090204"/>
+              <a:latin typeface="Arial" panose="020B0604020202020204"/>
+              <a:ea typeface="Arial" panose="020B0604020202020204"/>
+              <a:cs typeface="Arial" panose="020B0604020202020204"/>
             </a:endParaRPr>
           </a:p>
           <a:p>
@@ -2075,9 +3842,9 @@
               </a:lnSpc>
             </a:pPr>
             <a:endParaRPr sz="100" dirty="0">
-              <a:latin typeface="Arial" panose="020B0604020202090204"/>
-              <a:ea typeface="Arial" panose="020B0604020202090204"/>
-              <a:cs typeface="Arial" panose="020B0604020202090204"/>
+              <a:latin typeface="Arial" panose="020B0604020202020204"/>
+              <a:ea typeface="Arial" panose="020B0604020202020204"/>
+              <a:cs typeface="Arial" panose="020B0604020202020204"/>
             </a:endParaRPr>
           </a:p>
           <a:p>
@@ -2190,9 +3957,9 @@
               </a:lnSpc>
             </a:pPr>
             <a:endParaRPr sz="100" dirty="0">
-              <a:latin typeface="Arial" panose="020B0604020202090204"/>
-              <a:ea typeface="Arial" panose="020B0604020202090204"/>
-              <a:cs typeface="Arial" panose="020B0604020202090204"/>
+              <a:latin typeface="Arial" panose="020B0604020202020204"/>
+              <a:ea typeface="Arial" panose="020B0604020202020204"/>
+              <a:cs typeface="Arial" panose="020B0604020202020204"/>
             </a:endParaRPr>
           </a:p>
           <a:p>
@@ -2356,9 +4123,9 @@
               </a:lnSpc>
             </a:pPr>
             <a:endParaRPr sz="100" dirty="0">
-              <a:latin typeface="Arial" panose="020B0604020202090204"/>
-              <a:ea typeface="Arial" panose="020B0604020202090204"/>
-              <a:cs typeface="Arial" panose="020B0604020202090204"/>
+              <a:latin typeface="Arial" panose="020B0604020202020204"/>
+              <a:ea typeface="Arial" panose="020B0604020202020204"/>
+              <a:cs typeface="Arial" panose="020B0604020202020204"/>
             </a:endParaRPr>
           </a:p>
           <a:p>
@@ -2374,16 +4141,16 @@
                     <a:alpha val="100000"/>
                   </a:srgbClr>
                 </a:solidFill>
-                <a:latin typeface="Trebuchet MS" panose="020B0703020202090204"/>
-                <a:ea typeface="Trebuchet MS" panose="020B0703020202090204"/>
-                <a:cs typeface="Trebuchet MS" panose="020B0703020202090204"/>
+                <a:latin typeface="Trebuchet MS" panose="020B0603020202020204"/>
+                <a:ea typeface="Trebuchet MS" panose="020B0603020202020204"/>
+                <a:cs typeface="Trebuchet MS" panose="020B0603020202020204"/>
               </a:rPr>
               <a:t>Implementmethods</a:t>
             </a:r>
             <a:endParaRPr sz="3600" dirty="0">
-              <a:latin typeface="Trebuchet MS" panose="020B0703020202090204"/>
-              <a:ea typeface="Trebuchet MS" panose="020B0703020202090204"/>
-              <a:cs typeface="Trebuchet MS" panose="020B0703020202090204"/>
+              <a:latin typeface="Trebuchet MS" panose="020B0603020202020204"/>
+              <a:ea typeface="Trebuchet MS" panose="020B0603020202020204"/>
+              <a:cs typeface="Trebuchet MS" panose="020B0603020202020204"/>
             </a:endParaRPr>
           </a:p>
           <a:p>
@@ -2393,9 +4160,9 @@
               </a:lnSpc>
             </a:pPr>
             <a:endParaRPr sz="1000" dirty="0">
-              <a:latin typeface="Arial" panose="020B0604020202090204"/>
-              <a:ea typeface="Arial" panose="020B0604020202090204"/>
-              <a:cs typeface="Arial" panose="020B0604020202090204"/>
+              <a:latin typeface="Arial" panose="020B0604020202020204"/>
+              <a:ea typeface="Arial" panose="020B0604020202020204"/>
+              <a:cs typeface="Arial" panose="020B0604020202020204"/>
             </a:endParaRPr>
           </a:p>
           <a:p>
@@ -2405,9 +4172,9 @@
               </a:lnSpc>
             </a:pPr>
             <a:endParaRPr sz="1000" dirty="0">
-              <a:latin typeface="Arial" panose="020B0604020202090204"/>
-              <a:ea typeface="Arial" panose="020B0604020202090204"/>
-              <a:cs typeface="Arial" panose="020B0604020202090204"/>
+              <a:latin typeface="Arial" panose="020B0604020202020204"/>
+              <a:ea typeface="Arial" panose="020B0604020202020204"/>
+              <a:cs typeface="Arial" panose="020B0604020202020204"/>
             </a:endParaRPr>
           </a:p>
           <a:p>
@@ -2426,9 +4193,9 @@
                     <a:alpha val="100000"/>
                   </a:srgbClr>
                 </a:solidFill>
-                <a:latin typeface="Trebuchet MS" panose="020B0703020202090204"/>
-                <a:ea typeface="Trebuchet MS" panose="020B0703020202090204"/>
-                <a:cs typeface="Trebuchet MS" panose="020B0703020202090204"/>
+                <a:latin typeface="Trebuchet MS" panose="020B0603020202020204"/>
+                <a:ea typeface="Trebuchet MS" panose="020B0603020202020204"/>
+                <a:cs typeface="Trebuchet MS" panose="020B0603020202020204"/>
               </a:rPr>
               <a:t>5.</a:t>
             </a:r>
@@ -2439,9 +4206,9 @@
                     <a:alpha val="100000"/>
                   </a:srgbClr>
                 </a:solidFill>
-                <a:latin typeface="Trebuchet MS" panose="020B0703020202090204"/>
-                <a:ea typeface="Trebuchet MS" panose="020B0703020202090204"/>
-                <a:cs typeface="Trebuchet MS" panose="020B0703020202090204"/>
+                <a:latin typeface="Trebuchet MS" panose="020B0603020202020204"/>
+                <a:ea typeface="Trebuchet MS" panose="020B0603020202020204"/>
+                <a:cs typeface="Trebuchet MS" panose="020B0603020202020204"/>
               </a:rPr>
               <a:t> </a:t>
             </a:r>
@@ -2452,9 +4219,9 @@
                     <a:alpha val="100000"/>
                   </a:srgbClr>
                 </a:solidFill>
-                <a:latin typeface="Trebuchet MS" panose="020B0703020202090204"/>
-                <a:ea typeface="Trebuchet MS" panose="020B0703020202090204"/>
-                <a:cs typeface="Trebuchet MS" panose="020B0703020202090204"/>
+                <a:latin typeface="Trebuchet MS" panose="020B0603020202020204"/>
+                <a:ea typeface="Trebuchet MS" panose="020B0603020202020204"/>
+                <a:cs typeface="Trebuchet MS" panose="020B0603020202020204"/>
               </a:rPr>
               <a:t>Reinforcement</a:t>
             </a:r>
@@ -2465,9 +4232,9 @@
                     <a:alpha val="100000"/>
                   </a:srgbClr>
                 </a:solidFill>
-                <a:latin typeface="Trebuchet MS" panose="020B0703020202090204"/>
-                <a:ea typeface="Trebuchet MS" panose="020B0703020202090204"/>
-                <a:cs typeface="Trebuchet MS" panose="020B0703020202090204"/>
+                <a:latin typeface="Trebuchet MS" panose="020B0603020202020204"/>
+                <a:ea typeface="Trebuchet MS" panose="020B0603020202020204"/>
+                <a:cs typeface="Trebuchet MS" panose="020B0603020202020204"/>
               </a:rPr>
               <a:t> </a:t>
             </a:r>
@@ -2478,16 +4245,16 @@
                     <a:alpha val="100000"/>
                   </a:srgbClr>
                 </a:solidFill>
-                <a:latin typeface="Trebuchet MS" panose="020B0703020202090204"/>
-                <a:ea typeface="Trebuchet MS" panose="020B0703020202090204"/>
-                <a:cs typeface="Trebuchet MS" panose="020B0703020202090204"/>
+                <a:latin typeface="Trebuchet MS" panose="020B0603020202020204"/>
+                <a:ea typeface="Trebuchet MS" panose="020B0603020202020204"/>
+                <a:cs typeface="Trebuchet MS" panose="020B0603020202020204"/>
               </a:rPr>
               <a:t>Learning</a:t>
             </a:r>
             <a:endParaRPr sz="2300" dirty="0">
-              <a:latin typeface="Trebuchet MS" panose="020B0703020202090204"/>
-              <a:ea typeface="Trebuchet MS" panose="020B0703020202090204"/>
-              <a:cs typeface="Trebuchet MS" panose="020B0703020202090204"/>
+              <a:latin typeface="Trebuchet MS" panose="020B0603020202020204"/>
+              <a:ea typeface="Trebuchet MS" panose="020B0603020202020204"/>
+              <a:cs typeface="Trebuchet MS" panose="020B0603020202020204"/>
             </a:endParaRPr>
           </a:p>
           <a:p>
@@ -2509,9 +4276,9 @@
                     <a:alpha val="100000"/>
                   </a:srgbClr>
                 </a:solidFill>
-                <a:latin typeface="Trebuchet MS" panose="020B0703020202090204"/>
-                <a:ea typeface="Trebuchet MS" panose="020B0703020202090204"/>
-                <a:cs typeface="Trebuchet MS" panose="020B0703020202090204"/>
+                <a:latin typeface="Trebuchet MS" panose="020B0603020202020204"/>
+                <a:ea typeface="Trebuchet MS" panose="020B0603020202020204"/>
+                <a:cs typeface="Trebuchet MS" panose="020B0603020202020204"/>
               </a:rPr>
               <a:t>	</a:t>
             </a:r>
@@ -2522,9 +4289,9 @@
                     <a:alpha val="100000"/>
                   </a:srgbClr>
                 </a:solidFill>
-                <a:latin typeface="Trebuchet MS" panose="020B0703020202090204"/>
-                <a:ea typeface="Trebuchet MS" panose="020B0703020202090204"/>
-                <a:cs typeface="Trebuchet MS" panose="020B0703020202090204"/>
+                <a:latin typeface="Trebuchet MS" panose="020B0603020202020204"/>
+                <a:ea typeface="Trebuchet MS" panose="020B0603020202020204"/>
+                <a:cs typeface="Trebuchet MS" panose="020B0603020202020204"/>
               </a:rPr>
               <a:t>Q-</a:t>
             </a:r>
@@ -2535,16 +4302,16 @@
                     <a:alpha val="100000"/>
                   </a:srgbClr>
                 </a:solidFill>
-                <a:latin typeface="Trebuchet MS" panose="020B0703020202090204"/>
-                <a:ea typeface="Trebuchet MS" panose="020B0703020202090204"/>
-                <a:cs typeface="Trebuchet MS" panose="020B0703020202090204"/>
+                <a:latin typeface="Trebuchet MS" panose="020B0603020202020204"/>
+                <a:ea typeface="Trebuchet MS" panose="020B0603020202020204"/>
+                <a:cs typeface="Trebuchet MS" panose="020B0603020202020204"/>
               </a:rPr>
               <a:t>Learning</a:t>
             </a:r>
             <a:endParaRPr sz="2100" dirty="0">
-              <a:latin typeface="Trebuchet MS" panose="020B0703020202090204"/>
-              <a:ea typeface="Trebuchet MS" panose="020B0703020202090204"/>
-              <a:cs typeface="Trebuchet MS" panose="020B0703020202090204"/>
+              <a:latin typeface="Trebuchet MS" panose="020B0603020202020204"/>
+              <a:ea typeface="Trebuchet MS" panose="020B0603020202020204"/>
+              <a:cs typeface="Trebuchet MS" panose="020B0603020202020204"/>
             </a:endParaRPr>
           </a:p>
           <a:p>
@@ -2623,9 +4390,9 @@
                     <a:alpha val="100000"/>
                   </a:srgbClr>
                 </a:solidFill>
-                <a:latin typeface="Trebuchet MS" panose="020B0703020202090204"/>
-                <a:ea typeface="Trebuchet MS" panose="020B0703020202090204"/>
-                <a:cs typeface="Trebuchet MS" panose="020B0703020202090204"/>
+                <a:latin typeface="Trebuchet MS" panose="020B0603020202020204"/>
+                <a:ea typeface="Trebuchet MS" panose="020B0603020202020204"/>
+                <a:cs typeface="Trebuchet MS" panose="020B0603020202020204"/>
               </a:rPr>
               <a:t>	</a:t>
             </a:r>
@@ -2636,9 +4403,9 @@
                     <a:alpha val="100000"/>
                   </a:srgbClr>
                 </a:solidFill>
-                <a:latin typeface="Trebuchet MS" panose="020B0703020202090204"/>
-                <a:ea typeface="Trebuchet MS" panose="020B0703020202090204"/>
-                <a:cs typeface="Trebuchet MS" panose="020B0703020202090204"/>
+                <a:latin typeface="Trebuchet MS" panose="020B0603020202020204"/>
+                <a:ea typeface="Trebuchet MS" panose="020B0603020202020204"/>
+                <a:cs typeface="Trebuchet MS" panose="020B0603020202020204"/>
               </a:rPr>
               <a:t>ε-</a:t>
             </a:r>
@@ -2649,9 +4416,9 @@
                     <a:alpha val="100000"/>
                   </a:srgbClr>
                 </a:solidFill>
-                <a:latin typeface="Trebuchet MS" panose="020B0703020202090204"/>
-                <a:ea typeface="Trebuchet MS" panose="020B0703020202090204"/>
-                <a:cs typeface="Trebuchet MS" panose="020B0703020202090204"/>
+                <a:latin typeface="Trebuchet MS" panose="020B0603020202020204"/>
+                <a:ea typeface="Trebuchet MS" panose="020B0603020202020204"/>
+                <a:cs typeface="Trebuchet MS" panose="020B0603020202020204"/>
               </a:rPr>
               <a:t>Greedy</a:t>
             </a:r>
@@ -2662,9 +4429,9 @@
                     <a:alpha val="100000"/>
                   </a:srgbClr>
                 </a:solidFill>
-                <a:latin typeface="Trebuchet MS" panose="020B0703020202090204"/>
-                <a:ea typeface="Trebuchet MS" panose="020B0703020202090204"/>
-                <a:cs typeface="Trebuchet MS" panose="020B0703020202090204"/>
+                <a:latin typeface="Trebuchet MS" panose="020B0603020202020204"/>
+                <a:ea typeface="Trebuchet MS" panose="020B0603020202020204"/>
+                <a:cs typeface="Trebuchet MS" panose="020B0603020202020204"/>
               </a:rPr>
               <a:t> </a:t>
             </a:r>
@@ -2675,16 +4442,16 @@
                     <a:alpha val="100000"/>
                   </a:srgbClr>
                 </a:solidFill>
-                <a:latin typeface="Trebuchet MS" panose="020B0703020202090204"/>
-                <a:ea typeface="Trebuchet MS" panose="020B0703020202090204"/>
-                <a:cs typeface="Trebuchet MS" panose="020B0703020202090204"/>
+                <a:latin typeface="Trebuchet MS" panose="020B0603020202020204"/>
+                <a:ea typeface="Trebuchet MS" panose="020B0603020202020204"/>
+                <a:cs typeface="Trebuchet MS" panose="020B0603020202020204"/>
               </a:rPr>
               <a:t>Policy</a:t>
             </a:r>
             <a:endParaRPr sz="2100" dirty="0">
-              <a:latin typeface="Trebuchet MS" panose="020B0703020202090204"/>
-              <a:ea typeface="Trebuchet MS" panose="020B0703020202090204"/>
-              <a:cs typeface="Trebuchet MS" panose="020B0703020202090204"/>
+              <a:latin typeface="Trebuchet MS" panose="020B0603020202020204"/>
+              <a:ea typeface="Trebuchet MS" panose="020B0603020202020204"/>
+              <a:cs typeface="Trebuchet MS" panose="020B0603020202020204"/>
             </a:endParaRPr>
           </a:p>
           <a:p>
@@ -2771,9 +4538,9 @@
                     <a:alpha val="100000"/>
                   </a:srgbClr>
                 </a:solidFill>
-                <a:latin typeface="Arial" panose="020B0604020202090204"/>
-                <a:ea typeface="Arial" panose="020B0604020202090204"/>
-                <a:cs typeface="Arial" panose="020B0604020202090204"/>
+                <a:latin typeface="Arial" panose="020B0604020202020204"/>
+                <a:ea typeface="Arial" panose="020B0604020202020204"/>
+                <a:cs typeface="Arial" panose="020B0604020202020204"/>
               </a:rPr>
               <a:t>.</a:t>
             </a:r>
@@ -2784,9 +4551,9 @@
                     <a:alpha val="100000"/>
                   </a:srgbClr>
                 </a:solidFill>
-                <a:latin typeface="Arial" panose="020B0604020202090204"/>
-                <a:ea typeface="Arial" panose="020B0604020202090204"/>
-                <a:cs typeface="Arial" panose="020B0604020202090204"/>
+                <a:latin typeface="Arial" panose="020B0604020202020204"/>
+                <a:ea typeface="Arial" panose="020B0604020202020204"/>
+                <a:cs typeface="Arial" panose="020B0604020202020204"/>
               </a:rPr>
               <a:t>  </a:t>
             </a:r>
@@ -2797,9 +4564,9 @@
                     <a:alpha val="100000"/>
                   </a:srgbClr>
                 </a:solidFill>
-                <a:latin typeface="Trebuchet MS" panose="020B0703020202090204"/>
-                <a:ea typeface="Trebuchet MS" panose="020B0703020202090204"/>
-                <a:cs typeface="Trebuchet MS" panose="020B0703020202090204"/>
+                <a:latin typeface="Trebuchet MS" panose="020B0603020202020204"/>
+                <a:ea typeface="Trebuchet MS" panose="020B0603020202020204"/>
+                <a:cs typeface="Trebuchet MS" panose="020B0603020202020204"/>
               </a:rPr>
               <a:t>Policy</a:t>
             </a:r>
@@ -2810,9 +4577,9 @@
                     <a:alpha val="100000"/>
                   </a:srgbClr>
                 </a:solidFill>
-                <a:latin typeface="Trebuchet MS" panose="020B0703020202090204"/>
-                <a:ea typeface="Trebuchet MS" panose="020B0703020202090204"/>
-                <a:cs typeface="Trebuchet MS" panose="020B0703020202090204"/>
+                <a:latin typeface="Trebuchet MS" panose="020B0603020202020204"/>
+                <a:ea typeface="Trebuchet MS" panose="020B0603020202020204"/>
+                <a:cs typeface="Trebuchet MS" panose="020B0603020202020204"/>
               </a:rPr>
               <a:t> </a:t>
             </a:r>
@@ -2823,16 +4590,16 @@
                     <a:alpha val="100000"/>
                   </a:srgbClr>
                 </a:solidFill>
-                <a:latin typeface="Trebuchet MS" panose="020B0703020202090204"/>
-                <a:ea typeface="Trebuchet MS" panose="020B0703020202090204"/>
-                <a:cs typeface="Trebuchet MS" panose="020B0703020202090204"/>
+                <a:latin typeface="Trebuchet MS" panose="020B0603020202020204"/>
+                <a:ea typeface="Trebuchet MS" panose="020B0603020202020204"/>
+                <a:cs typeface="Trebuchet MS" panose="020B0603020202020204"/>
               </a:rPr>
               <a:t>Search</a:t>
             </a:r>
             <a:endParaRPr sz="2100" dirty="0">
-              <a:latin typeface="Trebuchet MS" panose="020B0703020202090204"/>
-              <a:ea typeface="Trebuchet MS" panose="020B0703020202090204"/>
-              <a:cs typeface="Trebuchet MS" panose="020B0703020202090204"/>
+              <a:latin typeface="Trebuchet MS" panose="020B0603020202020204"/>
+              <a:ea typeface="Trebuchet MS" panose="020B0603020202020204"/>
+              <a:cs typeface="Trebuchet MS" panose="020B0603020202020204"/>
             </a:endParaRPr>
           </a:p>
           <a:p>
@@ -2842,9 +4609,9 @@
               </a:lnSpc>
             </a:pPr>
             <a:endParaRPr sz="700" dirty="0">
-              <a:latin typeface="Arial" panose="020B0604020202090204"/>
-              <a:ea typeface="Arial" panose="020B0604020202090204"/>
-              <a:cs typeface="Arial" panose="020B0604020202090204"/>
+              <a:latin typeface="Arial" panose="020B0604020202020204"/>
+              <a:ea typeface="Arial" panose="020B0604020202020204"/>
+              <a:cs typeface="Arial" panose="020B0604020202020204"/>
             </a:endParaRPr>
           </a:p>
           <a:p>
@@ -3354,9 +5121,9 @@
               </a:lnSpc>
             </a:pPr>
             <a:endParaRPr sz="100" dirty="0">
-              <a:latin typeface="Arial" panose="020B0604020202090204"/>
-              <a:ea typeface="Arial" panose="020B0604020202090204"/>
-              <a:cs typeface="Arial" panose="020B0604020202090204"/>
+              <a:latin typeface="Arial" panose="020B0604020202020204"/>
+              <a:ea typeface="Arial" panose="020B0604020202020204"/>
+              <a:cs typeface="Arial" panose="020B0604020202020204"/>
             </a:endParaRPr>
           </a:p>
           <a:p>
@@ -3469,9 +5236,9 @@
               </a:lnSpc>
             </a:pPr>
             <a:endParaRPr sz="100" dirty="0">
-              <a:latin typeface="Arial" panose="020B0604020202090204"/>
-              <a:ea typeface="Arial" panose="020B0604020202090204"/>
-              <a:cs typeface="Arial" panose="020B0604020202090204"/>
+              <a:latin typeface="Arial" panose="020B0604020202020204"/>
+              <a:ea typeface="Arial" panose="020B0604020202020204"/>
+              <a:cs typeface="Arial" panose="020B0604020202020204"/>
             </a:endParaRPr>
           </a:p>
           <a:p>
@@ -3659,9 +5426,9 @@
               </a:lnSpc>
             </a:pPr>
             <a:endParaRPr sz="100" dirty="0">
-              <a:latin typeface="Arial" panose="020B0604020202090204"/>
-              <a:ea typeface="Arial" panose="020B0604020202090204"/>
-              <a:cs typeface="Arial" panose="020B0604020202090204"/>
+              <a:latin typeface="Arial" panose="020B0604020202020204"/>
+              <a:ea typeface="Arial" panose="020B0604020202020204"/>
+              <a:cs typeface="Arial" panose="020B0604020202020204"/>
             </a:endParaRPr>
           </a:p>
           <a:p>
@@ -3774,9 +5541,9 @@
               </a:lnSpc>
             </a:pPr>
             <a:endParaRPr sz="100" dirty="0">
-              <a:latin typeface="Arial" panose="020B0604020202090204"/>
-              <a:ea typeface="Arial" panose="020B0604020202090204"/>
-              <a:cs typeface="Arial" panose="020B0604020202090204"/>
+              <a:latin typeface="Arial" panose="020B0604020202020204"/>
+              <a:ea typeface="Arial" panose="020B0604020202020204"/>
+              <a:cs typeface="Arial" panose="020B0604020202020204"/>
             </a:endParaRPr>
           </a:p>
           <a:p>
@@ -3792,9 +5559,9 @@
                     <a:alpha val="100000"/>
                   </a:srgbClr>
                 </a:solidFill>
-                <a:latin typeface="Trebuchet MS" panose="020B0703020202090204"/>
-                <a:ea typeface="Trebuchet MS" panose="020B0703020202090204"/>
-                <a:cs typeface="Trebuchet MS" panose="020B0703020202090204"/>
+                <a:latin typeface="Trebuchet MS" panose="020B0603020202020204"/>
+                <a:ea typeface="Trebuchet MS" panose="020B0603020202020204"/>
+                <a:cs typeface="Trebuchet MS" panose="020B0603020202020204"/>
               </a:rPr>
               <a:t>Thank</a:t>
             </a:r>
@@ -3805,9 +5572,9 @@
                     <a:alpha val="100000"/>
                   </a:srgbClr>
                 </a:solidFill>
-                <a:latin typeface="Trebuchet MS" panose="020B0703020202090204"/>
-                <a:ea typeface="Trebuchet MS" panose="020B0703020202090204"/>
-                <a:cs typeface="Trebuchet MS" panose="020B0703020202090204"/>
+                <a:latin typeface="Trebuchet MS" panose="020B0603020202020204"/>
+                <a:ea typeface="Trebuchet MS" panose="020B0603020202020204"/>
+                <a:cs typeface="Trebuchet MS" panose="020B0603020202020204"/>
               </a:rPr>
               <a:t> </a:t>
             </a:r>
@@ -3818,16 +5585,16 @@
                     <a:alpha val="100000"/>
                   </a:srgbClr>
                 </a:solidFill>
-                <a:latin typeface="Trebuchet MS" panose="020B0703020202090204"/>
-                <a:ea typeface="Trebuchet MS" panose="020B0703020202090204"/>
-                <a:cs typeface="Trebuchet MS" panose="020B0703020202090204"/>
+                <a:latin typeface="Trebuchet MS" panose="020B0603020202020204"/>
+                <a:ea typeface="Trebuchet MS" panose="020B0603020202020204"/>
+                <a:cs typeface="Trebuchet MS" panose="020B0603020202020204"/>
               </a:rPr>
               <a:t>you</a:t>
             </a:r>
             <a:endParaRPr sz="4600" dirty="0">
-              <a:latin typeface="Trebuchet MS" panose="020B0703020202090204"/>
-              <a:ea typeface="Trebuchet MS" panose="020B0703020202090204"/>
-              <a:cs typeface="Trebuchet MS" panose="020B0703020202090204"/>
+              <a:latin typeface="Trebuchet MS" panose="020B0603020202020204"/>
+              <a:ea typeface="Trebuchet MS" panose="020B0603020202020204"/>
+              <a:cs typeface="Trebuchet MS" panose="020B0603020202020204"/>
             </a:endParaRPr>
           </a:p>
         </p:txBody>
@@ -3863,9 +5630,9 @@
               </a:lnSpc>
             </a:pPr>
             <a:endParaRPr sz="100" dirty="0">
-              <a:latin typeface="Arial" panose="020B0604020202090204"/>
-              <a:ea typeface="Arial" panose="020B0604020202090204"/>
-              <a:cs typeface="Arial" panose="020B0604020202090204"/>
+              <a:latin typeface="Arial" panose="020B0604020202020204"/>
+              <a:ea typeface="Arial" panose="020B0604020202020204"/>
+              <a:cs typeface="Arial" panose="020B0604020202020204"/>
             </a:endParaRPr>
           </a:p>
           <a:p>
@@ -4053,9 +5820,9 @@
               </a:lnSpc>
             </a:pPr>
             <a:endParaRPr sz="100" dirty="0">
-              <a:latin typeface="Arial" panose="020B0604020202090204"/>
-              <a:ea typeface="Arial" panose="020B0604020202090204"/>
-              <a:cs typeface="Arial" panose="020B0604020202090204"/>
+              <a:latin typeface="Arial" panose="020B0604020202020204"/>
+              <a:ea typeface="Arial" panose="020B0604020202020204"/>
+              <a:cs typeface="Arial" panose="020B0604020202020204"/>
             </a:endParaRPr>
           </a:p>
           <a:p>
@@ -4071,9 +5838,9 @@
                     <a:alpha val="100000"/>
                   </a:srgbClr>
                 </a:solidFill>
-                <a:latin typeface="Arial" panose="020B0604020202090204"/>
-                <a:ea typeface="Arial" panose="020B0604020202090204"/>
-                <a:cs typeface="Arial" panose="020B0604020202090204"/>
+                <a:latin typeface="Arial" panose="020B0604020202020204"/>
+                <a:ea typeface="Arial" panose="020B0604020202020204"/>
+                <a:cs typeface="Arial" panose="020B0604020202020204"/>
               </a:rPr>
               <a:t>.</a:t>
             </a:r>
@@ -4084,9 +5851,9 @@
                     <a:alpha val="100000"/>
                   </a:srgbClr>
                 </a:solidFill>
-                <a:latin typeface="Arial" panose="020B0604020202090204"/>
-                <a:ea typeface="Arial" panose="020B0604020202090204"/>
-                <a:cs typeface="Arial" panose="020B0604020202090204"/>
+                <a:latin typeface="Arial" panose="020B0604020202020204"/>
+                <a:ea typeface="Arial" panose="020B0604020202020204"/>
+                <a:cs typeface="Arial" panose="020B0604020202020204"/>
               </a:rPr>
               <a:t>  </a:t>
             </a:r>
@@ -4174,9 +5941,9 @@
                     <a:alpha val="100000"/>
                   </a:srgbClr>
                 </a:solidFill>
-                <a:latin typeface="Trebuchet MS" panose="020B0703020202090204"/>
-                <a:ea typeface="Trebuchet MS" panose="020B0703020202090204"/>
-                <a:cs typeface="Trebuchet MS" panose="020B0703020202090204"/>
+                <a:latin typeface="Trebuchet MS" panose="020B0603020202020204"/>
+                <a:ea typeface="Trebuchet MS" panose="020B0603020202020204"/>
+                <a:cs typeface="Trebuchet MS" panose="020B0603020202020204"/>
               </a:rPr>
               <a:t>adversarial</a:t>
             </a:r>
@@ -4187,9 +5954,9 @@
                     <a:alpha val="100000"/>
                   </a:srgbClr>
                 </a:solidFill>
-                <a:latin typeface="Trebuchet MS" panose="020B0703020202090204"/>
-                <a:ea typeface="Trebuchet MS" panose="020B0703020202090204"/>
-                <a:cs typeface="Trebuchet MS" panose="020B0703020202090204"/>
+                <a:latin typeface="Trebuchet MS" panose="020B0603020202020204"/>
+                <a:ea typeface="Trebuchet MS" panose="020B0603020202020204"/>
+                <a:cs typeface="Trebuchet MS" panose="020B0603020202020204"/>
               </a:rPr>
               <a:t> </a:t>
             </a:r>
@@ -4200,9 +5967,9 @@
                     <a:alpha val="100000"/>
                   </a:srgbClr>
                 </a:solidFill>
-                <a:latin typeface="Trebuchet MS" panose="020B0703020202090204"/>
-                <a:ea typeface="Trebuchet MS" panose="020B0703020202090204"/>
-                <a:cs typeface="Trebuchet MS" panose="020B0703020202090204"/>
+                <a:latin typeface="Trebuchet MS" panose="020B0603020202020204"/>
+                <a:ea typeface="Trebuchet MS" panose="020B0603020202020204"/>
+                <a:cs typeface="Trebuchet MS" panose="020B0603020202020204"/>
               </a:rPr>
               <a:t>d</a:t>
             </a:r>
@@ -4213,16 +5980,16 @@
                     <a:alpha val="100000"/>
                   </a:srgbClr>
                 </a:solidFill>
-                <a:latin typeface="Trebuchet MS" panose="020B0703020202090204"/>
-                <a:ea typeface="Trebuchet MS" panose="020B0703020202090204"/>
-                <a:cs typeface="Trebuchet MS" panose="020B0703020202090204"/>
+                <a:latin typeface="Trebuchet MS" panose="020B0603020202020204"/>
+                <a:ea typeface="Trebuchet MS" panose="020B0603020202020204"/>
+                <a:cs typeface="Trebuchet MS" panose="020B0603020202020204"/>
               </a:rPr>
               <a:t>ecision-</a:t>
             </a:r>
             <a:endParaRPr sz="2100" dirty="0">
-              <a:latin typeface="Trebuchet MS" panose="020B0703020202090204"/>
-              <a:ea typeface="Trebuchet MS" panose="020B0703020202090204"/>
-              <a:cs typeface="Trebuchet MS" panose="020B0703020202090204"/>
+              <a:latin typeface="Trebuchet MS" panose="020B0603020202020204"/>
+              <a:ea typeface="Trebuchet MS" panose="020B0603020202020204"/>
+              <a:cs typeface="Trebuchet MS" panose="020B0603020202020204"/>
             </a:endParaRPr>
           </a:p>
           <a:p>
@@ -4241,9 +6008,9 @@
                     <a:alpha val="100000"/>
                   </a:srgbClr>
                 </a:solidFill>
-                <a:latin typeface="Trebuchet MS" panose="020B0703020202090204"/>
-                <a:ea typeface="Trebuchet MS" panose="020B0703020202090204"/>
-                <a:cs typeface="Trebuchet MS" panose="020B0703020202090204"/>
+                <a:latin typeface="Trebuchet MS" panose="020B0603020202020204"/>
+                <a:ea typeface="Trebuchet MS" panose="020B0603020202020204"/>
+                <a:cs typeface="Trebuchet MS" panose="020B0603020202020204"/>
               </a:rPr>
               <a:t>making</a:t>
             </a:r>
@@ -4311,9 +6078,9 @@
                     <a:alpha val="100000"/>
                   </a:srgbClr>
                 </a:solidFill>
-                <a:latin typeface="Trebuchet MS" panose="020B0703020202090204"/>
-                <a:ea typeface="Trebuchet MS" panose="020B0703020202090204"/>
-                <a:cs typeface="Trebuchet MS" panose="020B0703020202090204"/>
+                <a:latin typeface="Trebuchet MS" panose="020B0603020202020204"/>
+                <a:ea typeface="Trebuchet MS" panose="020B0603020202020204"/>
+                <a:cs typeface="Trebuchet MS" panose="020B0603020202020204"/>
               </a:rPr>
               <a:t>team</a:t>
             </a:r>
@@ -4324,9 +6091,9 @@
                     <a:alpha val="100000"/>
                   </a:srgbClr>
                 </a:solidFill>
-                <a:latin typeface="Trebuchet MS" panose="020B0703020202090204"/>
-                <a:ea typeface="Trebuchet MS" panose="020B0703020202090204"/>
-                <a:cs typeface="Trebuchet MS" panose="020B0703020202090204"/>
+                <a:latin typeface="Trebuchet MS" panose="020B0603020202020204"/>
+                <a:ea typeface="Trebuchet MS" panose="020B0603020202020204"/>
+                <a:cs typeface="Trebuchet MS" panose="020B0603020202020204"/>
               </a:rPr>
               <a:t> </a:t>
             </a:r>
@@ -4337,9 +6104,9 @@
                     <a:alpha val="100000"/>
                   </a:srgbClr>
                 </a:solidFill>
-                <a:latin typeface="Trebuchet MS" panose="020B0703020202090204"/>
-                <a:ea typeface="Trebuchet MS" panose="020B0703020202090204"/>
-                <a:cs typeface="Trebuchet MS" panose="020B0703020202090204"/>
+                <a:latin typeface="Trebuchet MS" panose="020B0603020202020204"/>
+                <a:ea typeface="Trebuchet MS" panose="020B0603020202020204"/>
+                <a:cs typeface="Trebuchet MS" panose="020B0603020202020204"/>
               </a:rPr>
               <a:t>cooperat</a:t>
             </a:r>
@@ -4350,9 +6117,9 @@
                     <a:alpha val="100000"/>
                   </a:srgbClr>
                 </a:solidFill>
-                <a:latin typeface="Trebuchet MS" panose="020B0703020202090204"/>
-                <a:ea typeface="Trebuchet MS" panose="020B0703020202090204"/>
-                <a:cs typeface="Trebuchet MS" panose="020B0703020202090204"/>
+                <a:latin typeface="Trebuchet MS" panose="020B0603020202020204"/>
+                <a:ea typeface="Trebuchet MS" panose="020B0603020202020204"/>
+                <a:cs typeface="Trebuchet MS" panose="020B0603020202020204"/>
               </a:rPr>
               <a:t>ion</a:t>
             </a:r>
@@ -4481,9 +6248,9 @@
                     <a:alpha val="100000"/>
                   </a:srgbClr>
                 </a:solidFill>
-                <a:latin typeface="Arial" panose="020B0604020202090204"/>
-                <a:ea typeface="Arial" panose="020B0604020202090204"/>
-                <a:cs typeface="Arial" panose="020B0604020202090204"/>
+                <a:latin typeface="Arial" panose="020B0604020202020204"/>
+                <a:ea typeface="Arial" panose="020B0604020202020204"/>
+                <a:cs typeface="Arial" panose="020B0604020202020204"/>
               </a:rPr>
               <a:t>.</a:t>
             </a:r>
@@ -4494,9 +6261,9 @@
                     <a:alpha val="100000"/>
                   </a:srgbClr>
                 </a:solidFill>
-                <a:latin typeface="Arial" panose="020B0604020202090204"/>
-                <a:ea typeface="Arial" panose="020B0604020202090204"/>
-                <a:cs typeface="Arial" panose="020B0604020202090204"/>
+                <a:latin typeface="Arial" panose="020B0604020202020204"/>
+                <a:ea typeface="Arial" panose="020B0604020202020204"/>
+                <a:cs typeface="Arial" panose="020B0604020202020204"/>
               </a:rPr>
               <a:t> </a:t>
             </a:r>
@@ -4533,9 +6300,9 @@
                     <a:alpha val="100000"/>
                   </a:srgbClr>
                 </a:solidFill>
-                <a:latin typeface="Trebuchet MS" panose="020B0703020202090204"/>
-                <a:ea typeface="Trebuchet MS" panose="020B0703020202090204"/>
-                <a:cs typeface="Trebuchet MS" panose="020B0703020202090204"/>
+                <a:latin typeface="Trebuchet MS" panose="020B0603020202020204"/>
+                <a:ea typeface="Trebuchet MS" panose="020B0603020202020204"/>
+                <a:cs typeface="Trebuchet MS" panose="020B0603020202020204"/>
               </a:rPr>
               <a:t>imperfect</a:t>
             </a:r>
@@ -4546,9 +6313,9 @@
                     <a:alpha val="100000"/>
                   </a:srgbClr>
                 </a:solidFill>
-                <a:latin typeface="Trebuchet MS" panose="020B0703020202090204"/>
-                <a:ea typeface="Trebuchet MS" panose="020B0703020202090204"/>
-                <a:cs typeface="Trebuchet MS" panose="020B0703020202090204"/>
+                <a:latin typeface="Trebuchet MS" panose="020B0603020202020204"/>
+                <a:ea typeface="Trebuchet MS" panose="020B0603020202020204"/>
+                <a:cs typeface="Trebuchet MS" panose="020B0603020202020204"/>
               </a:rPr>
               <a:t> </a:t>
             </a:r>
@@ -4559,9 +6326,9 @@
                     <a:alpha val="100000"/>
                   </a:srgbClr>
                 </a:solidFill>
-                <a:latin typeface="Trebuchet MS" panose="020B0703020202090204"/>
-                <a:ea typeface="Trebuchet MS" panose="020B0703020202090204"/>
-                <a:cs typeface="Trebuchet MS" panose="020B0703020202090204"/>
+                <a:latin typeface="Trebuchet MS" panose="020B0603020202020204"/>
+                <a:ea typeface="Trebuchet MS" panose="020B0603020202020204"/>
+                <a:cs typeface="Trebuchet MS" panose="020B0603020202020204"/>
               </a:rPr>
               <a:t>informatio</a:t>
             </a:r>
@@ -4572,9 +6339,9 @@
                     <a:alpha val="100000"/>
                   </a:srgbClr>
                 </a:solidFill>
-                <a:latin typeface="Trebuchet MS" panose="020B0703020202090204"/>
-                <a:ea typeface="Trebuchet MS" panose="020B0703020202090204"/>
-                <a:cs typeface="Trebuchet MS" panose="020B0703020202090204"/>
+                <a:latin typeface="Trebuchet MS" panose="020B0603020202020204"/>
+                <a:ea typeface="Trebuchet MS" panose="020B0603020202020204"/>
+                <a:cs typeface="Trebuchet MS" panose="020B0603020202020204"/>
               </a:rPr>
               <a:t>n</a:t>
             </a:r>
@@ -4763,9 +6530,9 @@
               </a:lnSpc>
             </a:pPr>
             <a:endParaRPr sz="800" dirty="0">
-              <a:latin typeface="Arial" panose="020B0604020202090204"/>
-              <a:ea typeface="Arial" panose="020B0604020202090204"/>
-              <a:cs typeface="Arial" panose="020B0604020202090204"/>
+              <a:latin typeface="Arial" panose="020B0604020202020204"/>
+              <a:ea typeface="Arial" panose="020B0604020202020204"/>
+              <a:cs typeface="Arial" panose="020B0604020202020204"/>
             </a:endParaRPr>
           </a:p>
           <a:p>
@@ -4874,9 +6641,9 @@
               </a:lnSpc>
             </a:pPr>
             <a:endParaRPr sz="100" dirty="0">
-              <a:latin typeface="Arial" panose="020B0604020202090204"/>
-              <a:ea typeface="Arial" panose="020B0604020202090204"/>
-              <a:cs typeface="Arial" panose="020B0604020202090204"/>
+              <a:latin typeface="Arial" panose="020B0604020202020204"/>
+              <a:ea typeface="Arial" panose="020B0604020202020204"/>
+              <a:cs typeface="Arial" panose="020B0604020202020204"/>
             </a:endParaRPr>
           </a:p>
           <a:p>
@@ -4976,9 +6743,9 @@
               </a:lnSpc>
             </a:pPr>
             <a:endParaRPr sz="100" dirty="0">
-              <a:latin typeface="Arial" panose="020B0604020202090204"/>
-              <a:ea typeface="Arial" panose="020B0604020202090204"/>
-              <a:cs typeface="Arial" panose="020B0604020202090204"/>
+              <a:latin typeface="Arial" panose="020B0604020202020204"/>
+              <a:ea typeface="Arial" panose="020B0604020202020204"/>
+              <a:cs typeface="Arial" panose="020B0604020202020204"/>
             </a:endParaRPr>
           </a:p>
           <a:p>
@@ -4994,16 +6761,16 @@
                     <a:alpha val="100000"/>
                   </a:srgbClr>
                 </a:solidFill>
-                <a:latin typeface="Trebuchet MS" panose="020B0703020202090204"/>
-                <a:ea typeface="Trebuchet MS" panose="020B0703020202090204"/>
-                <a:cs typeface="Trebuchet MS" panose="020B0703020202090204"/>
+                <a:latin typeface="Trebuchet MS" panose="020B0603020202020204"/>
+                <a:ea typeface="Trebuchet MS" panose="020B0603020202020204"/>
+                <a:cs typeface="Trebuchet MS" panose="020B0603020202020204"/>
               </a:rPr>
               <a:t>Motivation</a:t>
             </a:r>
             <a:endParaRPr sz="3600" dirty="0">
-              <a:latin typeface="Trebuchet MS" panose="020B0703020202090204"/>
-              <a:ea typeface="Trebuchet MS" panose="020B0703020202090204"/>
-              <a:cs typeface="Trebuchet MS" panose="020B0703020202090204"/>
+              <a:latin typeface="Trebuchet MS" panose="020B0603020202020204"/>
+              <a:ea typeface="Trebuchet MS" panose="020B0603020202020204"/>
+              <a:cs typeface="Trebuchet MS" panose="020B0603020202020204"/>
             </a:endParaRPr>
           </a:p>
         </p:txBody>
@@ -5039,9 +6806,9 @@
               </a:lnSpc>
             </a:pPr>
             <a:endParaRPr sz="100" dirty="0">
-              <a:latin typeface="Arial" panose="020B0604020202090204"/>
-              <a:ea typeface="Arial" panose="020B0604020202090204"/>
-              <a:cs typeface="Arial" panose="020B0604020202090204"/>
+              <a:latin typeface="Arial" panose="020B0604020202020204"/>
+              <a:ea typeface="Arial" panose="020B0604020202020204"/>
+              <a:cs typeface="Arial" panose="020B0604020202020204"/>
             </a:endParaRPr>
           </a:p>
           <a:p>
@@ -5229,9 +6996,9 @@
               </a:lnSpc>
             </a:pPr>
             <a:endParaRPr sz="100" dirty="0">
-              <a:latin typeface="Arial" panose="020B0604020202090204"/>
-              <a:ea typeface="Arial" panose="020B0604020202090204"/>
-              <a:cs typeface="Arial" panose="020B0604020202090204"/>
+              <a:latin typeface="Arial" panose="020B0604020202020204"/>
+              <a:ea typeface="Arial" panose="020B0604020202020204"/>
+              <a:cs typeface="Arial" panose="020B0604020202020204"/>
             </a:endParaRPr>
           </a:p>
           <a:p>
@@ -5247,9 +7014,9 @@
                     <a:alpha val="100000"/>
                   </a:srgbClr>
                 </a:solidFill>
-                <a:latin typeface="Arial" panose="020B0604020202090204"/>
-                <a:ea typeface="Arial" panose="020B0604020202090204"/>
-                <a:cs typeface="Arial" panose="020B0604020202090204"/>
+                <a:latin typeface="Arial" panose="020B0604020202020204"/>
+                <a:ea typeface="Arial" panose="020B0604020202020204"/>
+                <a:cs typeface="Arial" panose="020B0604020202020204"/>
               </a:rPr>
               <a:t>.</a:t>
             </a:r>
@@ -5260,9 +7027,9 @@
                     <a:alpha val="100000"/>
                   </a:srgbClr>
                 </a:solidFill>
-                <a:latin typeface="Arial" panose="020B0604020202090204"/>
-                <a:ea typeface="Arial" panose="020B0604020202090204"/>
-                <a:cs typeface="Arial" panose="020B0604020202090204"/>
+                <a:latin typeface="Arial" panose="020B0604020202020204"/>
+                <a:ea typeface="Arial" panose="020B0604020202020204"/>
+                <a:cs typeface="Arial" panose="020B0604020202020204"/>
               </a:rPr>
               <a:t>  </a:t>
             </a:r>
@@ -5273,9 +7040,9 @@
                     <a:alpha val="100000"/>
                   </a:srgbClr>
                 </a:solidFill>
-                <a:latin typeface="Trebuchet MS" panose="020B0703020202090204"/>
-                <a:ea typeface="Trebuchet MS" panose="020B0703020202090204"/>
-                <a:cs typeface="Trebuchet MS" panose="020B0703020202090204"/>
+                <a:latin typeface="Trebuchet MS" panose="020B0603020202020204"/>
+                <a:ea typeface="Trebuchet MS" panose="020B0603020202020204"/>
+                <a:cs typeface="Trebuchet MS" panose="020B0603020202020204"/>
               </a:rPr>
               <a:t>Players</a:t>
             </a:r>
@@ -5286,9 +7053,9 @@
                     <a:alpha val="100000"/>
                   </a:srgbClr>
                 </a:solidFill>
-                <a:latin typeface="Trebuchet MS" panose="020B0703020202090204"/>
-                <a:ea typeface="Trebuchet MS" panose="020B0703020202090204"/>
-                <a:cs typeface="Trebuchet MS" panose="020B0703020202090204"/>
+                <a:latin typeface="Trebuchet MS" panose="020B0603020202020204"/>
+                <a:ea typeface="Trebuchet MS" panose="020B0603020202020204"/>
+                <a:cs typeface="Trebuchet MS" panose="020B0603020202020204"/>
               </a:rPr>
               <a:t>:</a:t>
             </a:r>
@@ -5299,9 +7066,9 @@
                     <a:alpha val="100000"/>
                   </a:srgbClr>
                 </a:solidFill>
-                <a:latin typeface="Trebuchet MS" panose="020B0703020202090204"/>
-                <a:ea typeface="Trebuchet MS" panose="020B0703020202090204"/>
-                <a:cs typeface="Trebuchet MS" panose="020B0703020202090204"/>
+                <a:latin typeface="Trebuchet MS" panose="020B0603020202020204"/>
+                <a:ea typeface="Trebuchet MS" panose="020B0603020202020204"/>
+                <a:cs typeface="Trebuchet MS" panose="020B0603020202020204"/>
               </a:rPr>
               <a:t> </a:t>
             </a:r>
@@ -5486,9 +7253,9 @@
               </a:lnSpc>
             </a:pPr>
             <a:endParaRPr sz="1000" dirty="0">
-              <a:latin typeface="Arial" panose="020B0604020202090204"/>
-              <a:ea typeface="Arial" panose="020B0604020202090204"/>
-              <a:cs typeface="Arial" panose="020B0604020202090204"/>
+              <a:latin typeface="Arial" panose="020B0604020202020204"/>
+              <a:ea typeface="Arial" panose="020B0604020202020204"/>
+              <a:cs typeface="Arial" panose="020B0604020202020204"/>
             </a:endParaRPr>
           </a:p>
           <a:p>
@@ -5510,9 +7277,9 @@
                     <a:alpha val="100000"/>
                   </a:srgbClr>
                 </a:solidFill>
-                <a:latin typeface="Trebuchet MS" panose="020B0703020202090204"/>
-                <a:ea typeface="Trebuchet MS" panose="020B0703020202090204"/>
-                <a:cs typeface="Trebuchet MS" panose="020B0703020202090204"/>
+                <a:latin typeface="Trebuchet MS" panose="020B0603020202020204"/>
+                <a:ea typeface="Trebuchet MS" panose="020B0603020202020204"/>
+                <a:cs typeface="Trebuchet MS" panose="020B0603020202020204"/>
               </a:rPr>
               <a:t>	</a:t>
             </a:r>
@@ -5523,9 +7290,9 @@
                     <a:alpha val="100000"/>
                   </a:srgbClr>
                 </a:solidFill>
-                <a:latin typeface="Trebuchet MS" panose="020B0703020202090204"/>
-                <a:ea typeface="Trebuchet MS" panose="020B0703020202090204"/>
-                <a:cs typeface="Trebuchet MS" panose="020B0703020202090204"/>
+                <a:latin typeface="Trebuchet MS" panose="020B0603020202020204"/>
+                <a:ea typeface="Trebuchet MS" panose="020B0603020202020204"/>
+                <a:cs typeface="Trebuchet MS" panose="020B0603020202020204"/>
               </a:rPr>
               <a:t>Cards:</a:t>
             </a:r>
@@ -5536,9 +7303,9 @@
                     <a:alpha val="100000"/>
                   </a:srgbClr>
                 </a:solidFill>
-                <a:latin typeface="Trebuchet MS" panose="020B0703020202090204"/>
-                <a:ea typeface="Trebuchet MS" panose="020B0703020202090204"/>
-                <a:cs typeface="Trebuchet MS" panose="020B0703020202090204"/>
+                <a:latin typeface="Trebuchet MS" panose="020B0603020202020204"/>
+                <a:ea typeface="Trebuchet MS" panose="020B0603020202020204"/>
+                <a:cs typeface="Trebuchet MS" panose="020B0603020202020204"/>
               </a:rPr>
               <a:t> </a:t>
             </a:r>
@@ -5590,9 +7357,9 @@
                     <a:alpha val="100000"/>
                   </a:srgbClr>
                 </a:solidFill>
-                <a:latin typeface="Arial" panose="020B0604020202090204"/>
-                <a:ea typeface="Arial" panose="020B0604020202090204"/>
-                <a:cs typeface="Arial" panose="020B0604020202090204"/>
+                <a:latin typeface="Arial" panose="020B0604020202020204"/>
+                <a:ea typeface="Arial" panose="020B0604020202020204"/>
+                <a:cs typeface="Arial" panose="020B0604020202020204"/>
               </a:rPr>
               <a:t>.</a:t>
             </a:r>
@@ -5603,9 +7370,9 @@
                     <a:alpha val="100000"/>
                   </a:srgbClr>
                 </a:solidFill>
-                <a:latin typeface="Arial" panose="020B0604020202090204"/>
-                <a:ea typeface="Arial" panose="020B0604020202090204"/>
-                <a:cs typeface="Arial" panose="020B0604020202090204"/>
+                <a:latin typeface="Arial" panose="020B0604020202020204"/>
+                <a:ea typeface="Arial" panose="020B0604020202020204"/>
+                <a:cs typeface="Arial" panose="020B0604020202020204"/>
               </a:rPr>
               <a:t> </a:t>
             </a:r>
@@ -5616,9 +7383,9 @@
                     <a:alpha val="100000"/>
                   </a:srgbClr>
                 </a:solidFill>
-                <a:latin typeface="Trebuchet MS" panose="020B0703020202090204"/>
-                <a:ea typeface="Trebuchet MS" panose="020B0703020202090204"/>
-                <a:cs typeface="Trebuchet MS" panose="020B0703020202090204"/>
+                <a:latin typeface="Trebuchet MS" panose="020B0603020202020204"/>
+                <a:ea typeface="Trebuchet MS" panose="020B0603020202020204"/>
+                <a:cs typeface="Trebuchet MS" panose="020B0603020202020204"/>
               </a:rPr>
               <a:t>Goal:</a:t>
             </a:r>
@@ -5629,9 +7396,9 @@
                     <a:alpha val="100000"/>
                   </a:srgbClr>
                 </a:solidFill>
-                <a:latin typeface="Trebuchet MS" panose="020B0703020202090204"/>
-                <a:ea typeface="Trebuchet MS" panose="020B0703020202090204"/>
-                <a:cs typeface="Trebuchet MS" panose="020B0703020202090204"/>
+                <a:latin typeface="Trebuchet MS" panose="020B0603020202020204"/>
+                <a:ea typeface="Trebuchet MS" panose="020B0603020202020204"/>
+                <a:cs typeface="Trebuchet MS" panose="020B0603020202020204"/>
               </a:rPr>
               <a:t> </a:t>
             </a:r>
@@ -5761,9 +7528,9 @@
                     <a:alpha val="100000"/>
                   </a:srgbClr>
                 </a:solidFill>
-                <a:latin typeface="Arial" panose="020B0604020202090204"/>
-                <a:ea typeface="Arial" panose="020B0604020202090204"/>
-                <a:cs typeface="Arial" panose="020B0604020202090204"/>
+                <a:latin typeface="Arial" panose="020B0604020202020204"/>
+                <a:ea typeface="Arial" panose="020B0604020202020204"/>
+                <a:cs typeface="Arial" panose="020B0604020202020204"/>
               </a:rPr>
               <a:t>.</a:t>
             </a:r>
@@ -5774,9 +7541,9 @@
                     <a:alpha val="100000"/>
                   </a:srgbClr>
                 </a:solidFill>
-                <a:latin typeface="Arial" panose="020B0604020202090204"/>
-                <a:ea typeface="Arial" panose="020B0604020202090204"/>
-                <a:cs typeface="Arial" panose="020B0604020202090204"/>
+                <a:latin typeface="Arial" panose="020B0604020202020204"/>
+                <a:ea typeface="Arial" panose="020B0604020202020204"/>
+                <a:cs typeface="Arial" panose="020B0604020202020204"/>
               </a:rPr>
               <a:t> </a:t>
             </a:r>
@@ -5787,9 +7554,9 @@
                     <a:alpha val="100000"/>
                   </a:srgbClr>
                 </a:solidFill>
-                <a:latin typeface="Trebuchet MS" panose="020B0703020202090204"/>
-                <a:ea typeface="Trebuchet MS" panose="020B0703020202090204"/>
-                <a:cs typeface="Trebuchet MS" panose="020B0703020202090204"/>
+                <a:latin typeface="Trebuchet MS" panose="020B0603020202020204"/>
+                <a:ea typeface="Trebuchet MS" panose="020B0603020202020204"/>
+                <a:cs typeface="Trebuchet MS" panose="020B0603020202020204"/>
               </a:rPr>
               <a:t>State:</a:t>
             </a:r>
@@ -5800,9 +7567,9 @@
                     <a:alpha val="100000"/>
                   </a:srgbClr>
                 </a:solidFill>
-                <a:latin typeface="Trebuchet MS" panose="020B0703020202090204"/>
-                <a:ea typeface="Trebuchet MS" panose="020B0703020202090204"/>
-                <a:cs typeface="Trebuchet MS" panose="020B0703020202090204"/>
+                <a:latin typeface="Trebuchet MS" panose="020B0603020202020204"/>
+                <a:ea typeface="Trebuchet MS" panose="020B0603020202020204"/>
+                <a:cs typeface="Trebuchet MS" panose="020B0603020202020204"/>
               </a:rPr>
               <a:t> </a:t>
             </a:r>
@@ -5973,9 +7740,9 @@
                     <a:alpha val="100000"/>
                   </a:srgbClr>
                 </a:solidFill>
-                <a:latin typeface="Arial" panose="020B0604020202090204"/>
-                <a:ea typeface="Arial" panose="020B0604020202090204"/>
-                <a:cs typeface="Arial" panose="020B0604020202090204"/>
+                <a:latin typeface="Arial" panose="020B0604020202020204"/>
+                <a:ea typeface="Arial" panose="020B0604020202020204"/>
+                <a:cs typeface="Arial" panose="020B0604020202020204"/>
               </a:rPr>
               <a:t>.</a:t>
             </a:r>
@@ -5986,9 +7753,9 @@
                     <a:alpha val="100000"/>
                   </a:srgbClr>
                 </a:solidFill>
-                <a:latin typeface="Arial" panose="020B0604020202090204"/>
-                <a:ea typeface="Arial" panose="020B0604020202090204"/>
-                <a:cs typeface="Arial" panose="020B0604020202090204"/>
+                <a:latin typeface="Arial" panose="020B0604020202020204"/>
+                <a:ea typeface="Arial" panose="020B0604020202020204"/>
+                <a:cs typeface="Arial" panose="020B0604020202020204"/>
               </a:rPr>
               <a:t> </a:t>
             </a:r>
@@ -5999,9 +7766,9 @@
                     <a:alpha val="100000"/>
                   </a:srgbClr>
                 </a:solidFill>
-                <a:latin typeface="Trebuchet MS" panose="020B0703020202090204"/>
-                <a:ea typeface="Trebuchet MS" panose="020B0703020202090204"/>
-                <a:cs typeface="Trebuchet MS" panose="020B0703020202090204"/>
+                <a:latin typeface="Trebuchet MS" panose="020B0603020202020204"/>
+                <a:ea typeface="Trebuchet MS" panose="020B0603020202020204"/>
+                <a:cs typeface="Trebuchet MS" panose="020B0603020202020204"/>
               </a:rPr>
               <a:t>Action:</a:t>
             </a:r>
@@ -6012,9 +7779,9 @@
                     <a:alpha val="100000"/>
                   </a:srgbClr>
                 </a:solidFill>
-                <a:latin typeface="Trebuchet MS" panose="020B0703020202090204"/>
-                <a:ea typeface="Trebuchet MS" panose="020B0703020202090204"/>
-                <a:cs typeface="Trebuchet MS" panose="020B0703020202090204"/>
+                <a:latin typeface="Trebuchet MS" panose="020B0603020202020204"/>
+                <a:ea typeface="Trebuchet MS" panose="020B0603020202020204"/>
+                <a:cs typeface="Trebuchet MS" panose="020B0603020202020204"/>
               </a:rPr>
               <a:t> </a:t>
             </a:r>
@@ -6147,9 +7914,9 @@
               </a:lnSpc>
             </a:pPr>
             <a:endParaRPr sz="800" dirty="0">
-              <a:latin typeface="Arial" panose="020B0604020202090204"/>
-              <a:ea typeface="Arial" panose="020B0604020202090204"/>
-              <a:cs typeface="Arial" panose="020B0604020202090204"/>
+              <a:latin typeface="Arial" panose="020B0604020202020204"/>
+              <a:ea typeface="Arial" panose="020B0604020202020204"/>
+              <a:cs typeface="Arial" panose="020B0604020202020204"/>
             </a:endParaRPr>
           </a:p>
           <a:p>
@@ -6168,9 +7935,9 @@
                     <a:alpha val="100000"/>
                   </a:srgbClr>
                 </a:solidFill>
-                <a:latin typeface="Arial" panose="020B0604020202090204"/>
-                <a:ea typeface="Arial" panose="020B0604020202090204"/>
-                <a:cs typeface="Arial" panose="020B0604020202090204"/>
+                <a:latin typeface="Arial" panose="020B0604020202020204"/>
+                <a:ea typeface="Arial" panose="020B0604020202020204"/>
+                <a:cs typeface="Arial" panose="020B0604020202020204"/>
               </a:rPr>
               <a:t>·</a:t>
             </a:r>
@@ -6181,9 +7948,9 @@
                     <a:alpha val="100000"/>
                   </a:srgbClr>
                 </a:solidFill>
-                <a:latin typeface="Arial" panose="020B0604020202090204"/>
-                <a:ea typeface="Arial" panose="020B0604020202090204"/>
-                <a:cs typeface="Arial" panose="020B0604020202090204"/>
+                <a:latin typeface="Arial" panose="020B0604020202020204"/>
+                <a:ea typeface="Arial" panose="020B0604020202020204"/>
+                <a:cs typeface="Arial" panose="020B0604020202020204"/>
               </a:rPr>
               <a:t>  </a:t>
             </a:r>
@@ -6194,9 +7961,9 @@
                     <a:alpha val="100000"/>
                   </a:srgbClr>
                 </a:solidFill>
-                <a:latin typeface="Trebuchet MS" panose="020B0703020202090204"/>
-                <a:ea typeface="Trebuchet MS" panose="020B0703020202090204"/>
-                <a:cs typeface="Trebuchet MS" panose="020B0703020202090204"/>
+                <a:latin typeface="Trebuchet MS" panose="020B0603020202020204"/>
+                <a:ea typeface="Trebuchet MS" panose="020B0603020202020204"/>
+                <a:cs typeface="Trebuchet MS" panose="020B0603020202020204"/>
               </a:rPr>
               <a:t>Number</a:t>
             </a:r>
@@ -6207,9 +7974,9 @@
                     <a:alpha val="100000"/>
                   </a:srgbClr>
                 </a:solidFill>
-                <a:latin typeface="Trebuchet MS" panose="020B0703020202090204"/>
-                <a:ea typeface="Trebuchet MS" panose="020B0703020202090204"/>
-                <a:cs typeface="Trebuchet MS" panose="020B0703020202090204"/>
+                <a:latin typeface="Trebuchet MS" panose="020B0603020202020204"/>
+                <a:ea typeface="Trebuchet MS" panose="020B0603020202020204"/>
+                <a:cs typeface="Trebuchet MS" panose="020B0603020202020204"/>
               </a:rPr>
               <a:t> </a:t>
             </a:r>
@@ -6220,9 +7987,9 @@
                     <a:alpha val="100000"/>
                   </a:srgbClr>
                 </a:solidFill>
-                <a:latin typeface="Trebuchet MS" panose="020B0703020202090204"/>
-                <a:ea typeface="Trebuchet MS" panose="020B0703020202090204"/>
-                <a:cs typeface="Trebuchet MS" panose="020B0703020202090204"/>
+                <a:latin typeface="Trebuchet MS" panose="020B0603020202020204"/>
+                <a:ea typeface="Trebuchet MS" panose="020B0603020202020204"/>
+                <a:cs typeface="Trebuchet MS" panose="020B0603020202020204"/>
               </a:rPr>
               <a:t>of</a:t>
             </a:r>
@@ -6233,9 +8000,9 @@
                     <a:alpha val="100000"/>
                   </a:srgbClr>
                 </a:solidFill>
-                <a:latin typeface="Trebuchet MS" panose="020B0703020202090204"/>
-                <a:ea typeface="Trebuchet MS" panose="020B0703020202090204"/>
-                <a:cs typeface="Trebuchet MS" panose="020B0703020202090204"/>
+                <a:latin typeface="Trebuchet MS" panose="020B0603020202020204"/>
+                <a:ea typeface="Trebuchet MS" panose="020B0603020202020204"/>
+                <a:cs typeface="Trebuchet MS" panose="020B0603020202020204"/>
               </a:rPr>
               <a:t> </a:t>
             </a:r>
@@ -6246,9 +8013,9 @@
                     <a:alpha val="100000"/>
                   </a:srgbClr>
                 </a:solidFill>
-                <a:latin typeface="Trebuchet MS" panose="020B0703020202090204"/>
-                <a:ea typeface="Trebuchet MS" panose="020B0703020202090204"/>
-                <a:cs typeface="Trebuchet MS" panose="020B0703020202090204"/>
+                <a:latin typeface="Trebuchet MS" panose="020B0603020202020204"/>
+                <a:ea typeface="Trebuchet MS" panose="020B0603020202020204"/>
+                <a:cs typeface="Trebuchet MS" panose="020B0603020202020204"/>
               </a:rPr>
               <a:t>states</a:t>
             </a:r>
@@ -6259,9 +8026,9 @@
                     <a:alpha val="100000"/>
                   </a:srgbClr>
                 </a:solidFill>
-                <a:latin typeface="Trebuchet MS" panose="020B0703020202090204"/>
-                <a:ea typeface="Trebuchet MS" panose="020B0703020202090204"/>
-                <a:cs typeface="Trebuchet MS" panose="020B0703020202090204"/>
+                <a:latin typeface="Trebuchet MS" panose="020B0603020202020204"/>
+                <a:ea typeface="Trebuchet MS" panose="020B0603020202020204"/>
+                <a:cs typeface="Trebuchet MS" panose="020B0603020202020204"/>
               </a:rPr>
               <a:t>:</a:t>
             </a:r>
@@ -6272,9 +8039,9 @@
                     <a:alpha val="100000"/>
                   </a:srgbClr>
                 </a:solidFill>
-                <a:latin typeface="Trebuchet MS" panose="020B0703020202090204"/>
-                <a:ea typeface="Trebuchet MS" panose="020B0703020202090204"/>
-                <a:cs typeface="Trebuchet MS" panose="020B0703020202090204"/>
+                <a:latin typeface="Trebuchet MS" panose="020B0603020202020204"/>
+                <a:ea typeface="Trebuchet MS" panose="020B0603020202020204"/>
+                <a:cs typeface="Trebuchet MS" panose="020B0603020202020204"/>
               </a:rPr>
               <a:t> </a:t>
             </a:r>
@@ -6311,16 +8078,16 @@
                     <a:alpha val="100000"/>
                   </a:srgbClr>
                 </a:solidFill>
-                <a:latin typeface="Arial" panose="020B0604020202090204"/>
-                <a:ea typeface="Arial" panose="020B0604020202090204"/>
-                <a:cs typeface="Arial" panose="020B0604020202090204"/>
+                <a:latin typeface="Arial" panose="020B0604020202020204"/>
+                <a:ea typeface="Arial" panose="020B0604020202020204"/>
+                <a:cs typeface="Arial" panose="020B0604020202020204"/>
               </a:rPr>
               <a:t>1083</a:t>
             </a:r>
             <a:endParaRPr sz="2100" dirty="0">
-              <a:latin typeface="Arial" panose="020B0604020202090204"/>
-              <a:ea typeface="Arial" panose="020B0604020202090204"/>
-              <a:cs typeface="Arial" panose="020B0604020202090204"/>
+              <a:latin typeface="Arial" panose="020B0604020202020204"/>
+              <a:ea typeface="Arial" panose="020B0604020202020204"/>
+              <a:cs typeface="Arial" panose="020B0604020202020204"/>
             </a:endParaRPr>
           </a:p>
         </p:txBody>
@@ -6380,9 +8147,9 @@
               </a:lnSpc>
             </a:pPr>
             <a:endParaRPr sz="100" dirty="0">
-              <a:latin typeface="Arial" panose="020B0604020202090204"/>
-              <a:ea typeface="Arial" panose="020B0604020202090204"/>
-              <a:cs typeface="Arial" panose="020B0604020202090204"/>
+              <a:latin typeface="Arial" panose="020B0604020202020204"/>
+              <a:ea typeface="Arial" panose="020B0604020202020204"/>
+              <a:cs typeface="Arial" panose="020B0604020202020204"/>
             </a:endParaRPr>
           </a:p>
           <a:p>
@@ -6398,16 +8165,16 @@
                     <a:alpha val="100000"/>
                   </a:srgbClr>
                 </a:solidFill>
-                <a:latin typeface="Trebuchet MS" panose="020B0703020202090204"/>
-                <a:ea typeface="Trebuchet MS" panose="020B0703020202090204"/>
-                <a:cs typeface="Trebuchet MS" panose="020B0703020202090204"/>
+                <a:latin typeface="Trebuchet MS" panose="020B0603020202020204"/>
+                <a:ea typeface="Trebuchet MS" panose="020B0603020202020204"/>
+                <a:cs typeface="Trebuchet MS" panose="020B0603020202020204"/>
               </a:rPr>
               <a:t>Settings</a:t>
             </a:r>
             <a:endParaRPr sz="3600" dirty="0">
-              <a:latin typeface="Trebuchet MS" panose="020B0703020202090204"/>
-              <a:ea typeface="Trebuchet MS" panose="020B0703020202090204"/>
-              <a:cs typeface="Trebuchet MS" panose="020B0703020202090204"/>
+              <a:latin typeface="Trebuchet MS" panose="020B0603020202020204"/>
+              <a:ea typeface="Trebuchet MS" panose="020B0603020202020204"/>
+              <a:cs typeface="Trebuchet MS" panose="020B0603020202020204"/>
             </a:endParaRPr>
           </a:p>
           <a:p>
@@ -6417,9 +8184,9 @@
               </a:lnSpc>
             </a:pPr>
             <a:endParaRPr sz="1000" dirty="0">
-              <a:latin typeface="Arial" panose="020B0604020202090204"/>
-              <a:ea typeface="Arial" panose="020B0604020202090204"/>
-              <a:cs typeface="Arial" panose="020B0604020202090204"/>
+              <a:latin typeface="Arial" panose="020B0604020202020204"/>
+              <a:ea typeface="Arial" panose="020B0604020202020204"/>
+              <a:cs typeface="Arial" panose="020B0604020202020204"/>
             </a:endParaRPr>
           </a:p>
           <a:p>
@@ -6429,9 +8196,9 @@
               </a:lnSpc>
             </a:pPr>
             <a:endParaRPr sz="1000" dirty="0">
-              <a:latin typeface="Arial" panose="020B0604020202090204"/>
-              <a:ea typeface="Arial" panose="020B0604020202090204"/>
-              <a:cs typeface="Arial" panose="020B0604020202090204"/>
+              <a:latin typeface="Arial" panose="020B0604020202020204"/>
+              <a:ea typeface="Arial" panose="020B0604020202020204"/>
+              <a:cs typeface="Arial" panose="020B0604020202020204"/>
             </a:endParaRPr>
           </a:p>
           <a:p>
@@ -6441,9 +8208,9 @@
               </a:lnSpc>
             </a:pPr>
             <a:endParaRPr sz="500" dirty="0">
-              <a:latin typeface="Arial" panose="020B0604020202090204"/>
-              <a:ea typeface="Arial" panose="020B0604020202090204"/>
-              <a:cs typeface="Arial" panose="020B0604020202090204"/>
+              <a:latin typeface="Arial" panose="020B0604020202020204"/>
+              <a:ea typeface="Arial" panose="020B0604020202020204"/>
+              <a:cs typeface="Arial" panose="020B0604020202020204"/>
             </a:endParaRPr>
           </a:p>
           <a:p>
@@ -6462,9 +8229,9 @@
                     <a:alpha val="100000"/>
                   </a:srgbClr>
                 </a:solidFill>
-                <a:latin typeface="Trebuchet MS" panose="020B0703020202090204"/>
-                <a:ea typeface="Trebuchet MS" panose="020B0703020202090204"/>
-                <a:cs typeface="Trebuchet MS" panose="020B0703020202090204"/>
+                <a:latin typeface="Trebuchet MS" panose="020B0603020202020204"/>
+                <a:ea typeface="Trebuchet MS" panose="020B0603020202020204"/>
+                <a:cs typeface="Trebuchet MS" panose="020B0603020202020204"/>
               </a:rPr>
               <a:t>Problem</a:t>
             </a:r>
@@ -6475,9 +8242,9 @@
                     <a:alpha val="100000"/>
                   </a:srgbClr>
                 </a:solidFill>
-                <a:latin typeface="Trebuchet MS" panose="020B0703020202090204"/>
-                <a:ea typeface="Trebuchet MS" panose="020B0703020202090204"/>
-                <a:cs typeface="Trebuchet MS" panose="020B0703020202090204"/>
+                <a:latin typeface="Trebuchet MS" panose="020B0603020202020204"/>
+                <a:ea typeface="Trebuchet MS" panose="020B0603020202020204"/>
+                <a:cs typeface="Trebuchet MS" panose="020B0603020202020204"/>
               </a:rPr>
               <a:t> </a:t>
             </a:r>
@@ -6488,9 +8255,9 @@
                     <a:alpha val="100000"/>
                   </a:srgbClr>
                 </a:solidFill>
-                <a:latin typeface="Trebuchet MS" panose="020B0703020202090204"/>
-                <a:ea typeface="Trebuchet MS" panose="020B0703020202090204"/>
-                <a:cs typeface="Trebuchet MS" panose="020B0703020202090204"/>
+                <a:latin typeface="Trebuchet MS" panose="020B0603020202020204"/>
+                <a:ea typeface="Trebuchet MS" panose="020B0603020202020204"/>
+                <a:cs typeface="Trebuchet MS" panose="020B0603020202020204"/>
               </a:rPr>
               <a:t>Formulation</a:t>
             </a:r>
@@ -6501,9 +8268,9 @@
                     <a:alpha val="100000"/>
                   </a:srgbClr>
                 </a:solidFill>
-                <a:latin typeface="Trebuchet MS" panose="020B0703020202090204"/>
-                <a:ea typeface="Trebuchet MS" panose="020B0703020202090204"/>
-                <a:cs typeface="Trebuchet MS" panose="020B0703020202090204"/>
+                <a:latin typeface="Trebuchet MS" panose="020B0603020202020204"/>
+                <a:ea typeface="Trebuchet MS" panose="020B0603020202020204"/>
+                <a:cs typeface="Trebuchet MS" panose="020B0603020202020204"/>
               </a:rPr>
               <a:t> </a:t>
             </a:r>
@@ -6514,9 +8281,9 @@
                     <a:alpha val="100000"/>
                   </a:srgbClr>
                 </a:solidFill>
-                <a:latin typeface="Trebuchet MS" panose="020B0703020202090204"/>
-                <a:ea typeface="Trebuchet MS" panose="020B0703020202090204"/>
-                <a:cs typeface="Trebuchet MS" panose="020B0703020202090204"/>
+                <a:latin typeface="Trebuchet MS" panose="020B0603020202020204"/>
+                <a:ea typeface="Trebuchet MS" panose="020B0603020202020204"/>
+                <a:cs typeface="Trebuchet MS" panose="020B0603020202020204"/>
               </a:rPr>
               <a:t>/</a:t>
             </a:r>
@@ -6527,9 +8294,9 @@
                     <a:alpha val="100000"/>
                   </a:srgbClr>
                 </a:solidFill>
-                <a:latin typeface="Trebuchet MS" panose="020B0703020202090204"/>
-                <a:ea typeface="Trebuchet MS" panose="020B0703020202090204"/>
-                <a:cs typeface="Trebuchet MS" panose="020B0703020202090204"/>
+                <a:latin typeface="Trebuchet MS" panose="020B0603020202020204"/>
+                <a:ea typeface="Trebuchet MS" panose="020B0603020202020204"/>
+                <a:cs typeface="Trebuchet MS" panose="020B0603020202020204"/>
               </a:rPr>
               <a:t> </a:t>
             </a:r>
@@ -6540,9 +8307,9 @@
                     <a:alpha val="100000"/>
                   </a:srgbClr>
                 </a:solidFill>
-                <a:latin typeface="Trebuchet MS" panose="020B0703020202090204"/>
-                <a:ea typeface="Trebuchet MS" panose="020B0703020202090204"/>
-                <a:cs typeface="Trebuchet MS" panose="020B0703020202090204"/>
+                <a:latin typeface="Trebuchet MS" panose="020B0603020202020204"/>
+                <a:ea typeface="Trebuchet MS" panose="020B0603020202020204"/>
+                <a:cs typeface="Trebuchet MS" panose="020B0603020202020204"/>
               </a:rPr>
               <a:t>Environmen</a:t>
             </a:r>
@@ -6553,9 +8320,9 @@
                     <a:alpha val="100000"/>
                   </a:srgbClr>
                 </a:solidFill>
-                <a:latin typeface="Trebuchet MS" panose="020B0703020202090204"/>
-                <a:ea typeface="Trebuchet MS" panose="020B0703020202090204"/>
-                <a:cs typeface="Trebuchet MS" panose="020B0703020202090204"/>
+                <a:latin typeface="Trebuchet MS" panose="020B0603020202020204"/>
+                <a:ea typeface="Trebuchet MS" panose="020B0603020202020204"/>
+                <a:cs typeface="Trebuchet MS" panose="020B0603020202020204"/>
               </a:rPr>
               <a:t>t</a:t>
             </a:r>
@@ -6566,9 +8333,9 @@
                     <a:alpha val="100000"/>
                   </a:srgbClr>
                 </a:solidFill>
-                <a:latin typeface="Trebuchet MS" panose="020B0703020202090204"/>
-                <a:ea typeface="Trebuchet MS" panose="020B0703020202090204"/>
-                <a:cs typeface="Trebuchet MS" panose="020B0703020202090204"/>
+                <a:latin typeface="Trebuchet MS" panose="020B0603020202020204"/>
+                <a:ea typeface="Trebuchet MS" panose="020B0603020202020204"/>
+                <a:cs typeface="Trebuchet MS" panose="020B0603020202020204"/>
               </a:rPr>
               <a:t> </a:t>
             </a:r>
@@ -6579,16 +8346,16 @@
                     <a:alpha val="100000"/>
                   </a:srgbClr>
                 </a:solidFill>
-                <a:latin typeface="Trebuchet MS" panose="020B0703020202090204"/>
-                <a:ea typeface="Trebuchet MS" panose="020B0703020202090204"/>
-                <a:cs typeface="Trebuchet MS" panose="020B0703020202090204"/>
+                <a:latin typeface="Trebuchet MS" panose="020B0603020202020204"/>
+                <a:ea typeface="Trebuchet MS" panose="020B0603020202020204"/>
+                <a:cs typeface="Trebuchet MS" panose="020B0603020202020204"/>
               </a:rPr>
               <a:t>Definition</a:t>
             </a:r>
             <a:endParaRPr sz="2300" dirty="0">
-              <a:latin typeface="Trebuchet MS" panose="020B0703020202090204"/>
-              <a:ea typeface="Trebuchet MS" panose="020B0703020202090204"/>
-              <a:cs typeface="Trebuchet MS" panose="020B0703020202090204"/>
+              <a:latin typeface="Trebuchet MS" panose="020B0603020202020204"/>
+              <a:ea typeface="Trebuchet MS" panose="020B0603020202020204"/>
+              <a:cs typeface="Trebuchet MS" panose="020B0603020202020204"/>
             </a:endParaRPr>
           </a:p>
         </p:txBody>
@@ -6624,9 +8391,9 @@
               </a:lnSpc>
             </a:pPr>
             <a:endParaRPr sz="100" dirty="0">
-              <a:latin typeface="Arial" panose="020B0604020202090204"/>
-              <a:ea typeface="Arial" panose="020B0604020202090204"/>
-              <a:cs typeface="Arial" panose="020B0604020202090204"/>
+              <a:latin typeface="Arial" panose="020B0604020202020204"/>
+              <a:ea typeface="Arial" panose="020B0604020202020204"/>
+              <a:cs typeface="Arial" panose="020B0604020202020204"/>
             </a:endParaRPr>
           </a:p>
           <a:p>
@@ -6754,9 +8521,9 @@
               </a:lnSpc>
             </a:pPr>
             <a:endParaRPr sz="100" dirty="0">
-              <a:latin typeface="Arial" panose="020B0604020202090204"/>
-              <a:ea typeface="Arial" panose="020B0604020202090204"/>
-              <a:cs typeface="Arial" panose="020B0604020202090204"/>
+              <a:latin typeface="Arial" panose="020B0604020202020204"/>
+              <a:ea typeface="Arial" panose="020B0604020202020204"/>
+              <a:cs typeface="Arial" panose="020B0604020202020204"/>
             </a:endParaRPr>
           </a:p>
           <a:p>
@@ -6920,9 +8687,9 @@
               </a:lnSpc>
             </a:pPr>
             <a:endParaRPr sz="100" dirty="0">
-              <a:latin typeface="Arial" panose="020B0604020202090204"/>
-              <a:ea typeface="Arial" panose="020B0604020202090204"/>
-              <a:cs typeface="Arial" panose="020B0604020202090204"/>
+              <a:latin typeface="Arial" panose="020B0604020202020204"/>
+              <a:ea typeface="Arial" panose="020B0604020202020204"/>
+              <a:cs typeface="Arial" panose="020B0604020202020204"/>
             </a:endParaRPr>
           </a:p>
           <a:p>
@@ -6938,16 +8705,16 @@
                     <a:alpha val="100000"/>
                   </a:srgbClr>
                 </a:solidFill>
-                <a:latin typeface="Trebuchet MS" panose="020B0703020202090204"/>
-                <a:ea typeface="Trebuchet MS" panose="020B0703020202090204"/>
-                <a:cs typeface="Trebuchet MS" panose="020B0703020202090204"/>
+                <a:latin typeface="Trebuchet MS" panose="020B0603020202020204"/>
+                <a:ea typeface="Trebuchet MS" panose="020B0603020202020204"/>
+                <a:cs typeface="Trebuchet MS" panose="020B0603020202020204"/>
               </a:rPr>
               <a:t>GameRules</a:t>
             </a:r>
             <a:endParaRPr sz="3600" dirty="0">
-              <a:latin typeface="Trebuchet MS" panose="020B0703020202090204"/>
-              <a:ea typeface="Trebuchet MS" panose="020B0703020202090204"/>
-              <a:cs typeface="Trebuchet MS" panose="020B0703020202090204"/>
+              <a:latin typeface="Trebuchet MS" panose="020B0603020202020204"/>
+              <a:ea typeface="Trebuchet MS" panose="020B0603020202020204"/>
+              <a:cs typeface="Trebuchet MS" panose="020B0603020202020204"/>
             </a:endParaRPr>
           </a:p>
           <a:p>
@@ -6957,9 +8724,9 @@
               </a:lnSpc>
             </a:pPr>
             <a:endParaRPr sz="1000" dirty="0">
-              <a:latin typeface="Arial" panose="020B0604020202090204"/>
-              <a:ea typeface="Arial" panose="020B0604020202090204"/>
-              <a:cs typeface="Arial" panose="020B0604020202090204"/>
+              <a:latin typeface="Arial" panose="020B0604020202020204"/>
+              <a:ea typeface="Arial" panose="020B0604020202020204"/>
+              <a:cs typeface="Arial" panose="020B0604020202020204"/>
             </a:endParaRPr>
           </a:p>
           <a:p>
@@ -6969,9 +8736,9 @@
               </a:lnSpc>
             </a:pPr>
             <a:endParaRPr sz="1000" dirty="0">
-              <a:latin typeface="Arial" panose="020B0604020202090204"/>
-              <a:ea typeface="Arial" panose="020B0604020202090204"/>
-              <a:cs typeface="Arial" panose="020B0604020202090204"/>
+              <a:latin typeface="Arial" panose="020B0604020202020204"/>
+              <a:ea typeface="Arial" panose="020B0604020202020204"/>
+              <a:cs typeface="Arial" panose="020B0604020202020204"/>
             </a:endParaRPr>
           </a:p>
           <a:p>
@@ -6990,9 +8757,9 @@
                     <a:alpha val="100000"/>
                   </a:srgbClr>
                 </a:solidFill>
-                <a:latin typeface="Trebuchet MS" panose="020B0703020202090204"/>
-                <a:ea typeface="Trebuchet MS" panose="020B0703020202090204"/>
-                <a:cs typeface="Trebuchet MS" panose="020B0703020202090204"/>
+                <a:latin typeface="Trebuchet MS" panose="020B0603020202020204"/>
+                <a:ea typeface="Trebuchet MS" panose="020B0603020202020204"/>
+                <a:cs typeface="Trebuchet MS" panose="020B0603020202020204"/>
               </a:rPr>
               <a:t>Basic</a:t>
             </a:r>
@@ -7003,9 +8770,9 @@
                     <a:alpha val="100000"/>
                   </a:srgbClr>
                 </a:solidFill>
-                <a:latin typeface="Trebuchet MS" panose="020B0703020202090204"/>
-                <a:ea typeface="Trebuchet MS" panose="020B0703020202090204"/>
-                <a:cs typeface="Trebuchet MS" panose="020B0703020202090204"/>
+                <a:latin typeface="Trebuchet MS" panose="020B0603020202020204"/>
+                <a:ea typeface="Trebuchet MS" panose="020B0603020202020204"/>
+                <a:cs typeface="Trebuchet MS" panose="020B0603020202020204"/>
               </a:rPr>
               <a:t> </a:t>
             </a:r>
@@ -7016,16 +8783,16 @@
                     <a:alpha val="100000"/>
                   </a:srgbClr>
                 </a:solidFill>
-                <a:latin typeface="Trebuchet MS" panose="020B0703020202090204"/>
-                <a:ea typeface="Trebuchet MS" panose="020B0703020202090204"/>
-                <a:cs typeface="Trebuchet MS" panose="020B0703020202090204"/>
+                <a:latin typeface="Trebuchet MS" panose="020B0603020202020204"/>
+                <a:ea typeface="Trebuchet MS" panose="020B0603020202020204"/>
+                <a:cs typeface="Trebuchet MS" panose="020B0603020202020204"/>
               </a:rPr>
               <a:t>Rules</a:t>
             </a:r>
             <a:endParaRPr sz="2300" dirty="0">
-              <a:latin typeface="Trebuchet MS" panose="020B0703020202090204"/>
-              <a:ea typeface="Trebuchet MS" panose="020B0703020202090204"/>
-              <a:cs typeface="Trebuchet MS" panose="020B0703020202090204"/>
+              <a:latin typeface="Trebuchet MS" panose="020B0603020202020204"/>
+              <a:ea typeface="Trebuchet MS" panose="020B0603020202020204"/>
+              <a:cs typeface="Trebuchet MS" panose="020B0603020202020204"/>
             </a:endParaRPr>
           </a:p>
           <a:p>
@@ -7044,9 +8811,9 @@
                     <a:alpha val="100000"/>
                   </a:srgbClr>
                 </a:solidFill>
-                <a:latin typeface="Arial" panose="020B0604020202090204"/>
-                <a:ea typeface="Arial" panose="020B0604020202090204"/>
-                <a:cs typeface="Arial" panose="020B0604020202090204"/>
+                <a:latin typeface="Arial" panose="020B0604020202020204"/>
+                <a:ea typeface="Arial" panose="020B0604020202020204"/>
+                <a:cs typeface="Arial" panose="020B0604020202020204"/>
               </a:rPr>
               <a:t>.</a:t>
             </a:r>
@@ -7057,9 +8824,9 @@
                     <a:alpha val="100000"/>
                   </a:srgbClr>
                 </a:solidFill>
-                <a:latin typeface="Arial" panose="020B0604020202090204"/>
-                <a:ea typeface="Arial" panose="020B0604020202090204"/>
-                <a:cs typeface="Arial" panose="020B0604020202090204"/>
+                <a:latin typeface="Arial" panose="020B0604020202020204"/>
+                <a:ea typeface="Arial" panose="020B0604020202020204"/>
+                <a:cs typeface="Arial" panose="020B0604020202020204"/>
               </a:rPr>
               <a:t> </a:t>
             </a:r>
@@ -7070,9 +8837,9 @@
                     <a:alpha val="100000"/>
                   </a:srgbClr>
                 </a:solidFill>
-                <a:latin typeface="Trebuchet MS" panose="020B0703020202090204"/>
-                <a:ea typeface="Trebuchet MS" panose="020B0703020202090204"/>
-                <a:cs typeface="Trebuchet MS" panose="020B0703020202090204"/>
+                <a:latin typeface="Trebuchet MS" panose="020B0603020202020204"/>
+                <a:ea typeface="Trebuchet MS" panose="020B0603020202020204"/>
+                <a:cs typeface="Trebuchet MS" panose="020B0603020202020204"/>
               </a:rPr>
               <a:t>Card</a:t>
             </a:r>
@@ -7083,9 +8850,9 @@
                     <a:alpha val="100000"/>
                   </a:srgbClr>
                 </a:solidFill>
-                <a:latin typeface="Trebuchet MS" panose="020B0703020202090204"/>
-                <a:ea typeface="Trebuchet MS" panose="020B0703020202090204"/>
-                <a:cs typeface="Trebuchet MS" panose="020B0703020202090204"/>
+                <a:latin typeface="Trebuchet MS" panose="020B0603020202020204"/>
+                <a:ea typeface="Trebuchet MS" panose="020B0603020202020204"/>
+                <a:cs typeface="Trebuchet MS" panose="020B0603020202020204"/>
               </a:rPr>
               <a:t> </a:t>
             </a:r>
@@ -7096,9 +8863,9 @@
                     <a:alpha val="100000"/>
                   </a:srgbClr>
                 </a:solidFill>
-                <a:latin typeface="Trebuchet MS" panose="020B0703020202090204"/>
-                <a:ea typeface="Trebuchet MS" panose="020B0703020202090204"/>
-                <a:cs typeface="Trebuchet MS" panose="020B0703020202090204"/>
+                <a:latin typeface="Trebuchet MS" panose="020B0603020202020204"/>
+                <a:ea typeface="Trebuchet MS" panose="020B0603020202020204"/>
+                <a:cs typeface="Trebuchet MS" panose="020B0603020202020204"/>
               </a:rPr>
               <a:t>order</a:t>
             </a:r>
@@ -7109,9 +8876,9 @@
                     <a:alpha val="100000"/>
                   </a:srgbClr>
                 </a:solidFill>
-                <a:latin typeface="Trebuchet MS" panose="020B0703020202090204"/>
-                <a:ea typeface="Trebuchet MS" panose="020B0703020202090204"/>
-                <a:cs typeface="Trebuchet MS" panose="020B0703020202090204"/>
+                <a:latin typeface="Trebuchet MS" panose="020B0603020202020204"/>
+                <a:ea typeface="Trebuchet MS" panose="020B0603020202020204"/>
+                <a:cs typeface="Trebuchet MS" panose="020B0603020202020204"/>
               </a:rPr>
               <a:t>:</a:t>
             </a:r>
@@ -7122,9 +8889,9 @@
                     <a:alpha val="100000"/>
                   </a:srgbClr>
                 </a:solidFill>
-                <a:latin typeface="Trebuchet MS" panose="020B0703020202090204"/>
-                <a:ea typeface="Trebuchet MS" panose="020B0703020202090204"/>
-                <a:cs typeface="Trebuchet MS" panose="020B0703020202090204"/>
+                <a:latin typeface="Trebuchet MS" panose="020B0603020202020204"/>
+                <a:ea typeface="Trebuchet MS" panose="020B0603020202020204"/>
+                <a:cs typeface="Trebuchet MS" panose="020B0603020202020204"/>
               </a:rPr>
               <a:t> </a:t>
             </a:r>
@@ -7828,9 +9595,9 @@
                     <a:alpha val="100000"/>
                   </a:srgbClr>
                 </a:solidFill>
-                <a:latin typeface="Arial" panose="020B0604020202090204"/>
-                <a:ea typeface="Arial" panose="020B0604020202090204"/>
-                <a:cs typeface="Arial" panose="020B0604020202090204"/>
+                <a:latin typeface="Arial" panose="020B0604020202020204"/>
+                <a:ea typeface="Arial" panose="020B0604020202020204"/>
+                <a:cs typeface="Arial" panose="020B0604020202020204"/>
               </a:rPr>
               <a:t>.</a:t>
             </a:r>
@@ -7841,9 +9608,9 @@
                     <a:alpha val="100000"/>
                   </a:srgbClr>
                 </a:solidFill>
-                <a:latin typeface="Arial" panose="020B0604020202090204"/>
-                <a:ea typeface="Arial" panose="020B0604020202090204"/>
-                <a:cs typeface="Arial" panose="020B0604020202090204"/>
+                <a:latin typeface="Arial" panose="020B0604020202020204"/>
+                <a:ea typeface="Arial" panose="020B0604020202020204"/>
+                <a:cs typeface="Arial" panose="020B0604020202020204"/>
               </a:rPr>
               <a:t> </a:t>
             </a:r>
@@ -7934,9 +9701,9 @@
                     <a:alpha val="100000"/>
                   </a:srgbClr>
                 </a:solidFill>
-                <a:latin typeface="Arial" panose="020B0604020202090204"/>
-                <a:ea typeface="Arial" panose="020B0604020202090204"/>
-                <a:cs typeface="Arial" panose="020B0604020202090204"/>
+                <a:latin typeface="Arial" panose="020B0604020202020204"/>
+                <a:ea typeface="Arial" panose="020B0604020202020204"/>
+                <a:cs typeface="Arial" panose="020B0604020202020204"/>
               </a:rPr>
               <a:t>.</a:t>
             </a:r>
@@ -7947,9 +9714,9 @@
                     <a:alpha val="100000"/>
                   </a:srgbClr>
                 </a:solidFill>
-                <a:latin typeface="Arial" panose="020B0604020202090204"/>
-                <a:ea typeface="Arial" panose="020B0604020202090204"/>
-                <a:cs typeface="Arial" panose="020B0604020202090204"/>
+                <a:latin typeface="Arial" panose="020B0604020202020204"/>
+                <a:ea typeface="Arial" panose="020B0604020202020204"/>
+                <a:cs typeface="Arial" panose="020B0604020202020204"/>
               </a:rPr>
               <a:t>  </a:t>
             </a:r>
@@ -8038,9 +9805,9 @@
                     <a:alpha val="100000"/>
                   </a:srgbClr>
                 </a:solidFill>
-                <a:latin typeface="Trebuchet MS" panose="020B0703020202090204"/>
-                <a:ea typeface="Trebuchet MS" panose="020B0703020202090204"/>
-                <a:cs typeface="Trebuchet MS" panose="020B0703020202090204"/>
+                <a:latin typeface="Trebuchet MS" panose="020B0603020202020204"/>
+                <a:ea typeface="Trebuchet MS" panose="020B0603020202020204"/>
+                <a:cs typeface="Trebuchet MS" panose="020B0603020202020204"/>
               </a:rPr>
               <a:t>17</a:t>
             </a:r>
@@ -8051,9 +9818,9 @@
                     <a:alpha val="100000"/>
                   </a:srgbClr>
                 </a:solidFill>
-                <a:latin typeface="Trebuchet MS" panose="020B0703020202090204"/>
-                <a:ea typeface="Trebuchet MS" panose="020B0703020202090204"/>
-                <a:cs typeface="Trebuchet MS" panose="020B0703020202090204"/>
+                <a:latin typeface="Trebuchet MS" panose="020B0603020202020204"/>
+                <a:ea typeface="Trebuchet MS" panose="020B0603020202020204"/>
+                <a:cs typeface="Trebuchet MS" panose="020B0603020202020204"/>
               </a:rPr>
               <a:t> </a:t>
             </a:r>
@@ -8064,9 +9831,9 @@
                     <a:alpha val="100000"/>
                   </a:srgbClr>
                 </a:solidFill>
-                <a:latin typeface="Trebuchet MS" panose="020B0703020202090204"/>
-                <a:ea typeface="Trebuchet MS" panose="020B0703020202090204"/>
-                <a:cs typeface="Trebuchet MS" panose="020B0703020202090204"/>
+                <a:latin typeface="Trebuchet MS" panose="020B0603020202020204"/>
+                <a:ea typeface="Trebuchet MS" panose="020B0603020202020204"/>
+                <a:cs typeface="Trebuchet MS" panose="020B0603020202020204"/>
               </a:rPr>
               <a:t>cards</a:t>
             </a:r>
@@ -8105,9 +9872,9 @@
                     <a:alpha val="100000"/>
                   </a:srgbClr>
                 </a:solidFill>
-                <a:latin typeface="Arial" panose="020B0604020202090204"/>
-                <a:ea typeface="Arial" panose="020B0604020202090204"/>
-                <a:cs typeface="Arial" panose="020B0604020202090204"/>
+                <a:latin typeface="Arial" panose="020B0604020202020204"/>
+                <a:ea typeface="Arial" panose="020B0604020202020204"/>
+                <a:cs typeface="Arial" panose="020B0604020202020204"/>
               </a:rPr>
               <a:t>.</a:t>
             </a:r>
@@ -8118,9 +9885,9 @@
                     <a:alpha val="100000"/>
                   </a:srgbClr>
                 </a:solidFill>
-                <a:latin typeface="Arial" panose="020B0604020202090204"/>
-                <a:ea typeface="Arial" panose="020B0604020202090204"/>
-                <a:cs typeface="Arial" panose="020B0604020202090204"/>
+                <a:latin typeface="Arial" panose="020B0604020202020204"/>
+                <a:ea typeface="Arial" panose="020B0604020202020204"/>
+                <a:cs typeface="Arial" panose="020B0604020202020204"/>
               </a:rPr>
               <a:t> </a:t>
             </a:r>
@@ -8157,9 +9924,9 @@
                     <a:alpha val="100000"/>
                   </a:srgbClr>
                 </a:solidFill>
-                <a:latin typeface="Trebuchet MS" panose="020B0703020202090204"/>
-                <a:ea typeface="Trebuchet MS" panose="020B0703020202090204"/>
-                <a:cs typeface="Trebuchet MS" panose="020B0703020202090204"/>
+                <a:latin typeface="Trebuchet MS" panose="020B0603020202020204"/>
+                <a:ea typeface="Trebuchet MS" panose="020B0603020202020204"/>
+                <a:cs typeface="Trebuchet MS" panose="020B0603020202020204"/>
               </a:rPr>
               <a:t>3</a:t>
             </a:r>
@@ -8170,9 +9937,9 @@
                     <a:alpha val="100000"/>
                   </a:srgbClr>
                 </a:solidFill>
-                <a:latin typeface="Trebuchet MS" panose="020B0703020202090204"/>
-                <a:ea typeface="Trebuchet MS" panose="020B0703020202090204"/>
-                <a:cs typeface="Trebuchet MS" panose="020B0703020202090204"/>
+                <a:latin typeface="Trebuchet MS" panose="020B0603020202020204"/>
+                <a:ea typeface="Trebuchet MS" panose="020B0603020202020204"/>
+                <a:cs typeface="Trebuchet MS" panose="020B0603020202020204"/>
               </a:rPr>
               <a:t> </a:t>
             </a:r>
@@ -8183,9 +9950,9 @@
                     <a:alpha val="100000"/>
                   </a:srgbClr>
                 </a:solidFill>
-                <a:latin typeface="Trebuchet MS" panose="020B0703020202090204"/>
-                <a:ea typeface="Trebuchet MS" panose="020B0703020202090204"/>
-                <a:cs typeface="Trebuchet MS" panose="020B0703020202090204"/>
+                <a:latin typeface="Trebuchet MS" panose="020B0603020202020204"/>
+                <a:ea typeface="Trebuchet MS" panose="020B0603020202020204"/>
+                <a:cs typeface="Trebuchet MS" panose="020B0603020202020204"/>
               </a:rPr>
               <a:t>bottom</a:t>
             </a:r>
@@ -8196,9 +9963,9 @@
                     <a:alpha val="100000"/>
                   </a:srgbClr>
                 </a:solidFill>
-                <a:latin typeface="Trebuchet MS" panose="020B0703020202090204"/>
-                <a:ea typeface="Trebuchet MS" panose="020B0703020202090204"/>
-                <a:cs typeface="Trebuchet MS" panose="020B0703020202090204"/>
+                <a:latin typeface="Trebuchet MS" panose="020B0603020202020204"/>
+                <a:ea typeface="Trebuchet MS" panose="020B0603020202020204"/>
+                <a:cs typeface="Trebuchet MS" panose="020B0603020202020204"/>
               </a:rPr>
               <a:t> </a:t>
             </a:r>
@@ -8209,9 +9976,9 @@
                     <a:alpha val="100000"/>
                   </a:srgbClr>
                 </a:solidFill>
-                <a:latin typeface="Trebuchet MS" panose="020B0703020202090204"/>
-                <a:ea typeface="Trebuchet MS" panose="020B0703020202090204"/>
-                <a:cs typeface="Trebuchet MS" panose="020B0703020202090204"/>
+                <a:latin typeface="Trebuchet MS" panose="020B0603020202020204"/>
+                <a:ea typeface="Trebuchet MS" panose="020B0603020202020204"/>
+                <a:cs typeface="Trebuchet MS" panose="020B0603020202020204"/>
               </a:rPr>
               <a:t>cards</a:t>
             </a:r>
@@ -8222,9 +9989,9 @@
                     <a:alpha val="100000"/>
                   </a:srgbClr>
                 </a:solidFill>
-                <a:latin typeface="Trebuchet MS" panose="020B0703020202090204"/>
-                <a:ea typeface="Trebuchet MS" panose="020B0703020202090204"/>
-                <a:cs typeface="Trebuchet MS" panose="020B0703020202090204"/>
+                <a:latin typeface="Trebuchet MS" panose="020B0603020202020204"/>
+                <a:ea typeface="Trebuchet MS" panose="020B0603020202020204"/>
+                <a:cs typeface="Trebuchet MS" panose="020B0603020202020204"/>
               </a:rPr>
               <a:t> </a:t>
             </a:r>
@@ -8289,9 +10056,9 @@
                     <a:alpha val="100000"/>
                   </a:srgbClr>
                 </a:solidFill>
-                <a:latin typeface="Arial" panose="020B0604020202090204"/>
-                <a:ea typeface="Arial" panose="020B0604020202090204"/>
-                <a:cs typeface="Arial" panose="020B0604020202090204"/>
+                <a:latin typeface="Arial" panose="020B0604020202020204"/>
+                <a:ea typeface="Arial" panose="020B0604020202020204"/>
+                <a:cs typeface="Arial" panose="020B0604020202020204"/>
               </a:rPr>
               <a:t>.</a:t>
             </a:r>
@@ -8302,9 +10069,9 @@
                     <a:alpha val="100000"/>
                   </a:srgbClr>
                 </a:solidFill>
-                <a:latin typeface="Arial" panose="020B0604020202090204"/>
-                <a:ea typeface="Arial" panose="020B0604020202090204"/>
-                <a:cs typeface="Arial" panose="020B0604020202090204"/>
+                <a:latin typeface="Arial" panose="020B0604020202020204"/>
+                <a:ea typeface="Arial" panose="020B0604020202020204"/>
+                <a:cs typeface="Arial" panose="020B0604020202020204"/>
               </a:rPr>
               <a:t> </a:t>
             </a:r>
@@ -8367,9 +10134,9 @@
                     <a:alpha val="100000"/>
                   </a:srgbClr>
                 </a:solidFill>
-                <a:latin typeface="Trebuchet MS" panose="020B0703020202090204"/>
-                <a:ea typeface="Trebuchet MS" panose="020B0703020202090204"/>
-                <a:cs typeface="Trebuchet MS" panose="020B0703020202090204"/>
+                <a:latin typeface="Trebuchet MS" panose="020B0603020202020204"/>
+                <a:ea typeface="Trebuchet MS" panose="020B0603020202020204"/>
+                <a:cs typeface="Trebuchet MS" panose="020B0603020202020204"/>
               </a:rPr>
               <a:t>20</a:t>
             </a:r>
@@ -8380,9 +10147,9 @@
                     <a:alpha val="100000"/>
                   </a:srgbClr>
                 </a:solidFill>
-                <a:latin typeface="Trebuchet MS" panose="020B0703020202090204"/>
-                <a:ea typeface="Trebuchet MS" panose="020B0703020202090204"/>
-                <a:cs typeface="Trebuchet MS" panose="020B0703020202090204"/>
+                <a:latin typeface="Trebuchet MS" panose="020B0603020202020204"/>
+                <a:ea typeface="Trebuchet MS" panose="020B0603020202020204"/>
+                <a:cs typeface="Trebuchet MS" panose="020B0603020202020204"/>
               </a:rPr>
               <a:t> </a:t>
             </a:r>
@@ -8393,9 +10160,9 @@
                     <a:alpha val="100000"/>
                   </a:srgbClr>
                 </a:solidFill>
-                <a:latin typeface="Trebuchet MS" panose="020B0703020202090204"/>
-                <a:ea typeface="Trebuchet MS" panose="020B0703020202090204"/>
-                <a:cs typeface="Trebuchet MS" panose="020B0703020202090204"/>
+                <a:latin typeface="Trebuchet MS" panose="020B0603020202020204"/>
+                <a:ea typeface="Trebuchet MS" panose="020B0603020202020204"/>
+                <a:cs typeface="Trebuchet MS" panose="020B0603020202020204"/>
               </a:rPr>
               <a:t>cards</a:t>
             </a:r>
@@ -8425,9 +10192,9 @@
               </a:lnSpc>
             </a:pPr>
             <a:endParaRPr sz="1200" dirty="0">
-              <a:latin typeface="Arial" panose="020B0604020202090204"/>
-              <a:ea typeface="Arial" panose="020B0604020202090204"/>
-              <a:cs typeface="Arial" panose="020B0604020202090204"/>
+              <a:latin typeface="Arial" panose="020B0604020202020204"/>
+              <a:ea typeface="Arial" panose="020B0604020202020204"/>
+              <a:cs typeface="Arial" panose="020B0604020202020204"/>
             </a:endParaRPr>
           </a:p>
           <a:p>
@@ -8443,9 +10210,9 @@
                     <a:alpha val="100000"/>
                   </a:srgbClr>
                 </a:solidFill>
-                <a:latin typeface="Arial" panose="020B0604020202090204"/>
-                <a:ea typeface="Arial" panose="020B0604020202090204"/>
-                <a:cs typeface="Arial" panose="020B0604020202090204"/>
+                <a:latin typeface="Arial" panose="020B0604020202020204"/>
+                <a:ea typeface="Arial" panose="020B0604020202020204"/>
+                <a:cs typeface="Arial" panose="020B0604020202020204"/>
               </a:rPr>
               <a:t>.</a:t>
             </a:r>
@@ -8456,9 +10223,9 @@
                     <a:alpha val="100000"/>
                   </a:srgbClr>
                 </a:solidFill>
-                <a:latin typeface="Arial" panose="020B0604020202090204"/>
-                <a:ea typeface="Arial" panose="020B0604020202090204"/>
-                <a:cs typeface="Arial" panose="020B0604020202090204"/>
+                <a:latin typeface="Arial" panose="020B0604020202020204"/>
+                <a:ea typeface="Arial" panose="020B0604020202020204"/>
+                <a:cs typeface="Arial" panose="020B0604020202020204"/>
               </a:rPr>
               <a:t> </a:t>
             </a:r>
@@ -8527,9 +10294,9 @@
               </a:lnSpc>
             </a:pPr>
             <a:endParaRPr sz="100" dirty="0">
-              <a:latin typeface="Arial" panose="020B0604020202090204"/>
-              <a:ea typeface="Arial" panose="020B0604020202090204"/>
-              <a:cs typeface="Arial" panose="020B0604020202090204"/>
+              <a:latin typeface="Arial" panose="020B0604020202020204"/>
+              <a:ea typeface="Arial" panose="020B0604020202020204"/>
+              <a:cs typeface="Arial" panose="020B0604020202020204"/>
             </a:endParaRPr>
           </a:p>
           <a:p>
@@ -8629,9 +10396,9 @@
               </a:lnSpc>
             </a:pPr>
             <a:endParaRPr sz="100" dirty="0">
-              <a:latin typeface="Arial" panose="020B0604020202090204"/>
-              <a:ea typeface="Arial" panose="020B0604020202090204"/>
-              <a:cs typeface="Arial" panose="020B0604020202090204"/>
+              <a:latin typeface="Arial" panose="020B0604020202020204"/>
+              <a:ea typeface="Arial" panose="020B0604020202020204"/>
+              <a:cs typeface="Arial" panose="020B0604020202020204"/>
             </a:endParaRPr>
           </a:p>
           <a:p>
@@ -8795,9 +10562,9 @@
               </a:lnSpc>
             </a:pPr>
             <a:endParaRPr sz="100" dirty="0">
-              <a:latin typeface="Arial" panose="020B0604020202090204"/>
-              <a:ea typeface="Arial" panose="020B0604020202090204"/>
-              <a:cs typeface="Arial" panose="020B0604020202090204"/>
+              <a:latin typeface="Arial" panose="020B0604020202020204"/>
+              <a:ea typeface="Arial" panose="020B0604020202020204"/>
+              <a:cs typeface="Arial" panose="020B0604020202020204"/>
             </a:endParaRPr>
           </a:p>
           <a:p>
@@ -8813,16 +10580,16 @@
                     <a:alpha val="100000"/>
                   </a:srgbClr>
                 </a:solidFill>
-                <a:latin typeface="Trebuchet MS" panose="020B0703020202090204"/>
-                <a:ea typeface="Trebuchet MS" panose="020B0703020202090204"/>
-                <a:cs typeface="Trebuchet MS" panose="020B0703020202090204"/>
+                <a:latin typeface="Trebuchet MS" panose="020B0603020202020204"/>
+                <a:ea typeface="Trebuchet MS" panose="020B0603020202020204"/>
+                <a:cs typeface="Trebuchet MS" panose="020B0603020202020204"/>
               </a:rPr>
               <a:t>GameRules</a:t>
             </a:r>
             <a:endParaRPr sz="3600" dirty="0">
-              <a:latin typeface="Trebuchet MS" panose="020B0703020202090204"/>
-              <a:ea typeface="Trebuchet MS" panose="020B0703020202090204"/>
-              <a:cs typeface="Trebuchet MS" panose="020B0703020202090204"/>
+              <a:latin typeface="Trebuchet MS" panose="020B0603020202020204"/>
+              <a:ea typeface="Trebuchet MS" panose="020B0603020202020204"/>
+              <a:cs typeface="Trebuchet MS" panose="020B0603020202020204"/>
             </a:endParaRPr>
           </a:p>
           <a:p>
@@ -8832,9 +10599,9 @@
               </a:lnSpc>
             </a:pPr>
             <a:endParaRPr sz="1000" dirty="0">
-              <a:latin typeface="Arial" panose="020B0604020202090204"/>
-              <a:ea typeface="Arial" panose="020B0604020202090204"/>
-              <a:cs typeface="Arial" panose="020B0604020202090204"/>
+              <a:latin typeface="Arial" panose="020B0604020202020204"/>
+              <a:ea typeface="Arial" panose="020B0604020202020204"/>
+              <a:cs typeface="Arial" panose="020B0604020202020204"/>
             </a:endParaRPr>
           </a:p>
           <a:p>
@@ -8844,9 +10611,9 @@
               </a:lnSpc>
             </a:pPr>
             <a:endParaRPr sz="1000" dirty="0">
-              <a:latin typeface="Arial" panose="020B0604020202090204"/>
-              <a:ea typeface="Arial" panose="020B0604020202090204"/>
-              <a:cs typeface="Arial" panose="020B0604020202090204"/>
+              <a:latin typeface="Arial" panose="020B0604020202020204"/>
+              <a:ea typeface="Arial" panose="020B0604020202020204"/>
+              <a:cs typeface="Arial" panose="020B0604020202020204"/>
             </a:endParaRPr>
           </a:p>
           <a:p>
@@ -8865,9 +10632,9 @@
                     <a:alpha val="100000"/>
                   </a:srgbClr>
                 </a:solidFill>
-                <a:latin typeface="Trebuchet MS" panose="020B0703020202090204"/>
-                <a:ea typeface="Trebuchet MS" panose="020B0703020202090204"/>
-                <a:cs typeface="Trebuchet MS" panose="020B0703020202090204"/>
+                <a:latin typeface="Trebuchet MS" panose="020B0603020202020204"/>
+                <a:ea typeface="Trebuchet MS" panose="020B0603020202020204"/>
+                <a:cs typeface="Trebuchet MS" panose="020B0603020202020204"/>
               </a:rPr>
               <a:t>Advanced</a:t>
             </a:r>
@@ -8878,9 +10645,9 @@
                     <a:alpha val="100000"/>
                   </a:srgbClr>
                 </a:solidFill>
-                <a:latin typeface="Trebuchet MS" panose="020B0703020202090204"/>
-                <a:ea typeface="Trebuchet MS" panose="020B0703020202090204"/>
-                <a:cs typeface="Trebuchet MS" panose="020B0703020202090204"/>
+                <a:latin typeface="Trebuchet MS" panose="020B0603020202020204"/>
+                <a:ea typeface="Trebuchet MS" panose="020B0603020202020204"/>
+                <a:cs typeface="Trebuchet MS" panose="020B0603020202020204"/>
               </a:rPr>
               <a:t> </a:t>
             </a:r>
@@ -8891,9 +10658,9 @@
                     <a:alpha val="100000"/>
                   </a:srgbClr>
                 </a:solidFill>
-                <a:latin typeface="Trebuchet MS" panose="020B0703020202090204"/>
-                <a:ea typeface="Trebuchet MS" panose="020B0703020202090204"/>
-                <a:cs typeface="Trebuchet MS" panose="020B0703020202090204"/>
+                <a:latin typeface="Trebuchet MS" panose="020B0603020202020204"/>
+                <a:ea typeface="Trebuchet MS" panose="020B0603020202020204"/>
+                <a:cs typeface="Trebuchet MS" panose="020B0603020202020204"/>
               </a:rPr>
               <a:t>Comb</a:t>
             </a:r>
@@ -8904,16 +10671,16 @@
                     <a:alpha val="100000"/>
                   </a:srgbClr>
                 </a:solidFill>
-                <a:latin typeface="Trebuchet MS" panose="020B0703020202090204"/>
-                <a:ea typeface="Trebuchet MS" panose="020B0703020202090204"/>
-                <a:cs typeface="Trebuchet MS" panose="020B0703020202090204"/>
+                <a:latin typeface="Trebuchet MS" panose="020B0603020202020204"/>
+                <a:ea typeface="Trebuchet MS" panose="020B0603020202020204"/>
+                <a:cs typeface="Trebuchet MS" panose="020B0603020202020204"/>
               </a:rPr>
               <a:t>inations</a:t>
             </a:r>
             <a:endParaRPr sz="2300" dirty="0">
-              <a:latin typeface="Trebuchet MS" panose="020B0703020202090204"/>
-              <a:ea typeface="Trebuchet MS" panose="020B0703020202090204"/>
-              <a:cs typeface="Trebuchet MS" panose="020B0703020202090204"/>
+              <a:latin typeface="Trebuchet MS" panose="020B0603020202020204"/>
+              <a:ea typeface="Trebuchet MS" panose="020B0603020202020204"/>
+              <a:cs typeface="Trebuchet MS" panose="020B0603020202020204"/>
             </a:endParaRPr>
           </a:p>
           <a:p>
@@ -8932,9 +10699,9 @@
                     <a:alpha val="100000"/>
                   </a:srgbClr>
                 </a:solidFill>
-                <a:latin typeface="Arial" panose="020B0604020202090204"/>
-                <a:ea typeface="Arial" panose="020B0604020202090204"/>
-                <a:cs typeface="Arial" panose="020B0604020202090204"/>
+                <a:latin typeface="Arial" panose="020B0604020202020204"/>
+                <a:ea typeface="Arial" panose="020B0604020202020204"/>
+                <a:cs typeface="Arial" panose="020B0604020202020204"/>
               </a:rPr>
               <a:t>.</a:t>
             </a:r>
@@ -8945,9 +10712,9 @@
                     <a:alpha val="100000"/>
                   </a:srgbClr>
                 </a:solidFill>
-                <a:latin typeface="Arial" panose="020B0604020202090204"/>
-                <a:ea typeface="Arial" panose="020B0604020202090204"/>
-                <a:cs typeface="Arial" panose="020B0604020202090204"/>
+                <a:latin typeface="Arial" panose="020B0604020202020204"/>
+                <a:ea typeface="Arial" panose="020B0604020202020204"/>
+                <a:cs typeface="Arial" panose="020B0604020202020204"/>
               </a:rPr>
               <a:t> </a:t>
             </a:r>
@@ -8958,9 +10725,9 @@
                     <a:alpha val="100000"/>
                   </a:srgbClr>
                 </a:solidFill>
-                <a:latin typeface="Trebuchet MS" panose="020B0703020202090204"/>
-                <a:ea typeface="Trebuchet MS" panose="020B0703020202090204"/>
-                <a:cs typeface="Trebuchet MS" panose="020B0703020202090204"/>
+                <a:latin typeface="Trebuchet MS" panose="020B0603020202020204"/>
+                <a:ea typeface="Trebuchet MS" panose="020B0603020202020204"/>
+                <a:cs typeface="Trebuchet MS" panose="020B0603020202020204"/>
               </a:rPr>
               <a:t>Single:</a:t>
             </a:r>
@@ -8971,9 +10738,9 @@
                     <a:alpha val="100000"/>
                   </a:srgbClr>
                 </a:solidFill>
-                <a:latin typeface="Trebuchet MS" panose="020B0703020202090204"/>
-                <a:ea typeface="Trebuchet MS" panose="020B0703020202090204"/>
-                <a:cs typeface="Trebuchet MS" panose="020B0703020202090204"/>
+                <a:latin typeface="Trebuchet MS" panose="020B0603020202020204"/>
+                <a:ea typeface="Trebuchet MS" panose="020B0603020202020204"/>
+                <a:cs typeface="Trebuchet MS" panose="020B0603020202020204"/>
               </a:rPr>
               <a:t> </a:t>
             </a:r>
@@ -9080,9 +10847,9 @@
                     <a:alpha val="100000"/>
                   </a:srgbClr>
                 </a:solidFill>
-                <a:latin typeface="Trebuchet MS" panose="020B0703020202090204"/>
-                <a:ea typeface="Trebuchet MS" panose="020B0703020202090204"/>
-                <a:cs typeface="Trebuchet MS" panose="020B0703020202090204"/>
+                <a:latin typeface="Trebuchet MS" panose="020B0603020202020204"/>
+                <a:ea typeface="Trebuchet MS" panose="020B0603020202020204"/>
+                <a:cs typeface="Trebuchet MS" panose="020B0603020202020204"/>
               </a:rPr>
               <a:t>	</a:t>
             </a:r>
@@ -9093,9 +10860,9 @@
                     <a:alpha val="100000"/>
                   </a:srgbClr>
                 </a:solidFill>
-                <a:latin typeface="Trebuchet MS" panose="020B0703020202090204"/>
-                <a:ea typeface="Trebuchet MS" panose="020B0703020202090204"/>
-                <a:cs typeface="Trebuchet MS" panose="020B0703020202090204"/>
+                <a:latin typeface="Trebuchet MS" panose="020B0603020202020204"/>
+                <a:ea typeface="Trebuchet MS" panose="020B0603020202020204"/>
+                <a:cs typeface="Trebuchet MS" panose="020B0603020202020204"/>
               </a:rPr>
               <a:t>Pair:</a:t>
             </a:r>
@@ -9106,9 +10873,9 @@
                     <a:alpha val="100000"/>
                   </a:srgbClr>
                 </a:solidFill>
-                <a:latin typeface="Trebuchet MS" panose="020B0703020202090204"/>
-                <a:ea typeface="Trebuchet MS" panose="020B0703020202090204"/>
-                <a:cs typeface="Trebuchet MS" panose="020B0703020202090204"/>
+                <a:latin typeface="Trebuchet MS" panose="020B0603020202020204"/>
+                <a:ea typeface="Trebuchet MS" panose="020B0603020202020204"/>
+                <a:cs typeface="Trebuchet MS" panose="020B0603020202020204"/>
               </a:rPr>
               <a:t> </a:t>
             </a:r>
@@ -9212,9 +10979,9 @@
                     <a:alpha val="100000"/>
                   </a:srgbClr>
                 </a:solidFill>
-                <a:latin typeface="Arial" panose="020B0604020202090204"/>
-                <a:ea typeface="Arial" panose="020B0604020202090204"/>
-                <a:cs typeface="Arial" panose="020B0604020202090204"/>
+                <a:latin typeface="Arial" panose="020B0604020202020204"/>
+                <a:ea typeface="Arial" panose="020B0604020202020204"/>
+                <a:cs typeface="Arial" panose="020B0604020202020204"/>
               </a:rPr>
               <a:t>.</a:t>
             </a:r>
@@ -9225,9 +10992,9 @@
                     <a:alpha val="100000"/>
                   </a:srgbClr>
                 </a:solidFill>
-                <a:latin typeface="Arial" panose="020B0604020202090204"/>
-                <a:ea typeface="Arial" panose="020B0604020202090204"/>
-                <a:cs typeface="Arial" panose="020B0604020202090204"/>
+                <a:latin typeface="Arial" panose="020B0604020202020204"/>
+                <a:ea typeface="Arial" panose="020B0604020202020204"/>
+                <a:cs typeface="Arial" panose="020B0604020202020204"/>
               </a:rPr>
               <a:t> </a:t>
             </a:r>
@@ -9238,9 +11005,9 @@
                     <a:alpha val="100000"/>
                   </a:srgbClr>
                 </a:solidFill>
-                <a:latin typeface="Trebuchet MS" panose="020B0703020202090204"/>
-                <a:ea typeface="Trebuchet MS" panose="020B0703020202090204"/>
-                <a:cs typeface="Trebuchet MS" panose="020B0703020202090204"/>
+                <a:latin typeface="Trebuchet MS" panose="020B0603020202020204"/>
+                <a:ea typeface="Trebuchet MS" panose="020B0603020202020204"/>
+                <a:cs typeface="Trebuchet MS" panose="020B0603020202020204"/>
               </a:rPr>
               <a:t>Triple:</a:t>
             </a:r>
@@ -9251,9 +11018,9 @@
                     <a:alpha val="100000"/>
                   </a:srgbClr>
                 </a:solidFill>
-                <a:latin typeface="Trebuchet MS" panose="020B0703020202090204"/>
-                <a:ea typeface="Trebuchet MS" panose="020B0703020202090204"/>
-                <a:cs typeface="Trebuchet MS" panose="020B0703020202090204"/>
+                <a:latin typeface="Trebuchet MS" panose="020B0603020202020204"/>
+                <a:ea typeface="Trebuchet MS" panose="020B0603020202020204"/>
+                <a:cs typeface="Trebuchet MS" panose="020B0603020202020204"/>
               </a:rPr>
               <a:t> </a:t>
             </a:r>
@@ -9347,9 +11114,9 @@
                     <a:alpha val="100000"/>
                   </a:srgbClr>
                 </a:solidFill>
-                <a:latin typeface="Trebuchet MS" panose="020B0703020202090204"/>
-                <a:ea typeface="Trebuchet MS" panose="020B0703020202090204"/>
-                <a:cs typeface="Trebuchet MS" panose="020B0703020202090204"/>
+                <a:latin typeface="Trebuchet MS" panose="020B0603020202020204"/>
+                <a:ea typeface="Trebuchet MS" panose="020B0603020202020204"/>
+                <a:cs typeface="Trebuchet MS" panose="020B0603020202020204"/>
               </a:rPr>
               <a:t>	</a:t>
             </a:r>
@@ -9360,9 +11127,9 @@
                     <a:alpha val="100000"/>
                   </a:srgbClr>
                 </a:solidFill>
-                <a:latin typeface="Trebuchet MS" panose="020B0703020202090204"/>
-                <a:ea typeface="Trebuchet MS" panose="020B0703020202090204"/>
-                <a:cs typeface="Trebuchet MS" panose="020B0703020202090204"/>
+                <a:latin typeface="Trebuchet MS" panose="020B0603020202020204"/>
+                <a:ea typeface="Trebuchet MS" panose="020B0603020202020204"/>
+                <a:cs typeface="Trebuchet MS" panose="020B0603020202020204"/>
               </a:rPr>
               <a:t>Triple</a:t>
             </a:r>
@@ -9373,9 +11140,9 @@
                     <a:alpha val="100000"/>
                   </a:srgbClr>
                 </a:solidFill>
-                <a:latin typeface="Trebuchet MS" panose="020B0703020202090204"/>
-                <a:ea typeface="Trebuchet MS" panose="020B0703020202090204"/>
-                <a:cs typeface="Trebuchet MS" panose="020B0703020202090204"/>
+                <a:latin typeface="Trebuchet MS" panose="020B0603020202020204"/>
+                <a:ea typeface="Trebuchet MS" panose="020B0603020202020204"/>
+                <a:cs typeface="Trebuchet MS" panose="020B0603020202020204"/>
               </a:rPr>
               <a:t> </a:t>
             </a:r>
@@ -9386,9 +11153,9 @@
                     <a:alpha val="100000"/>
                   </a:srgbClr>
                 </a:solidFill>
-                <a:latin typeface="Trebuchet MS" panose="020B0703020202090204"/>
-                <a:ea typeface="Trebuchet MS" panose="020B0703020202090204"/>
-                <a:cs typeface="Trebuchet MS" panose="020B0703020202090204"/>
+                <a:latin typeface="Trebuchet MS" panose="020B0603020202020204"/>
+                <a:ea typeface="Trebuchet MS" panose="020B0603020202020204"/>
+                <a:cs typeface="Trebuchet MS" panose="020B0603020202020204"/>
               </a:rPr>
               <a:t>with</a:t>
             </a:r>
@@ -9399,9 +11166,9 @@
                     <a:alpha val="100000"/>
                   </a:srgbClr>
                 </a:solidFill>
-                <a:latin typeface="Trebuchet MS" panose="020B0703020202090204"/>
-                <a:ea typeface="Trebuchet MS" panose="020B0703020202090204"/>
-                <a:cs typeface="Trebuchet MS" panose="020B0703020202090204"/>
+                <a:latin typeface="Trebuchet MS" panose="020B0603020202020204"/>
+                <a:ea typeface="Trebuchet MS" panose="020B0603020202020204"/>
+                <a:cs typeface="Trebuchet MS" panose="020B0603020202020204"/>
               </a:rPr>
               <a:t> </a:t>
             </a:r>
@@ -9412,9 +11179,9 @@
                     <a:alpha val="100000"/>
                   </a:srgbClr>
                 </a:solidFill>
-                <a:latin typeface="Trebuchet MS" panose="020B0703020202090204"/>
-                <a:ea typeface="Trebuchet MS" panose="020B0703020202090204"/>
-                <a:cs typeface="Trebuchet MS" panose="020B0703020202090204"/>
+                <a:latin typeface="Trebuchet MS" panose="020B0603020202020204"/>
+                <a:ea typeface="Trebuchet MS" panose="020B0603020202020204"/>
+                <a:cs typeface="Trebuchet MS" panose="020B0603020202020204"/>
               </a:rPr>
               <a:t>one</a:t>
             </a:r>
@@ -9425,9 +11192,9 @@
                     <a:alpha val="100000"/>
                   </a:srgbClr>
                 </a:solidFill>
-                <a:latin typeface="Trebuchet MS" panose="020B0703020202090204"/>
-                <a:ea typeface="Trebuchet MS" panose="020B0703020202090204"/>
-                <a:cs typeface="Trebuchet MS" panose="020B0703020202090204"/>
+                <a:latin typeface="Trebuchet MS" panose="020B0603020202020204"/>
+                <a:ea typeface="Trebuchet MS" panose="020B0603020202020204"/>
+                <a:cs typeface="Trebuchet MS" panose="020B0603020202020204"/>
               </a:rPr>
               <a:t>:</a:t>
             </a:r>
@@ -9438,9 +11205,9 @@
                     <a:alpha val="100000"/>
                   </a:srgbClr>
                 </a:solidFill>
-                <a:latin typeface="Trebuchet MS" panose="020B0703020202090204"/>
-                <a:ea typeface="Trebuchet MS" panose="020B0703020202090204"/>
-                <a:cs typeface="Trebuchet MS" panose="020B0703020202090204"/>
+                <a:latin typeface="Trebuchet MS" panose="020B0603020202020204"/>
+                <a:ea typeface="Trebuchet MS" panose="020B0603020202020204"/>
+                <a:cs typeface="Trebuchet MS" panose="020B0603020202020204"/>
               </a:rPr>
               <a:t> </a:t>
             </a:r>
@@ -9742,9 +11509,9 @@
                     <a:alpha val="100000"/>
                   </a:srgbClr>
                 </a:solidFill>
-                <a:latin typeface="Trebuchet MS" panose="020B0703020202090204"/>
-                <a:ea typeface="Trebuchet MS" panose="020B0703020202090204"/>
-                <a:cs typeface="Trebuchet MS" panose="020B0703020202090204"/>
+                <a:latin typeface="Trebuchet MS" panose="020B0603020202020204"/>
+                <a:ea typeface="Trebuchet MS" panose="020B0603020202020204"/>
+                <a:cs typeface="Trebuchet MS" panose="020B0603020202020204"/>
               </a:rPr>
               <a:t>	</a:t>
             </a:r>
@@ -9755,9 +11522,9 @@
                     <a:alpha val="100000"/>
                   </a:srgbClr>
                 </a:solidFill>
-                <a:latin typeface="Trebuchet MS" panose="020B0703020202090204"/>
-                <a:ea typeface="Trebuchet MS" panose="020B0703020202090204"/>
-                <a:cs typeface="Trebuchet MS" panose="020B0703020202090204"/>
+                <a:latin typeface="Trebuchet MS" panose="020B0603020202020204"/>
+                <a:ea typeface="Trebuchet MS" panose="020B0603020202020204"/>
+                <a:cs typeface="Trebuchet MS" panose="020B0603020202020204"/>
               </a:rPr>
               <a:t>Triple</a:t>
             </a:r>
@@ -9768,9 +11535,9 @@
                     <a:alpha val="100000"/>
                   </a:srgbClr>
                 </a:solidFill>
-                <a:latin typeface="Trebuchet MS" panose="020B0703020202090204"/>
-                <a:ea typeface="Trebuchet MS" panose="020B0703020202090204"/>
-                <a:cs typeface="Trebuchet MS" panose="020B0703020202090204"/>
+                <a:latin typeface="Trebuchet MS" panose="020B0603020202020204"/>
+                <a:ea typeface="Trebuchet MS" panose="020B0603020202020204"/>
+                <a:cs typeface="Trebuchet MS" panose="020B0603020202020204"/>
               </a:rPr>
               <a:t> </a:t>
             </a:r>
@@ -9781,9 +11548,9 @@
                     <a:alpha val="100000"/>
                   </a:srgbClr>
                 </a:solidFill>
-                <a:latin typeface="Trebuchet MS" panose="020B0703020202090204"/>
-                <a:ea typeface="Trebuchet MS" panose="020B0703020202090204"/>
-                <a:cs typeface="Trebuchet MS" panose="020B0703020202090204"/>
+                <a:latin typeface="Trebuchet MS" panose="020B0603020202020204"/>
+                <a:ea typeface="Trebuchet MS" panose="020B0603020202020204"/>
+                <a:cs typeface="Trebuchet MS" panose="020B0603020202020204"/>
               </a:rPr>
               <a:t>with</a:t>
             </a:r>
@@ -9794,9 +11561,9 @@
                     <a:alpha val="100000"/>
                   </a:srgbClr>
                 </a:solidFill>
-                <a:latin typeface="Trebuchet MS" panose="020B0703020202090204"/>
-                <a:ea typeface="Trebuchet MS" panose="020B0703020202090204"/>
-                <a:cs typeface="Trebuchet MS" panose="020B0703020202090204"/>
+                <a:latin typeface="Trebuchet MS" panose="020B0603020202020204"/>
+                <a:ea typeface="Trebuchet MS" panose="020B0603020202020204"/>
+                <a:cs typeface="Trebuchet MS" panose="020B0603020202020204"/>
               </a:rPr>
               <a:t> </a:t>
             </a:r>
@@ -9807,9 +11574,9 @@
                     <a:alpha val="100000"/>
                   </a:srgbClr>
                 </a:solidFill>
-                <a:latin typeface="Trebuchet MS" panose="020B0703020202090204"/>
-                <a:ea typeface="Trebuchet MS" panose="020B0703020202090204"/>
-                <a:cs typeface="Trebuchet MS" panose="020B0703020202090204"/>
+                <a:latin typeface="Trebuchet MS" panose="020B0603020202020204"/>
+                <a:ea typeface="Trebuchet MS" panose="020B0603020202020204"/>
+                <a:cs typeface="Trebuchet MS" panose="020B0603020202020204"/>
               </a:rPr>
               <a:t>pair</a:t>
             </a:r>
@@ -9820,9 +11587,9 @@
                     <a:alpha val="100000"/>
                   </a:srgbClr>
                 </a:solidFill>
-                <a:latin typeface="Trebuchet MS" panose="020B0703020202090204"/>
-                <a:ea typeface="Trebuchet MS" panose="020B0703020202090204"/>
-                <a:cs typeface="Trebuchet MS" panose="020B0703020202090204"/>
+                <a:latin typeface="Trebuchet MS" panose="020B0603020202020204"/>
+                <a:ea typeface="Trebuchet MS" panose="020B0603020202020204"/>
+                <a:cs typeface="Trebuchet MS" panose="020B0603020202020204"/>
               </a:rPr>
               <a:t>:</a:t>
             </a:r>
@@ -9833,9 +11600,9 @@
                     <a:alpha val="100000"/>
                   </a:srgbClr>
                 </a:solidFill>
-                <a:latin typeface="Trebuchet MS" panose="020B0703020202090204"/>
-                <a:ea typeface="Trebuchet MS" panose="020B0703020202090204"/>
-                <a:cs typeface="Trebuchet MS" panose="020B0703020202090204"/>
+                <a:latin typeface="Trebuchet MS" panose="020B0603020202020204"/>
+                <a:ea typeface="Trebuchet MS" panose="020B0603020202020204"/>
+                <a:cs typeface="Trebuchet MS" panose="020B0603020202020204"/>
               </a:rPr>
               <a:t> </a:t>
             </a:r>
@@ -10119,9 +11886,9 @@
                     <a:alpha val="100000"/>
                   </a:srgbClr>
                 </a:solidFill>
-                <a:latin typeface="Arial" panose="020B0604020202090204"/>
-                <a:ea typeface="Arial" panose="020B0604020202090204"/>
-                <a:cs typeface="Arial" panose="020B0604020202090204"/>
+                <a:latin typeface="Arial" panose="020B0604020202020204"/>
+                <a:ea typeface="Arial" panose="020B0604020202020204"/>
+                <a:cs typeface="Arial" panose="020B0604020202020204"/>
               </a:rPr>
               <a:t>.</a:t>
             </a:r>
@@ -10132,9 +11899,9 @@
                     <a:alpha val="100000"/>
                   </a:srgbClr>
                 </a:solidFill>
-                <a:latin typeface="Arial" panose="020B0604020202090204"/>
-                <a:ea typeface="Arial" panose="020B0604020202090204"/>
-                <a:cs typeface="Arial" panose="020B0604020202090204"/>
+                <a:latin typeface="Arial" panose="020B0604020202020204"/>
+                <a:ea typeface="Arial" panose="020B0604020202020204"/>
+                <a:cs typeface="Arial" panose="020B0604020202020204"/>
               </a:rPr>
               <a:t> </a:t>
             </a:r>
@@ -10145,9 +11912,9 @@
                     <a:alpha val="100000"/>
                   </a:srgbClr>
                 </a:solidFill>
-                <a:latin typeface="Trebuchet MS" panose="020B0703020202090204"/>
-                <a:ea typeface="Trebuchet MS" panose="020B0703020202090204"/>
-                <a:cs typeface="Trebuchet MS" panose="020B0703020202090204"/>
+                <a:latin typeface="Trebuchet MS" panose="020B0603020202020204"/>
+                <a:ea typeface="Trebuchet MS" panose="020B0603020202020204"/>
+                <a:cs typeface="Trebuchet MS" panose="020B0603020202020204"/>
               </a:rPr>
               <a:t>Straight:</a:t>
             </a:r>
@@ -10158,9 +11925,9 @@
                     <a:alpha val="100000"/>
                   </a:srgbClr>
                 </a:solidFill>
-                <a:latin typeface="Trebuchet MS" panose="020B0703020202090204"/>
-                <a:ea typeface="Trebuchet MS" panose="020B0703020202090204"/>
-                <a:cs typeface="Trebuchet MS" panose="020B0703020202090204"/>
+                <a:latin typeface="Trebuchet MS" panose="020B0603020202020204"/>
+                <a:ea typeface="Trebuchet MS" panose="020B0603020202020204"/>
+                <a:cs typeface="Trebuchet MS" panose="020B0603020202020204"/>
               </a:rPr>
               <a:t> </a:t>
             </a:r>
@@ -10215,9 +11982,9 @@
                     <a:alpha val="100000"/>
                   </a:srgbClr>
                 </a:solidFill>
-                <a:latin typeface="Trebuchet MS" panose="020B0703020202090204"/>
-                <a:ea typeface="Trebuchet MS" panose="020B0703020202090204"/>
-                <a:cs typeface="Trebuchet MS" panose="020B0703020202090204"/>
+                <a:latin typeface="Trebuchet MS" panose="020B0603020202020204"/>
+                <a:ea typeface="Trebuchet MS" panose="020B0603020202020204"/>
+                <a:cs typeface="Trebuchet MS" panose="020B0603020202020204"/>
               </a:rPr>
               <a:t>	</a:t>
             </a:r>
@@ -10228,9 +11995,9 @@
                     <a:alpha val="100000"/>
                   </a:srgbClr>
                 </a:solidFill>
-                <a:latin typeface="Trebuchet MS" panose="020B0703020202090204"/>
-                <a:ea typeface="Trebuchet MS" panose="020B0703020202090204"/>
-                <a:cs typeface="Trebuchet MS" panose="020B0703020202090204"/>
+                <a:latin typeface="Trebuchet MS" panose="020B0603020202020204"/>
+                <a:ea typeface="Trebuchet MS" panose="020B0603020202020204"/>
+                <a:cs typeface="Trebuchet MS" panose="020B0603020202020204"/>
               </a:rPr>
               <a:t>Bomb:</a:t>
             </a:r>
@@ -10241,9 +12008,9 @@
                     <a:alpha val="100000"/>
                   </a:srgbClr>
                 </a:solidFill>
-                <a:latin typeface="Trebuchet MS" panose="020B0703020202090204"/>
-                <a:ea typeface="Trebuchet MS" panose="020B0703020202090204"/>
-                <a:cs typeface="Trebuchet MS" panose="020B0703020202090204"/>
+                <a:latin typeface="Trebuchet MS" panose="020B0603020202020204"/>
+                <a:ea typeface="Trebuchet MS" panose="020B0603020202020204"/>
+                <a:cs typeface="Trebuchet MS" panose="020B0603020202020204"/>
               </a:rPr>
               <a:t> </a:t>
             </a:r>
@@ -10286,9 +12053,9 @@
               </a:lnSpc>
             </a:pPr>
             <a:endParaRPr sz="1500" dirty="0">
-              <a:latin typeface="Arial" panose="020B0604020202090204"/>
-              <a:ea typeface="Arial" panose="020B0604020202090204"/>
-              <a:cs typeface="Arial" panose="020B0604020202090204"/>
+              <a:latin typeface="Arial" panose="020B0604020202020204"/>
+              <a:ea typeface="Arial" panose="020B0604020202020204"/>
+              <a:cs typeface="Arial" panose="020B0604020202020204"/>
             </a:endParaRPr>
           </a:p>
           <a:p>
@@ -10307,9 +12074,9 @@
                     <a:alpha val="100000"/>
                   </a:srgbClr>
                 </a:solidFill>
-                <a:latin typeface="Arial" panose="020B0604020202090204"/>
-                <a:ea typeface="Arial" panose="020B0604020202090204"/>
-                <a:cs typeface="Arial" panose="020B0604020202090204"/>
+                <a:latin typeface="Arial" panose="020B0604020202020204"/>
+                <a:ea typeface="Arial" panose="020B0604020202020204"/>
+                <a:cs typeface="Arial" panose="020B0604020202020204"/>
               </a:rPr>
               <a:t>.</a:t>
             </a:r>
@@ -10320,9 +12087,9 @@
                     <a:alpha val="100000"/>
                   </a:srgbClr>
                 </a:solidFill>
-                <a:latin typeface="Arial" panose="020B0604020202090204"/>
-                <a:ea typeface="Arial" panose="020B0604020202090204"/>
-                <a:cs typeface="Arial" panose="020B0604020202090204"/>
+                <a:latin typeface="Arial" panose="020B0604020202020204"/>
+                <a:ea typeface="Arial" panose="020B0604020202020204"/>
+                <a:cs typeface="Arial" panose="020B0604020202020204"/>
               </a:rPr>
               <a:t>  </a:t>
             </a:r>
@@ -10333,9 +12100,9 @@
                     <a:alpha val="100000"/>
                   </a:srgbClr>
                 </a:solidFill>
-                <a:latin typeface="Trebuchet MS" panose="020B0703020202090204"/>
-                <a:ea typeface="Trebuchet MS" panose="020B0703020202090204"/>
-                <a:cs typeface="Trebuchet MS" panose="020B0703020202090204"/>
+                <a:latin typeface="Trebuchet MS" panose="020B0603020202020204"/>
+                <a:ea typeface="Trebuchet MS" panose="020B0603020202020204"/>
+                <a:cs typeface="Trebuchet MS" panose="020B0603020202020204"/>
               </a:rPr>
               <a:t>Rocket:</a:t>
             </a:r>
@@ -10346,9 +12113,9 @@
                     <a:alpha val="100000"/>
                   </a:srgbClr>
                 </a:solidFill>
-                <a:latin typeface="Trebuchet MS" panose="020B0703020202090204"/>
-                <a:ea typeface="Trebuchet MS" panose="020B0703020202090204"/>
-                <a:cs typeface="Trebuchet MS" panose="020B0703020202090204"/>
+                <a:latin typeface="Trebuchet MS" panose="020B0603020202020204"/>
+                <a:ea typeface="Trebuchet MS" panose="020B0603020202020204"/>
+                <a:cs typeface="Trebuchet MS" panose="020B0603020202020204"/>
               </a:rPr>
               <a:t> </a:t>
             </a:r>
@@ -10526,9 +12293,9 @@
               </a:lnSpc>
             </a:pPr>
             <a:endParaRPr sz="100" dirty="0">
-              <a:latin typeface="Arial" panose="020B0604020202090204"/>
-              <a:ea typeface="Arial" panose="020B0604020202090204"/>
-              <a:cs typeface="Arial" panose="020B0604020202090204"/>
+              <a:latin typeface="Arial" panose="020B0604020202020204"/>
+              <a:ea typeface="Arial" panose="020B0604020202020204"/>
+              <a:cs typeface="Arial" panose="020B0604020202020204"/>
             </a:endParaRPr>
           </a:p>
           <a:p>
@@ -10628,9 +12395,9 @@
               </a:lnSpc>
             </a:pPr>
             <a:endParaRPr sz="100" dirty="0">
-              <a:latin typeface="Arial" panose="020B0604020202090204"/>
-              <a:ea typeface="Arial" panose="020B0604020202090204"/>
-              <a:cs typeface="Arial" panose="020B0604020202090204"/>
+              <a:latin typeface="Arial" panose="020B0604020202020204"/>
+              <a:ea typeface="Arial" panose="020B0604020202020204"/>
+              <a:cs typeface="Arial" panose="020B0604020202020204"/>
             </a:endParaRPr>
           </a:p>
           <a:p>
@@ -10794,9 +12561,9 @@
               </a:lnSpc>
             </a:pPr>
             <a:endParaRPr sz="100" dirty="0">
-              <a:latin typeface="Arial" panose="020B0604020202090204"/>
-              <a:ea typeface="Arial" panose="020B0604020202090204"/>
-              <a:cs typeface="Arial" panose="020B0604020202090204"/>
+              <a:latin typeface="Arial" panose="020B0604020202020204"/>
+              <a:ea typeface="Arial" panose="020B0604020202020204"/>
+              <a:cs typeface="Arial" panose="020B0604020202020204"/>
             </a:endParaRPr>
           </a:p>
           <a:p>
@@ -10812,16 +12579,16 @@
                     <a:alpha val="100000"/>
                   </a:srgbClr>
                 </a:solidFill>
-                <a:latin typeface="Trebuchet MS" panose="020B0703020202090204"/>
-                <a:ea typeface="Trebuchet MS" panose="020B0703020202090204"/>
-                <a:cs typeface="Trebuchet MS" panose="020B0703020202090204"/>
+                <a:latin typeface="Trebuchet MS" panose="020B0603020202020204"/>
+                <a:ea typeface="Trebuchet MS" panose="020B0603020202020204"/>
+                <a:cs typeface="Trebuchet MS" panose="020B0603020202020204"/>
               </a:rPr>
               <a:t>GameRules</a:t>
             </a:r>
             <a:endParaRPr sz="3600" dirty="0">
-              <a:latin typeface="Trebuchet MS" panose="020B0703020202090204"/>
-              <a:ea typeface="Trebuchet MS" panose="020B0703020202090204"/>
-              <a:cs typeface="Trebuchet MS" panose="020B0703020202090204"/>
+              <a:latin typeface="Trebuchet MS" panose="020B0603020202020204"/>
+              <a:ea typeface="Trebuchet MS" panose="020B0603020202020204"/>
+              <a:cs typeface="Trebuchet MS" panose="020B0603020202020204"/>
             </a:endParaRPr>
           </a:p>
           <a:p>
@@ -10831,9 +12598,9 @@
               </a:lnSpc>
             </a:pPr>
             <a:endParaRPr sz="1000" dirty="0">
-              <a:latin typeface="Arial" panose="020B0604020202090204"/>
-              <a:ea typeface="Arial" panose="020B0604020202090204"/>
-              <a:cs typeface="Arial" panose="020B0604020202090204"/>
+              <a:latin typeface="Arial" panose="020B0604020202020204"/>
+              <a:ea typeface="Arial" panose="020B0604020202020204"/>
+              <a:cs typeface="Arial" panose="020B0604020202020204"/>
             </a:endParaRPr>
           </a:p>
           <a:p>
@@ -10843,9 +12610,9 @@
               </a:lnSpc>
             </a:pPr>
             <a:endParaRPr sz="1000" dirty="0">
-              <a:latin typeface="Arial" panose="020B0604020202090204"/>
-              <a:ea typeface="Arial" panose="020B0604020202090204"/>
-              <a:cs typeface="Arial" panose="020B0604020202090204"/>
+              <a:latin typeface="Arial" panose="020B0604020202020204"/>
+              <a:ea typeface="Arial" panose="020B0604020202020204"/>
+              <a:cs typeface="Arial" panose="020B0604020202020204"/>
             </a:endParaRPr>
           </a:p>
           <a:p>
@@ -10864,16 +12631,16 @@
                     <a:alpha val="100000"/>
                   </a:srgbClr>
                 </a:solidFill>
-                <a:latin typeface="Trebuchet MS" panose="020B0703020202090204"/>
-                <a:ea typeface="Trebuchet MS" panose="020B0703020202090204"/>
-                <a:cs typeface="Trebuchet MS" panose="020B0703020202090204"/>
+                <a:latin typeface="Trebuchet MS" panose="020B0603020202020204"/>
+                <a:ea typeface="Trebuchet MS" panose="020B0603020202020204"/>
+                <a:cs typeface="Trebuchet MS" panose="020B0603020202020204"/>
               </a:rPr>
               <a:t>Scores</a:t>
             </a:r>
             <a:endParaRPr sz="2300" dirty="0">
-              <a:latin typeface="Trebuchet MS" panose="020B0703020202090204"/>
-              <a:ea typeface="Trebuchet MS" panose="020B0703020202090204"/>
-              <a:cs typeface="Trebuchet MS" panose="020B0703020202090204"/>
+              <a:latin typeface="Trebuchet MS" panose="020B0603020202020204"/>
+              <a:ea typeface="Trebuchet MS" panose="020B0603020202020204"/>
+              <a:cs typeface="Trebuchet MS" panose="020B0603020202020204"/>
             </a:endParaRPr>
           </a:p>
           <a:p>
@@ -10892,9 +12659,9 @@
                     <a:alpha val="100000"/>
                   </a:srgbClr>
                 </a:solidFill>
-                <a:latin typeface="Arial" panose="020B0604020202090204"/>
-                <a:ea typeface="Arial" panose="020B0604020202090204"/>
-                <a:cs typeface="Arial" panose="020B0604020202090204"/>
+                <a:latin typeface="Arial" panose="020B0604020202020204"/>
+                <a:ea typeface="Arial" panose="020B0604020202020204"/>
+                <a:cs typeface="Arial" panose="020B0604020202020204"/>
               </a:rPr>
               <a:t>.</a:t>
             </a:r>
@@ -10905,9 +12672,9 @@
                     <a:alpha val="100000"/>
                   </a:srgbClr>
                 </a:solidFill>
-                <a:latin typeface="Arial" panose="020B0604020202090204"/>
-                <a:ea typeface="Arial" panose="020B0604020202090204"/>
-                <a:cs typeface="Arial" panose="020B0604020202090204"/>
+                <a:latin typeface="Arial" panose="020B0604020202020204"/>
+                <a:ea typeface="Arial" panose="020B0604020202020204"/>
+                <a:cs typeface="Arial" panose="020B0604020202020204"/>
               </a:rPr>
               <a:t> </a:t>
             </a:r>
@@ -11048,9 +12815,9 @@
                     <a:alpha val="100000"/>
                   </a:srgbClr>
                 </a:solidFill>
-                <a:latin typeface="Trebuchet MS" panose="020B0703020202090204"/>
-                <a:ea typeface="Trebuchet MS" panose="020B0703020202090204"/>
-                <a:cs typeface="Trebuchet MS" panose="020B0703020202090204"/>
+                <a:latin typeface="Trebuchet MS" panose="020B0603020202020204"/>
+                <a:ea typeface="Trebuchet MS" panose="020B0603020202020204"/>
+                <a:cs typeface="Trebuchet MS" panose="020B0603020202020204"/>
               </a:rPr>
               <a:t>1,</a:t>
             </a:r>
@@ -11061,9 +12828,9 @@
                     <a:alpha val="100000"/>
                   </a:srgbClr>
                 </a:solidFill>
-                <a:latin typeface="Trebuchet MS" panose="020B0703020202090204"/>
-                <a:ea typeface="Trebuchet MS" panose="020B0703020202090204"/>
-                <a:cs typeface="Trebuchet MS" panose="020B0703020202090204"/>
+                <a:latin typeface="Trebuchet MS" panose="020B0603020202020204"/>
+                <a:ea typeface="Trebuchet MS" panose="020B0603020202020204"/>
+                <a:cs typeface="Trebuchet MS" panose="020B0603020202020204"/>
               </a:rPr>
               <a:t> </a:t>
             </a:r>
@@ -11074,9 +12841,9 @@
                     <a:alpha val="100000"/>
                   </a:srgbClr>
                 </a:solidFill>
-                <a:latin typeface="Trebuchet MS" panose="020B0703020202090204"/>
-                <a:ea typeface="Trebuchet MS" panose="020B0703020202090204"/>
-                <a:cs typeface="Trebuchet MS" panose="020B0703020202090204"/>
+                <a:latin typeface="Trebuchet MS" panose="020B0603020202020204"/>
+                <a:ea typeface="Trebuchet MS" panose="020B0603020202020204"/>
+                <a:cs typeface="Trebuchet MS" panose="020B0603020202020204"/>
               </a:rPr>
               <a:t>2,</a:t>
             </a:r>
@@ -11087,9 +12854,9 @@
                     <a:alpha val="100000"/>
                   </a:srgbClr>
                 </a:solidFill>
-                <a:latin typeface="Trebuchet MS" panose="020B0703020202090204"/>
-                <a:ea typeface="Trebuchet MS" panose="020B0703020202090204"/>
-                <a:cs typeface="Trebuchet MS" panose="020B0703020202090204"/>
+                <a:latin typeface="Trebuchet MS" panose="020B0603020202020204"/>
+                <a:ea typeface="Trebuchet MS" panose="020B0603020202020204"/>
+                <a:cs typeface="Trebuchet MS" panose="020B0603020202020204"/>
               </a:rPr>
               <a:t> </a:t>
             </a:r>
@@ -11100,9 +12867,9 @@
                     <a:alpha val="100000"/>
                   </a:srgbClr>
                 </a:solidFill>
-                <a:latin typeface="Trebuchet MS" panose="020B0703020202090204"/>
-                <a:ea typeface="Trebuchet MS" panose="020B0703020202090204"/>
-                <a:cs typeface="Trebuchet MS" panose="020B0703020202090204"/>
+                <a:latin typeface="Trebuchet MS" panose="020B0603020202020204"/>
+                <a:ea typeface="Trebuchet MS" panose="020B0603020202020204"/>
+                <a:cs typeface="Trebuchet MS" panose="020B0603020202020204"/>
               </a:rPr>
               <a:t>or</a:t>
             </a:r>
@@ -11113,9 +12880,9 @@
                     <a:alpha val="100000"/>
                   </a:srgbClr>
                 </a:solidFill>
-                <a:latin typeface="Trebuchet MS" panose="020B0703020202090204"/>
-                <a:ea typeface="Trebuchet MS" panose="020B0703020202090204"/>
-                <a:cs typeface="Trebuchet MS" panose="020B0703020202090204"/>
+                <a:latin typeface="Trebuchet MS" panose="020B0603020202020204"/>
+                <a:ea typeface="Trebuchet MS" panose="020B0603020202020204"/>
+                <a:cs typeface="Trebuchet MS" panose="020B0603020202020204"/>
               </a:rPr>
               <a:t> </a:t>
             </a:r>
@@ -11126,9 +12893,9 @@
                     <a:alpha val="100000"/>
                   </a:srgbClr>
                 </a:solidFill>
-                <a:latin typeface="Trebuchet MS" panose="020B0703020202090204"/>
-                <a:ea typeface="Trebuchet MS" panose="020B0703020202090204"/>
-                <a:cs typeface="Trebuchet MS" panose="020B0703020202090204"/>
+                <a:latin typeface="Trebuchet MS" panose="020B0603020202020204"/>
+                <a:ea typeface="Trebuchet MS" panose="020B0603020202020204"/>
+                <a:cs typeface="Trebuchet MS" panose="020B0603020202020204"/>
               </a:rPr>
               <a:t>3</a:t>
             </a:r>
@@ -11139,9 +12906,9 @@
                     <a:alpha val="100000"/>
                   </a:srgbClr>
                 </a:solidFill>
-                <a:latin typeface="Trebuchet MS" panose="020B0703020202090204"/>
-                <a:ea typeface="Trebuchet MS" panose="020B0703020202090204"/>
-                <a:cs typeface="Trebuchet MS" panose="020B0703020202090204"/>
+                <a:latin typeface="Trebuchet MS" panose="020B0603020202020204"/>
+                <a:ea typeface="Trebuchet MS" panose="020B0603020202020204"/>
+                <a:cs typeface="Trebuchet MS" panose="020B0603020202020204"/>
               </a:rPr>
               <a:t> </a:t>
             </a:r>
@@ -11152,9 +12919,9 @@
                     <a:alpha val="100000"/>
                   </a:srgbClr>
                 </a:solidFill>
-                <a:latin typeface="Trebuchet MS" panose="020B0703020202090204"/>
-                <a:ea typeface="Trebuchet MS" panose="020B0703020202090204"/>
-                <a:cs typeface="Trebuchet MS" panose="020B0703020202090204"/>
+                <a:latin typeface="Trebuchet MS" panose="020B0603020202020204"/>
+                <a:ea typeface="Trebuchet MS" panose="020B0603020202020204"/>
+                <a:cs typeface="Trebuchet MS" panose="020B0603020202020204"/>
               </a:rPr>
               <a:t>points</a:t>
             </a:r>
@@ -11190,9 +12957,9 @@
                     <a:alpha val="100000"/>
                   </a:srgbClr>
                 </a:solidFill>
-                <a:latin typeface="Arial" panose="020B0604020202090204"/>
-                <a:ea typeface="Arial" panose="020B0604020202090204"/>
-                <a:cs typeface="Arial" panose="020B0604020202090204"/>
+                <a:latin typeface="Arial" panose="020B0604020202020204"/>
+                <a:ea typeface="Arial" panose="020B0604020202020204"/>
+                <a:cs typeface="Arial" panose="020B0604020202020204"/>
               </a:rPr>
               <a:t>.</a:t>
             </a:r>
@@ -11203,9 +12970,9 @@
                     <a:alpha val="100000"/>
                   </a:srgbClr>
                 </a:solidFill>
-                <a:latin typeface="Arial" panose="020B0604020202090204"/>
-                <a:ea typeface="Arial" panose="020B0604020202090204"/>
-                <a:cs typeface="Arial" panose="020B0604020202090204"/>
+                <a:latin typeface="Arial" panose="020B0604020202020204"/>
+                <a:ea typeface="Arial" panose="020B0604020202020204"/>
+                <a:cs typeface="Arial" panose="020B0604020202020204"/>
               </a:rPr>
               <a:t> </a:t>
             </a:r>
@@ -11409,9 +13176,9 @@
               </a:lnSpc>
             </a:pPr>
             <a:endParaRPr sz="1000" dirty="0">
-              <a:latin typeface="Arial" panose="020B0604020202090204"/>
-              <a:ea typeface="Arial" panose="020B0604020202090204"/>
-              <a:cs typeface="Arial" panose="020B0604020202090204"/>
+              <a:latin typeface="Arial" panose="020B0604020202020204"/>
+              <a:ea typeface="Arial" panose="020B0604020202020204"/>
+              <a:cs typeface="Arial" panose="020B0604020202020204"/>
             </a:endParaRPr>
           </a:p>
           <a:p>
@@ -11430,9 +13197,9 @@
                     <a:alpha val="100000"/>
                   </a:srgbClr>
                 </a:solidFill>
-                <a:latin typeface="Arial" panose="020B0604020202090204"/>
-                <a:ea typeface="Arial" panose="020B0604020202090204"/>
-                <a:cs typeface="Arial" panose="020B0604020202090204"/>
+                <a:latin typeface="Arial" panose="020B0604020202020204"/>
+                <a:ea typeface="Arial" panose="020B0604020202020204"/>
+                <a:cs typeface="Arial" panose="020B0604020202020204"/>
               </a:rPr>
               <a:t>o</a:t>
             </a:r>
@@ -11443,9 +13210,9 @@
                     <a:alpha val="100000"/>
                   </a:srgbClr>
                 </a:solidFill>
-                <a:latin typeface="Arial" panose="020B0604020202090204"/>
-                <a:ea typeface="Arial" panose="020B0604020202090204"/>
-                <a:cs typeface="Arial" panose="020B0604020202090204"/>
+                <a:latin typeface="Arial" panose="020B0604020202020204"/>
+                <a:ea typeface="Arial" panose="020B0604020202020204"/>
+                <a:cs typeface="Arial" panose="020B0604020202020204"/>
               </a:rPr>
               <a:t>  </a:t>
             </a:r>
@@ -11573,9 +13340,9 @@
                     <a:alpha val="100000"/>
                   </a:srgbClr>
                 </a:solidFill>
-                <a:latin typeface="Arial" panose="020B0604020202090204"/>
-                <a:ea typeface="Arial" panose="020B0604020202090204"/>
-                <a:cs typeface="Arial" panose="020B0604020202090204"/>
+                <a:latin typeface="Arial" panose="020B0604020202020204"/>
+                <a:ea typeface="Arial" panose="020B0604020202020204"/>
+                <a:cs typeface="Arial" panose="020B0604020202020204"/>
               </a:rPr>
               <a:t>2</a:t>
             </a:r>
@@ -11679,9 +13446,9 @@
                     <a:alpha val="100000"/>
                   </a:srgbClr>
                 </a:solidFill>
-                <a:latin typeface="Arial" panose="020B0604020202090204"/>
-                <a:ea typeface="Arial" panose="020B0604020202090204"/>
-                <a:cs typeface="Arial" panose="020B0604020202090204"/>
+                <a:latin typeface="Arial" panose="020B0604020202020204"/>
+                <a:ea typeface="Arial" panose="020B0604020202020204"/>
+                <a:cs typeface="Arial" panose="020B0604020202020204"/>
               </a:rPr>
               <a:t>2</a:t>
             </a:r>
@@ -11692,9 +13459,9 @@
                     <a:alpha val="100000"/>
                   </a:srgbClr>
                 </a:solidFill>
-                <a:latin typeface="Arial" panose="020B0604020202090204"/>
-                <a:ea typeface="Arial" panose="020B0604020202090204"/>
-                <a:cs typeface="Arial" panose="020B0604020202090204"/>
+                <a:latin typeface="Arial" panose="020B0604020202020204"/>
+                <a:ea typeface="Arial" panose="020B0604020202020204"/>
+                <a:cs typeface="Arial" panose="020B0604020202020204"/>
               </a:rPr>
               <a:t> </a:t>
             </a:r>
@@ -11724,9 +13491,9 @@
               </a:lnSpc>
             </a:pPr>
             <a:endParaRPr sz="1400" dirty="0">
-              <a:latin typeface="Arial" panose="020B0604020202090204"/>
-              <a:ea typeface="Arial" panose="020B0604020202090204"/>
-              <a:cs typeface="Arial" panose="020B0604020202090204"/>
+              <a:latin typeface="Arial" panose="020B0604020202020204"/>
+              <a:ea typeface="Arial" panose="020B0604020202020204"/>
+              <a:cs typeface="Arial" panose="020B0604020202020204"/>
             </a:endParaRPr>
           </a:p>
           <a:p>
@@ -11736,9 +13503,9 @@
               </a:lnSpc>
             </a:pPr>
             <a:endParaRPr sz="100" dirty="0">
-              <a:latin typeface="Arial" panose="020B0604020202090204"/>
-              <a:ea typeface="Arial" panose="020B0604020202090204"/>
-              <a:cs typeface="Arial" panose="020B0604020202090204"/>
+              <a:latin typeface="Arial" panose="020B0604020202020204"/>
+              <a:ea typeface="Arial" panose="020B0604020202020204"/>
+              <a:cs typeface="Arial" panose="020B0604020202020204"/>
             </a:endParaRPr>
           </a:p>
           <a:p>
@@ -11754,9 +13521,9 @@
                     <a:alpha val="100000"/>
                   </a:srgbClr>
                 </a:solidFill>
-                <a:latin typeface="Arial" panose="020B0604020202090204"/>
-                <a:ea typeface="Arial" panose="020B0604020202090204"/>
-                <a:cs typeface="Arial" panose="020B0604020202090204"/>
+                <a:latin typeface="Arial" panose="020B0604020202020204"/>
+                <a:ea typeface="Arial" panose="020B0604020202020204"/>
+                <a:cs typeface="Arial" panose="020B0604020202020204"/>
               </a:rPr>
               <a:t>.</a:t>
             </a:r>
@@ -11767,9 +13534,9 @@
                     <a:alpha val="100000"/>
                   </a:srgbClr>
                 </a:solidFill>
-                <a:latin typeface="Arial" panose="020B0604020202090204"/>
-                <a:ea typeface="Arial" panose="020B0604020202090204"/>
-                <a:cs typeface="Arial" panose="020B0604020202090204"/>
+                <a:latin typeface="Arial" panose="020B0604020202020204"/>
+                <a:ea typeface="Arial" panose="020B0604020202020204"/>
+                <a:cs typeface="Arial" panose="020B0604020202020204"/>
               </a:rPr>
               <a:t>  </a:t>
             </a:r>
@@ -12012,9 +13779,9 @@
               </a:lnSpc>
             </a:pPr>
             <a:endParaRPr sz="100" dirty="0">
-              <a:latin typeface="Arial" panose="020B0604020202090204"/>
-              <a:ea typeface="Arial" panose="020B0604020202090204"/>
-              <a:cs typeface="Arial" panose="020B0604020202090204"/>
+              <a:latin typeface="Arial" panose="020B0604020202020204"/>
+              <a:ea typeface="Arial" panose="020B0604020202020204"/>
+              <a:cs typeface="Arial" panose="020B0604020202020204"/>
             </a:endParaRPr>
           </a:p>
           <a:p>
@@ -12114,9 +13881,9 @@
               </a:lnSpc>
             </a:pPr>
             <a:endParaRPr sz="100" dirty="0">
-              <a:latin typeface="Arial" panose="020B0604020202090204"/>
-              <a:ea typeface="Arial" panose="020B0604020202090204"/>
-              <a:cs typeface="Arial" panose="020B0604020202090204"/>
+              <a:latin typeface="Arial" panose="020B0604020202020204"/>
+              <a:ea typeface="Arial" panose="020B0604020202020204"/>
+              <a:cs typeface="Arial" panose="020B0604020202020204"/>
             </a:endParaRPr>
           </a:p>
           <a:p>
@@ -12280,9 +14047,9 @@
               </a:lnSpc>
             </a:pPr>
             <a:endParaRPr sz="100" dirty="0">
-              <a:latin typeface="Arial" panose="020B0604020202090204"/>
-              <a:ea typeface="Arial" panose="020B0604020202090204"/>
-              <a:cs typeface="Arial" panose="020B0604020202090204"/>
+              <a:latin typeface="Arial" panose="020B0604020202020204"/>
+              <a:ea typeface="Arial" panose="020B0604020202020204"/>
+              <a:cs typeface="Arial" panose="020B0604020202020204"/>
             </a:endParaRPr>
           </a:p>
           <a:p>
@@ -12298,16 +14065,16 @@
                     <a:alpha val="100000"/>
                   </a:srgbClr>
                 </a:solidFill>
-                <a:latin typeface="Trebuchet MS" panose="020B0703020202090204"/>
-                <a:ea typeface="Trebuchet MS" panose="020B0703020202090204"/>
-                <a:cs typeface="Trebuchet MS" panose="020B0703020202090204"/>
+                <a:latin typeface="Trebuchet MS" panose="020B0603020202020204"/>
+                <a:ea typeface="Trebuchet MS" panose="020B0603020202020204"/>
+                <a:cs typeface="Trebuchet MS" panose="020B0603020202020204"/>
               </a:rPr>
               <a:t>Implementmethods</a:t>
             </a:r>
             <a:endParaRPr sz="3600" dirty="0">
-              <a:latin typeface="Trebuchet MS" panose="020B0703020202090204"/>
-              <a:ea typeface="Trebuchet MS" panose="020B0703020202090204"/>
-              <a:cs typeface="Trebuchet MS" panose="020B0703020202090204"/>
+              <a:latin typeface="Trebuchet MS" panose="020B0603020202020204"/>
+              <a:ea typeface="Trebuchet MS" panose="020B0603020202020204"/>
+              <a:cs typeface="Trebuchet MS" panose="020B0603020202020204"/>
             </a:endParaRPr>
           </a:p>
           <a:p>
@@ -12317,9 +14084,9 @@
               </a:lnSpc>
             </a:pPr>
             <a:endParaRPr sz="1000" dirty="0">
-              <a:latin typeface="Arial" panose="020B0604020202090204"/>
-              <a:ea typeface="Arial" panose="020B0604020202090204"/>
-              <a:cs typeface="Arial" panose="020B0604020202090204"/>
+              <a:latin typeface="Arial" panose="020B0604020202020204"/>
+              <a:ea typeface="Arial" panose="020B0604020202020204"/>
+              <a:cs typeface="Arial" panose="020B0604020202020204"/>
             </a:endParaRPr>
           </a:p>
           <a:p>
@@ -12329,9 +14096,9 @@
               </a:lnSpc>
             </a:pPr>
             <a:endParaRPr sz="1000" dirty="0">
-              <a:latin typeface="Arial" panose="020B0604020202090204"/>
-              <a:ea typeface="Arial" panose="020B0604020202090204"/>
-              <a:cs typeface="Arial" panose="020B0604020202090204"/>
+              <a:latin typeface="Arial" panose="020B0604020202020204"/>
+              <a:ea typeface="Arial" panose="020B0604020202020204"/>
+              <a:cs typeface="Arial" panose="020B0604020202020204"/>
             </a:endParaRPr>
           </a:p>
           <a:p>
@@ -12350,9 +14117,9 @@
                     <a:alpha val="100000"/>
                   </a:srgbClr>
                 </a:solidFill>
-                <a:latin typeface="Trebuchet MS" panose="020B0703020202090204"/>
-                <a:ea typeface="Trebuchet MS" panose="020B0703020202090204"/>
-                <a:cs typeface="Trebuchet MS" panose="020B0703020202090204"/>
+                <a:latin typeface="Trebuchet MS" panose="020B0603020202020204"/>
+                <a:ea typeface="Trebuchet MS" panose="020B0603020202020204"/>
+                <a:cs typeface="Trebuchet MS" panose="020B0603020202020204"/>
               </a:rPr>
               <a:t>1.</a:t>
             </a:r>
@@ -12363,9 +14130,9 @@
                     <a:alpha val="100000"/>
                   </a:srgbClr>
                 </a:solidFill>
-                <a:latin typeface="Trebuchet MS" panose="020B0703020202090204"/>
-                <a:ea typeface="Trebuchet MS" panose="020B0703020202090204"/>
-                <a:cs typeface="Trebuchet MS" panose="020B0703020202090204"/>
+                <a:latin typeface="Trebuchet MS" panose="020B0603020202020204"/>
+                <a:ea typeface="Trebuchet MS" panose="020B0603020202020204"/>
+                <a:cs typeface="Trebuchet MS" panose="020B0603020202020204"/>
               </a:rPr>
               <a:t> </a:t>
             </a:r>
@@ -12376,9 +14143,9 @@
                     <a:alpha val="100000"/>
                   </a:srgbClr>
                 </a:solidFill>
-                <a:latin typeface="Trebuchet MS" panose="020B0703020202090204"/>
-                <a:ea typeface="Trebuchet MS" panose="020B0703020202090204"/>
-                <a:cs typeface="Trebuchet MS" panose="020B0703020202090204"/>
+                <a:latin typeface="Trebuchet MS" panose="020B0603020202020204"/>
+                <a:ea typeface="Trebuchet MS" panose="020B0603020202020204"/>
+                <a:cs typeface="Trebuchet MS" panose="020B0603020202020204"/>
               </a:rPr>
               <a:t>Adversarial</a:t>
             </a:r>
@@ -12389,9 +14156,9 @@
                     <a:alpha val="100000"/>
                   </a:srgbClr>
                 </a:solidFill>
-                <a:latin typeface="Trebuchet MS" panose="020B0703020202090204"/>
-                <a:ea typeface="Trebuchet MS" panose="020B0703020202090204"/>
-                <a:cs typeface="Trebuchet MS" panose="020B0703020202090204"/>
+                <a:latin typeface="Trebuchet MS" panose="020B0603020202020204"/>
+                <a:ea typeface="Trebuchet MS" panose="020B0603020202020204"/>
+                <a:cs typeface="Trebuchet MS" panose="020B0603020202020204"/>
               </a:rPr>
               <a:t> </a:t>
             </a:r>
@@ -12402,9 +14169,9 @@
                     <a:alpha val="100000"/>
                   </a:srgbClr>
                 </a:solidFill>
-                <a:latin typeface="Trebuchet MS" panose="020B0703020202090204"/>
-                <a:ea typeface="Trebuchet MS" panose="020B0703020202090204"/>
-                <a:cs typeface="Trebuchet MS" panose="020B0703020202090204"/>
+                <a:latin typeface="Trebuchet MS" panose="020B0603020202020204"/>
+                <a:ea typeface="Trebuchet MS" panose="020B0603020202020204"/>
+                <a:cs typeface="Trebuchet MS" panose="020B0603020202020204"/>
               </a:rPr>
               <a:t>S</a:t>
             </a:r>
@@ -12415,16 +14182,16 @@
                     <a:alpha val="100000"/>
                   </a:srgbClr>
                 </a:solidFill>
-                <a:latin typeface="Trebuchet MS" panose="020B0703020202090204"/>
-                <a:ea typeface="Trebuchet MS" panose="020B0703020202090204"/>
-                <a:cs typeface="Trebuchet MS" panose="020B0703020202090204"/>
+                <a:latin typeface="Trebuchet MS" panose="020B0603020202020204"/>
+                <a:ea typeface="Trebuchet MS" panose="020B0603020202020204"/>
+                <a:cs typeface="Trebuchet MS" panose="020B0603020202020204"/>
               </a:rPr>
               <a:t>earch</a:t>
             </a:r>
             <a:endParaRPr sz="2300" dirty="0">
-              <a:latin typeface="Trebuchet MS" panose="020B0703020202090204"/>
-              <a:ea typeface="Trebuchet MS" panose="020B0703020202090204"/>
-              <a:cs typeface="Trebuchet MS" panose="020B0703020202090204"/>
+              <a:latin typeface="Trebuchet MS" panose="020B0603020202020204"/>
+              <a:ea typeface="Trebuchet MS" panose="020B0603020202020204"/>
+              <a:cs typeface="Trebuchet MS" panose="020B0603020202020204"/>
             </a:endParaRPr>
           </a:p>
           <a:p>
@@ -12434,9 +14201,9 @@
               </a:lnSpc>
             </a:pPr>
             <a:endParaRPr sz="1000" dirty="0">
-              <a:latin typeface="Arial" panose="020B0604020202090204"/>
-              <a:ea typeface="Arial" panose="020B0604020202090204"/>
-              <a:cs typeface="Arial" panose="020B0604020202090204"/>
+              <a:latin typeface="Arial" panose="020B0604020202020204"/>
+              <a:ea typeface="Arial" panose="020B0604020202020204"/>
+              <a:cs typeface="Arial" panose="020B0604020202020204"/>
             </a:endParaRPr>
           </a:p>
           <a:p>
@@ -12458,9 +14225,9 @@
                     <a:alpha val="100000"/>
                   </a:srgbClr>
                 </a:solidFill>
-                <a:latin typeface="Trebuchet MS" panose="020B0703020202090204"/>
-                <a:ea typeface="Trebuchet MS" panose="020B0703020202090204"/>
-                <a:cs typeface="Trebuchet MS" panose="020B0703020202090204"/>
+                <a:latin typeface="Trebuchet MS" panose="020B0603020202020204"/>
+                <a:ea typeface="Trebuchet MS" panose="020B0603020202020204"/>
+                <a:cs typeface="Trebuchet MS" panose="020B0603020202020204"/>
               </a:rPr>
               <a:t>	</a:t>
             </a:r>
@@ -12471,9 +14238,9 @@
                     <a:alpha val="100000"/>
                   </a:srgbClr>
                 </a:solidFill>
-                <a:latin typeface="Trebuchet MS" panose="020B0703020202090204"/>
-                <a:ea typeface="Trebuchet MS" panose="020B0703020202090204"/>
-                <a:cs typeface="Trebuchet MS" panose="020B0703020202090204"/>
+                <a:latin typeface="Trebuchet MS" panose="020B0603020202020204"/>
+                <a:ea typeface="Trebuchet MS" panose="020B0603020202020204"/>
+                <a:cs typeface="Trebuchet MS" panose="020B0603020202020204"/>
               </a:rPr>
               <a:t>Minimax</a:t>
             </a:r>
@@ -12484,9 +14251,9 @@
                     <a:alpha val="100000"/>
                   </a:srgbClr>
                 </a:solidFill>
-                <a:latin typeface="Trebuchet MS" panose="020B0703020202090204"/>
-                <a:ea typeface="Trebuchet MS" panose="020B0703020202090204"/>
-                <a:cs typeface="Trebuchet MS" panose="020B0703020202090204"/>
+                <a:latin typeface="Trebuchet MS" panose="020B0603020202020204"/>
+                <a:ea typeface="Trebuchet MS" panose="020B0603020202020204"/>
+                <a:cs typeface="Trebuchet MS" panose="020B0603020202020204"/>
               </a:rPr>
               <a:t> </a:t>
             </a:r>
@@ -12497,9 +14264,9 @@
                     <a:alpha val="100000"/>
                   </a:srgbClr>
                 </a:solidFill>
-                <a:latin typeface="Trebuchet MS" panose="020B0703020202090204"/>
-                <a:ea typeface="Trebuchet MS" panose="020B0703020202090204"/>
-                <a:cs typeface="Trebuchet MS" panose="020B0703020202090204"/>
+                <a:latin typeface="Trebuchet MS" panose="020B0603020202020204"/>
+                <a:ea typeface="Trebuchet MS" panose="020B0603020202020204"/>
+                <a:cs typeface="Trebuchet MS" panose="020B0603020202020204"/>
               </a:rPr>
               <a:t>Algorit</a:t>
             </a:r>
@@ -12510,16 +14277,16 @@
                     <a:alpha val="100000"/>
                   </a:srgbClr>
                 </a:solidFill>
-                <a:latin typeface="Trebuchet MS" panose="020B0703020202090204"/>
-                <a:ea typeface="Trebuchet MS" panose="020B0703020202090204"/>
-                <a:cs typeface="Trebuchet MS" panose="020B0703020202090204"/>
+                <a:latin typeface="Trebuchet MS" panose="020B0603020202020204"/>
+                <a:ea typeface="Trebuchet MS" panose="020B0603020202020204"/>
+                <a:cs typeface="Trebuchet MS" panose="020B0603020202020204"/>
               </a:rPr>
               <a:t>hm</a:t>
             </a:r>
             <a:endParaRPr sz="2100" dirty="0">
-              <a:latin typeface="Trebuchet MS" panose="020B0703020202090204"/>
-              <a:ea typeface="Trebuchet MS" panose="020B0703020202090204"/>
-              <a:cs typeface="Trebuchet MS" panose="020B0703020202090204"/>
+              <a:latin typeface="Trebuchet MS" panose="020B0603020202020204"/>
+              <a:ea typeface="Trebuchet MS" panose="020B0603020202020204"/>
+              <a:cs typeface="Trebuchet MS" panose="020B0603020202020204"/>
             </a:endParaRPr>
           </a:p>
           <a:p>
@@ -12598,9 +14365,9 @@
                     <a:alpha val="100000"/>
                   </a:srgbClr>
                 </a:solidFill>
-                <a:latin typeface="Trebuchet MS" panose="020B0703020202090204"/>
-                <a:ea typeface="Trebuchet MS" panose="020B0703020202090204"/>
-                <a:cs typeface="Trebuchet MS" panose="020B0703020202090204"/>
+                <a:latin typeface="Trebuchet MS" panose="020B0603020202020204"/>
+                <a:ea typeface="Trebuchet MS" panose="020B0603020202020204"/>
+                <a:cs typeface="Trebuchet MS" panose="020B0603020202020204"/>
               </a:rPr>
               <a:t>	</a:t>
             </a:r>
@@ -12611,9 +14378,9 @@
                     <a:alpha val="100000"/>
                   </a:srgbClr>
                 </a:solidFill>
-                <a:latin typeface="Trebuchet MS" panose="020B0703020202090204"/>
-                <a:ea typeface="Trebuchet MS" panose="020B0703020202090204"/>
-                <a:cs typeface="Trebuchet MS" panose="020B0703020202090204"/>
+                <a:latin typeface="Trebuchet MS" panose="020B0603020202020204"/>
+                <a:ea typeface="Trebuchet MS" panose="020B0603020202020204"/>
+                <a:cs typeface="Trebuchet MS" panose="020B0603020202020204"/>
               </a:rPr>
               <a:t>Depth-limited</a:t>
             </a:r>
@@ -12624,9 +14391,9 @@
                     <a:alpha val="100000"/>
                   </a:srgbClr>
                 </a:solidFill>
-                <a:latin typeface="Trebuchet MS" panose="020B0703020202090204"/>
-                <a:ea typeface="Trebuchet MS" panose="020B0703020202090204"/>
-                <a:cs typeface="Trebuchet MS" panose="020B0703020202090204"/>
+                <a:latin typeface="Trebuchet MS" panose="020B0603020202020204"/>
+                <a:ea typeface="Trebuchet MS" panose="020B0603020202020204"/>
+                <a:cs typeface="Trebuchet MS" panose="020B0603020202020204"/>
               </a:rPr>
               <a:t> </a:t>
             </a:r>
@@ -12637,9 +14404,9 @@
                     <a:alpha val="100000"/>
                   </a:srgbClr>
                 </a:solidFill>
-                <a:latin typeface="Trebuchet MS" panose="020B0703020202090204"/>
-                <a:ea typeface="Trebuchet MS" panose="020B0703020202090204"/>
-                <a:cs typeface="Trebuchet MS" panose="020B0703020202090204"/>
+                <a:latin typeface="Trebuchet MS" panose="020B0603020202020204"/>
+                <a:ea typeface="Trebuchet MS" panose="020B0603020202020204"/>
+                <a:cs typeface="Trebuchet MS" panose="020B0603020202020204"/>
               </a:rPr>
               <a:t>Ad</a:t>
             </a:r>
@@ -12650,9 +14417,9 @@
                     <a:alpha val="100000"/>
                   </a:srgbClr>
                 </a:solidFill>
-                <a:latin typeface="Trebuchet MS" panose="020B0703020202090204"/>
-                <a:ea typeface="Trebuchet MS" panose="020B0703020202090204"/>
-                <a:cs typeface="Trebuchet MS" panose="020B0703020202090204"/>
+                <a:latin typeface="Trebuchet MS" panose="020B0603020202020204"/>
+                <a:ea typeface="Trebuchet MS" panose="020B0603020202020204"/>
+                <a:cs typeface="Trebuchet MS" panose="020B0603020202020204"/>
               </a:rPr>
               <a:t>versarial</a:t>
             </a:r>
@@ -12663,9 +14430,9 @@
                     <a:alpha val="100000"/>
                   </a:srgbClr>
                 </a:solidFill>
-                <a:latin typeface="Trebuchet MS" panose="020B0703020202090204"/>
-                <a:ea typeface="Trebuchet MS" panose="020B0703020202090204"/>
-                <a:cs typeface="Trebuchet MS" panose="020B0703020202090204"/>
+                <a:latin typeface="Trebuchet MS" panose="020B0603020202020204"/>
+                <a:ea typeface="Trebuchet MS" panose="020B0603020202020204"/>
+                <a:cs typeface="Trebuchet MS" panose="020B0603020202020204"/>
               </a:rPr>
               <a:t> </a:t>
             </a:r>
@@ -12676,16 +14443,16 @@
                     <a:alpha val="100000"/>
                   </a:srgbClr>
                 </a:solidFill>
-                <a:latin typeface="Trebuchet MS" panose="020B0703020202090204"/>
-                <a:ea typeface="Trebuchet MS" panose="020B0703020202090204"/>
-                <a:cs typeface="Trebuchet MS" panose="020B0703020202090204"/>
+                <a:latin typeface="Trebuchet MS" panose="020B0603020202020204"/>
+                <a:ea typeface="Trebuchet MS" panose="020B0603020202020204"/>
+                <a:cs typeface="Trebuchet MS" panose="020B0603020202020204"/>
               </a:rPr>
               <a:t>Search</a:t>
             </a:r>
             <a:endParaRPr sz="2100" dirty="0">
-              <a:latin typeface="Trebuchet MS" panose="020B0703020202090204"/>
-              <a:ea typeface="Trebuchet MS" panose="020B0703020202090204"/>
-              <a:cs typeface="Trebuchet MS" panose="020B0703020202090204"/>
+              <a:latin typeface="Trebuchet MS" panose="020B0603020202020204"/>
+              <a:ea typeface="Trebuchet MS" panose="020B0603020202020204"/>
+              <a:cs typeface="Trebuchet MS" panose="020B0603020202020204"/>
             </a:endParaRPr>
           </a:p>
           <a:p>
@@ -12764,9 +14531,9 @@
                     <a:alpha val="100000"/>
                   </a:srgbClr>
                 </a:solidFill>
-                <a:latin typeface="Trebuchet MS" panose="020B0703020202090204"/>
-                <a:ea typeface="Trebuchet MS" panose="020B0703020202090204"/>
-                <a:cs typeface="Trebuchet MS" panose="020B0703020202090204"/>
+                <a:latin typeface="Trebuchet MS" panose="020B0603020202020204"/>
+                <a:ea typeface="Trebuchet MS" panose="020B0603020202020204"/>
+                <a:cs typeface="Trebuchet MS" panose="020B0603020202020204"/>
               </a:rPr>
               <a:t>	</a:t>
             </a:r>
@@ -12777,9 +14544,9 @@
                     <a:alpha val="100000"/>
                   </a:srgbClr>
                 </a:solidFill>
-                <a:latin typeface="Trebuchet MS" panose="020B0703020202090204"/>
-                <a:ea typeface="Trebuchet MS" panose="020B0703020202090204"/>
-                <a:cs typeface="Trebuchet MS" panose="020B0703020202090204"/>
+                <a:latin typeface="Trebuchet MS" panose="020B0603020202020204"/>
+                <a:ea typeface="Trebuchet MS" panose="020B0603020202020204"/>
+                <a:cs typeface="Trebuchet MS" panose="020B0603020202020204"/>
               </a:rPr>
               <a:t>Heuristic</a:t>
             </a:r>
@@ -12790,9 +14557,9 @@
                     <a:alpha val="100000"/>
                   </a:srgbClr>
                 </a:solidFill>
-                <a:latin typeface="Trebuchet MS" panose="020B0703020202090204"/>
-                <a:ea typeface="Trebuchet MS" panose="020B0703020202090204"/>
-                <a:cs typeface="Trebuchet MS" panose="020B0703020202090204"/>
+                <a:latin typeface="Trebuchet MS" panose="020B0603020202020204"/>
+                <a:ea typeface="Trebuchet MS" panose="020B0603020202020204"/>
+                <a:cs typeface="Trebuchet MS" panose="020B0603020202020204"/>
               </a:rPr>
               <a:t> </a:t>
             </a:r>
@@ -12803,9 +14570,9 @@
                     <a:alpha val="100000"/>
                   </a:srgbClr>
                 </a:solidFill>
-                <a:latin typeface="Trebuchet MS" panose="020B0703020202090204"/>
-                <a:ea typeface="Trebuchet MS" panose="020B0703020202090204"/>
-                <a:cs typeface="Trebuchet MS" panose="020B0703020202090204"/>
+                <a:latin typeface="Trebuchet MS" panose="020B0603020202020204"/>
+                <a:ea typeface="Trebuchet MS" panose="020B0603020202020204"/>
+                <a:cs typeface="Trebuchet MS" panose="020B0603020202020204"/>
               </a:rPr>
               <a:t>State</a:t>
             </a:r>
@@ -12816,9 +14583,9 @@
                     <a:alpha val="100000"/>
                   </a:srgbClr>
                 </a:solidFill>
-                <a:latin typeface="Trebuchet MS" panose="020B0703020202090204"/>
-                <a:ea typeface="Trebuchet MS" panose="020B0703020202090204"/>
-                <a:cs typeface="Trebuchet MS" panose="020B0703020202090204"/>
+                <a:latin typeface="Trebuchet MS" panose="020B0603020202020204"/>
+                <a:ea typeface="Trebuchet MS" panose="020B0603020202020204"/>
+                <a:cs typeface="Trebuchet MS" panose="020B0603020202020204"/>
               </a:rPr>
               <a:t> </a:t>
             </a:r>
@@ -12829,16 +14596,16 @@
                     <a:alpha val="100000"/>
                   </a:srgbClr>
                 </a:solidFill>
-                <a:latin typeface="Trebuchet MS" panose="020B0703020202090204"/>
-                <a:ea typeface="Trebuchet MS" panose="020B0703020202090204"/>
-                <a:cs typeface="Trebuchet MS" panose="020B0703020202090204"/>
+                <a:latin typeface="Trebuchet MS" panose="020B0603020202020204"/>
+                <a:ea typeface="Trebuchet MS" panose="020B0603020202020204"/>
+                <a:cs typeface="Trebuchet MS" panose="020B0603020202020204"/>
               </a:rPr>
               <a:t>Evaluation</a:t>
             </a:r>
             <a:endParaRPr sz="2100" dirty="0">
-              <a:latin typeface="Trebuchet MS" panose="020B0703020202090204"/>
-              <a:ea typeface="Trebuchet MS" panose="020B0703020202090204"/>
-              <a:cs typeface="Trebuchet MS" panose="020B0703020202090204"/>
+              <a:latin typeface="Trebuchet MS" panose="020B0603020202020204"/>
+              <a:ea typeface="Trebuchet MS" panose="020B0603020202020204"/>
+              <a:cs typeface="Trebuchet MS" panose="020B0603020202020204"/>
             </a:endParaRPr>
           </a:p>
           <a:p>
@@ -12912,9 +14679,9 @@
                     <a:alpha val="100000"/>
                   </a:srgbClr>
                 </a:solidFill>
-                <a:latin typeface="Arial" panose="020B0604020202090204"/>
-                <a:ea typeface="Arial" panose="020B0604020202090204"/>
-                <a:cs typeface="Arial" panose="020B0604020202090204"/>
+                <a:latin typeface="Arial" panose="020B0604020202020204"/>
+                <a:ea typeface="Arial" panose="020B0604020202020204"/>
+                <a:cs typeface="Arial" panose="020B0604020202020204"/>
               </a:rPr>
               <a:t>.</a:t>
             </a:r>
@@ -12925,9 +14692,9 @@
                     <a:alpha val="100000"/>
                   </a:srgbClr>
                 </a:solidFill>
-                <a:latin typeface="Arial" panose="020B0604020202090204"/>
-                <a:ea typeface="Arial" panose="020B0604020202090204"/>
-                <a:cs typeface="Arial" panose="020B0604020202090204"/>
+                <a:latin typeface="Arial" panose="020B0604020202020204"/>
+                <a:ea typeface="Arial" panose="020B0604020202020204"/>
+                <a:cs typeface="Arial" panose="020B0604020202020204"/>
               </a:rPr>
               <a:t>  </a:t>
             </a:r>
@@ -12938,9 +14705,9 @@
                     <a:alpha val="100000"/>
                   </a:srgbClr>
                 </a:solidFill>
-                <a:latin typeface="Trebuchet MS" panose="020B0703020202090204"/>
-                <a:ea typeface="Trebuchet MS" panose="020B0703020202090204"/>
-                <a:cs typeface="Trebuchet MS" panose="020B0703020202090204"/>
+                <a:latin typeface="Trebuchet MS" panose="020B0603020202020204"/>
+                <a:ea typeface="Trebuchet MS" panose="020B0603020202020204"/>
+                <a:cs typeface="Trebuchet MS" panose="020B0603020202020204"/>
               </a:rPr>
               <a:t>Expectimax</a:t>
             </a:r>
@@ -12951,9 +14718,9 @@
                     <a:alpha val="100000"/>
                   </a:srgbClr>
                 </a:solidFill>
-                <a:latin typeface="Trebuchet MS" panose="020B0703020202090204"/>
-                <a:ea typeface="Trebuchet MS" panose="020B0703020202090204"/>
-                <a:cs typeface="Trebuchet MS" panose="020B0703020202090204"/>
+                <a:latin typeface="Trebuchet MS" panose="020B0603020202020204"/>
+                <a:ea typeface="Trebuchet MS" panose="020B0603020202020204"/>
+                <a:cs typeface="Trebuchet MS" panose="020B0603020202020204"/>
               </a:rPr>
               <a:t> </a:t>
             </a:r>
@@ -12964,9 +14731,9 @@
                     <a:alpha val="100000"/>
                   </a:srgbClr>
                 </a:solidFill>
-                <a:latin typeface="Trebuchet MS" panose="020B0703020202090204"/>
-                <a:ea typeface="Trebuchet MS" panose="020B0703020202090204"/>
-                <a:cs typeface="Trebuchet MS" panose="020B0703020202090204"/>
+                <a:latin typeface="Trebuchet MS" panose="020B0603020202020204"/>
+                <a:ea typeface="Trebuchet MS" panose="020B0603020202020204"/>
+                <a:cs typeface="Trebuchet MS" panose="020B0603020202020204"/>
               </a:rPr>
               <a:t>Algorit</a:t>
             </a:r>
@@ -12977,16 +14744,16 @@
                     <a:alpha val="100000"/>
                   </a:srgbClr>
                 </a:solidFill>
-                <a:latin typeface="Trebuchet MS" panose="020B0703020202090204"/>
-                <a:ea typeface="Trebuchet MS" panose="020B0703020202090204"/>
-                <a:cs typeface="Trebuchet MS" panose="020B0703020202090204"/>
+                <a:latin typeface="Trebuchet MS" panose="020B0603020202020204"/>
+                <a:ea typeface="Trebuchet MS" panose="020B0603020202020204"/>
+                <a:cs typeface="Trebuchet MS" panose="020B0603020202020204"/>
               </a:rPr>
               <a:t>hm</a:t>
             </a:r>
             <a:endParaRPr sz="2100" dirty="0">
-              <a:latin typeface="Trebuchet MS" panose="020B0703020202090204"/>
-              <a:ea typeface="Trebuchet MS" panose="020B0703020202090204"/>
-              <a:cs typeface="Trebuchet MS" panose="020B0703020202090204"/>
+              <a:latin typeface="Trebuchet MS" panose="020B0603020202020204"/>
+              <a:ea typeface="Trebuchet MS" panose="020B0603020202020204"/>
+              <a:cs typeface="Trebuchet MS" panose="020B0603020202020204"/>
             </a:endParaRPr>
           </a:p>
           <a:p>
@@ -12996,9 +14763,9 @@
               </a:lnSpc>
             </a:pPr>
             <a:endParaRPr sz="700" dirty="0">
-              <a:latin typeface="Arial" panose="020B0604020202090204"/>
-              <a:ea typeface="Arial" panose="020B0604020202090204"/>
-              <a:cs typeface="Arial" panose="020B0604020202090204"/>
+              <a:latin typeface="Arial" panose="020B0604020202020204"/>
+              <a:ea typeface="Arial" panose="020B0604020202020204"/>
+              <a:cs typeface="Arial" panose="020B0604020202020204"/>
             </a:endParaRPr>
           </a:p>
           <a:p>
@@ -13655,9 +15422,9 @@
               </a:lnSpc>
             </a:pPr>
             <a:endParaRPr sz="100" dirty="0">
-              <a:latin typeface="Arial" panose="020B0604020202090204"/>
-              <a:ea typeface="Arial" panose="020B0604020202090204"/>
-              <a:cs typeface="Arial" panose="020B0604020202090204"/>
+              <a:latin typeface="Arial" panose="020B0604020202020204"/>
+              <a:ea typeface="Arial" panose="020B0604020202020204"/>
+              <a:cs typeface="Arial" panose="020B0604020202020204"/>
             </a:endParaRPr>
           </a:p>
           <a:p>
@@ -13757,9 +15524,9 @@
               </a:lnSpc>
             </a:pPr>
             <a:endParaRPr sz="100" dirty="0">
-              <a:latin typeface="Arial" panose="020B0604020202090204"/>
-              <a:ea typeface="Arial" panose="020B0604020202090204"/>
-              <a:cs typeface="Arial" panose="020B0604020202090204"/>
+              <a:latin typeface="Arial" panose="020B0604020202020204"/>
+              <a:ea typeface="Arial" panose="020B0604020202020204"/>
+              <a:cs typeface="Arial" panose="020B0604020202020204"/>
             </a:endParaRPr>
           </a:p>
           <a:p>
@@ -13923,9 +15690,9 @@
               </a:lnSpc>
             </a:pPr>
             <a:endParaRPr sz="100" dirty="0">
-              <a:latin typeface="Arial" panose="020B0604020202090204"/>
-              <a:ea typeface="Arial" panose="020B0604020202090204"/>
-              <a:cs typeface="Arial" panose="020B0604020202090204"/>
+              <a:latin typeface="Arial" panose="020B0604020202020204"/>
+              <a:ea typeface="Arial" panose="020B0604020202020204"/>
+              <a:cs typeface="Arial" panose="020B0604020202020204"/>
             </a:endParaRPr>
           </a:p>
           <a:p>
@@ -13941,16 +15708,16 @@
                     <a:alpha val="100000"/>
                   </a:srgbClr>
                 </a:solidFill>
-                <a:latin typeface="Trebuchet MS" panose="020B0703020202090204"/>
-                <a:ea typeface="Trebuchet MS" panose="020B0703020202090204"/>
-                <a:cs typeface="Trebuchet MS" panose="020B0703020202090204"/>
+                <a:latin typeface="Trebuchet MS" panose="020B0603020202020204"/>
+                <a:ea typeface="Trebuchet MS" panose="020B0603020202020204"/>
+                <a:cs typeface="Trebuchet MS" panose="020B0603020202020204"/>
               </a:rPr>
               <a:t>Implementmethods</a:t>
             </a:r>
             <a:endParaRPr sz="3600" dirty="0">
-              <a:latin typeface="Trebuchet MS" panose="020B0703020202090204"/>
-              <a:ea typeface="Trebuchet MS" panose="020B0703020202090204"/>
-              <a:cs typeface="Trebuchet MS" panose="020B0703020202090204"/>
+              <a:latin typeface="Trebuchet MS" panose="020B0603020202020204"/>
+              <a:ea typeface="Trebuchet MS" panose="020B0603020202020204"/>
+              <a:cs typeface="Trebuchet MS" panose="020B0603020202020204"/>
             </a:endParaRPr>
           </a:p>
           <a:p>
@@ -13960,9 +15727,9 @@
               </a:lnSpc>
             </a:pPr>
             <a:endParaRPr sz="1000" dirty="0">
-              <a:latin typeface="Arial" panose="020B0604020202090204"/>
-              <a:ea typeface="Arial" panose="020B0604020202090204"/>
-              <a:cs typeface="Arial" panose="020B0604020202090204"/>
+              <a:latin typeface="Arial" panose="020B0604020202020204"/>
+              <a:ea typeface="Arial" panose="020B0604020202020204"/>
+              <a:cs typeface="Arial" panose="020B0604020202020204"/>
             </a:endParaRPr>
           </a:p>
           <a:p>
@@ -13972,9 +15739,9 @@
               </a:lnSpc>
             </a:pPr>
             <a:endParaRPr sz="1000" dirty="0">
-              <a:latin typeface="Arial" panose="020B0604020202090204"/>
-              <a:ea typeface="Arial" panose="020B0604020202090204"/>
-              <a:cs typeface="Arial" panose="020B0604020202090204"/>
+              <a:latin typeface="Arial" panose="020B0604020202020204"/>
+              <a:ea typeface="Arial" panose="020B0604020202020204"/>
+              <a:cs typeface="Arial" panose="020B0604020202020204"/>
             </a:endParaRPr>
           </a:p>
           <a:p>
@@ -13993,9 +15760,9 @@
                     <a:alpha val="100000"/>
                   </a:srgbClr>
                 </a:solidFill>
-                <a:latin typeface="Trebuchet MS" panose="020B0703020202090204"/>
-                <a:ea typeface="Trebuchet MS" panose="020B0703020202090204"/>
-                <a:cs typeface="Trebuchet MS" panose="020B0703020202090204"/>
+                <a:latin typeface="Trebuchet MS" panose="020B0603020202020204"/>
+                <a:ea typeface="Trebuchet MS" panose="020B0603020202020204"/>
+                <a:cs typeface="Trebuchet MS" panose="020B0603020202020204"/>
               </a:rPr>
               <a:t>2.</a:t>
             </a:r>
@@ -14006,9 +15773,9 @@
                     <a:alpha val="100000"/>
                   </a:srgbClr>
                 </a:solidFill>
-                <a:latin typeface="Trebuchet MS" panose="020B0703020202090204"/>
-                <a:ea typeface="Trebuchet MS" panose="020B0703020202090204"/>
-                <a:cs typeface="Trebuchet MS" panose="020B0703020202090204"/>
+                <a:latin typeface="Trebuchet MS" panose="020B0603020202020204"/>
+                <a:ea typeface="Trebuchet MS" panose="020B0603020202020204"/>
+                <a:cs typeface="Trebuchet MS" panose="020B0603020202020204"/>
               </a:rPr>
               <a:t> </a:t>
             </a:r>
@@ -14019,16 +15786,16 @@
                     <a:alpha val="100000"/>
                   </a:srgbClr>
                 </a:solidFill>
-                <a:latin typeface="Trebuchet MS" panose="020B0703020202090204"/>
-                <a:ea typeface="Trebuchet MS" panose="020B0703020202090204"/>
-                <a:cs typeface="Trebuchet MS" panose="020B0703020202090204"/>
+                <a:latin typeface="Trebuchet MS" panose="020B0603020202020204"/>
+                <a:ea typeface="Trebuchet MS" panose="020B0603020202020204"/>
+                <a:cs typeface="Trebuchet MS" panose="020B0603020202020204"/>
               </a:rPr>
               <a:t>CSP</a:t>
             </a:r>
             <a:endParaRPr sz="2300" dirty="0">
-              <a:latin typeface="Trebuchet MS" panose="020B0703020202090204"/>
-              <a:ea typeface="Trebuchet MS" panose="020B0703020202090204"/>
-              <a:cs typeface="Trebuchet MS" panose="020B0703020202090204"/>
+              <a:latin typeface="Trebuchet MS" panose="020B0603020202020204"/>
+              <a:ea typeface="Trebuchet MS" panose="020B0603020202020204"/>
+              <a:cs typeface="Trebuchet MS" panose="020B0603020202020204"/>
             </a:endParaRPr>
           </a:p>
           <a:p>
@@ -14047,9 +15814,9 @@
                     <a:alpha val="100000"/>
                   </a:srgbClr>
                 </a:solidFill>
-                <a:latin typeface="Arial" panose="020B0604020202090204"/>
-                <a:ea typeface="Arial" panose="020B0604020202090204"/>
-                <a:cs typeface="Arial" panose="020B0604020202090204"/>
+                <a:latin typeface="Arial" panose="020B0604020202020204"/>
+                <a:ea typeface="Arial" panose="020B0604020202020204"/>
+                <a:cs typeface="Arial" panose="020B0604020202020204"/>
               </a:rPr>
               <a:t>.</a:t>
             </a:r>
@@ -14060,9 +15827,9 @@
                     <a:alpha val="100000"/>
                   </a:srgbClr>
                 </a:solidFill>
-                <a:latin typeface="Arial" panose="020B0604020202090204"/>
-                <a:ea typeface="Arial" panose="020B0604020202090204"/>
-                <a:cs typeface="Arial" panose="020B0604020202090204"/>
+                <a:latin typeface="Arial" panose="020B0604020202020204"/>
+                <a:ea typeface="Arial" panose="020B0604020202020204"/>
+                <a:cs typeface="Arial" panose="020B0604020202020204"/>
               </a:rPr>
               <a:t>  </a:t>
             </a:r>
@@ -14124,9 +15891,9 @@
                     <a:alpha val="100000"/>
                   </a:srgbClr>
                 </a:solidFill>
-                <a:latin typeface="Arial" panose="020B0604020202090204"/>
-                <a:ea typeface="Arial" panose="020B0604020202090204"/>
-                <a:cs typeface="Arial" panose="020B0604020202090204"/>
+                <a:latin typeface="Arial" panose="020B0604020202020204"/>
+                <a:ea typeface="Arial" panose="020B0604020202020204"/>
+                <a:cs typeface="Arial" panose="020B0604020202020204"/>
               </a:rPr>
               <a:t>.</a:t>
             </a:r>
@@ -14137,9 +15904,9 @@
                     <a:alpha val="100000"/>
                   </a:srgbClr>
                 </a:solidFill>
-                <a:latin typeface="Arial" panose="020B0604020202090204"/>
-                <a:ea typeface="Arial" panose="020B0604020202090204"/>
-                <a:cs typeface="Arial" panose="020B0604020202090204"/>
+                <a:latin typeface="Arial" panose="020B0604020202020204"/>
+                <a:ea typeface="Arial" panose="020B0604020202020204"/>
+                <a:cs typeface="Arial" panose="020B0604020202020204"/>
               </a:rPr>
               <a:t>  </a:t>
             </a:r>
@@ -14243,9 +16010,9 @@
                     <a:alpha val="100000"/>
                   </a:srgbClr>
                 </a:solidFill>
-                <a:latin typeface="Arial" panose="020B0604020202090204"/>
-                <a:ea typeface="Arial" panose="020B0604020202090204"/>
-                <a:cs typeface="Arial" panose="020B0604020202090204"/>
+                <a:latin typeface="Arial" panose="020B0604020202020204"/>
+                <a:ea typeface="Arial" panose="020B0604020202020204"/>
+                <a:cs typeface="Arial" panose="020B0604020202020204"/>
               </a:rPr>
               <a:t>.</a:t>
             </a:r>
@@ -14256,9 +16023,9 @@
                     <a:alpha val="100000"/>
                   </a:srgbClr>
                 </a:solidFill>
-                <a:latin typeface="Arial" panose="020B0604020202090204"/>
-                <a:ea typeface="Arial" panose="020B0604020202090204"/>
-                <a:cs typeface="Arial" panose="020B0604020202090204"/>
+                <a:latin typeface="Arial" panose="020B0604020202020204"/>
+                <a:ea typeface="Arial" panose="020B0604020202020204"/>
+                <a:cs typeface="Arial" panose="020B0604020202020204"/>
               </a:rPr>
               <a:t>  </a:t>
             </a:r>
@@ -14301,9 +16068,9 @@
               </a:lnSpc>
             </a:pPr>
             <a:endParaRPr sz="1200" dirty="0">
-              <a:latin typeface="Arial" panose="020B0604020202090204"/>
-              <a:ea typeface="Arial" panose="020B0604020202090204"/>
-              <a:cs typeface="Arial" panose="020B0604020202090204"/>
+              <a:latin typeface="Arial" panose="020B0604020202020204"/>
+              <a:ea typeface="Arial" panose="020B0604020202020204"/>
+              <a:cs typeface="Arial" panose="020B0604020202020204"/>
             </a:endParaRPr>
           </a:p>
           <a:p>
@@ -14313,9 +16080,9 @@
               </a:lnSpc>
             </a:pPr>
             <a:endParaRPr sz="100" dirty="0">
-              <a:latin typeface="Arial" panose="020B0604020202090204"/>
-              <a:ea typeface="Arial" panose="020B0604020202090204"/>
-              <a:cs typeface="Arial" panose="020B0604020202090204"/>
+              <a:latin typeface="Arial" panose="020B0604020202020204"/>
+              <a:ea typeface="Arial" panose="020B0604020202020204"/>
+              <a:cs typeface="Arial" panose="020B0604020202020204"/>
             </a:endParaRPr>
           </a:p>
           <a:p>
@@ -14331,9 +16098,9 @@
                     <a:alpha val="100000"/>
                   </a:srgbClr>
                 </a:solidFill>
-                <a:latin typeface="Arial" panose="020B0604020202090204"/>
-                <a:ea typeface="Arial" panose="020B0604020202090204"/>
-                <a:cs typeface="Arial" panose="020B0604020202090204"/>
+                <a:latin typeface="Arial" panose="020B0604020202020204"/>
+                <a:ea typeface="Arial" panose="020B0604020202020204"/>
+                <a:cs typeface="Arial" panose="020B0604020202020204"/>
               </a:rPr>
               <a:t>.</a:t>
             </a:r>
@@ -14344,9 +16111,9 @@
                     <a:alpha val="100000"/>
                   </a:srgbClr>
                 </a:solidFill>
-                <a:latin typeface="Arial" panose="020B0604020202090204"/>
-                <a:ea typeface="Arial" panose="020B0604020202090204"/>
-                <a:cs typeface="Arial" panose="020B0604020202090204"/>
+                <a:latin typeface="Arial" panose="020B0604020202020204"/>
+                <a:ea typeface="Arial" panose="020B0604020202020204"/>
+                <a:cs typeface="Arial" panose="020B0604020202020204"/>
               </a:rPr>
               <a:t>  </a:t>
             </a:r>
@@ -14415,9 +16182,9 @@
               </a:lnSpc>
             </a:pPr>
             <a:endParaRPr sz="100" dirty="0">
-              <a:latin typeface="Arial" panose="020B0604020202090204"/>
-              <a:ea typeface="Arial" panose="020B0604020202090204"/>
-              <a:cs typeface="Arial" panose="020B0604020202090204"/>
+              <a:latin typeface="Arial" panose="020B0604020202020204"/>
+              <a:ea typeface="Arial" panose="020B0604020202020204"/>
+              <a:cs typeface="Arial" panose="020B0604020202020204"/>
             </a:endParaRPr>
           </a:p>
           <a:p>
@@ -14517,9 +16284,9 @@
               </a:lnSpc>
             </a:pPr>
             <a:endParaRPr sz="100" dirty="0">
-              <a:latin typeface="Arial" panose="020B0604020202090204"/>
-              <a:ea typeface="Arial" panose="020B0604020202090204"/>
-              <a:cs typeface="Arial" panose="020B0604020202090204"/>
+              <a:latin typeface="Arial" panose="020B0604020202020204"/>
+              <a:ea typeface="Arial" panose="020B0604020202020204"/>
+              <a:cs typeface="Arial" panose="020B0604020202020204"/>
             </a:endParaRPr>
           </a:p>
           <a:p>
@@ -14683,9 +16450,9 @@
               </a:lnSpc>
             </a:pPr>
             <a:endParaRPr sz="100" dirty="0">
-              <a:latin typeface="Arial" panose="020B0604020202090204"/>
-              <a:ea typeface="Arial" panose="020B0604020202090204"/>
-              <a:cs typeface="Arial" panose="020B0604020202090204"/>
+              <a:latin typeface="Arial" panose="020B0604020202020204"/>
+              <a:ea typeface="Arial" panose="020B0604020202020204"/>
+              <a:cs typeface="Arial" panose="020B0604020202020204"/>
             </a:endParaRPr>
           </a:p>
           <a:p>
@@ -14701,16 +16468,16 @@
                     <a:alpha val="100000"/>
                   </a:srgbClr>
                 </a:solidFill>
-                <a:latin typeface="Trebuchet MS" panose="020B0703020202090204"/>
-                <a:ea typeface="Trebuchet MS" panose="020B0703020202090204"/>
-                <a:cs typeface="Trebuchet MS" panose="020B0703020202090204"/>
+                <a:latin typeface="Trebuchet MS" panose="020B0603020202020204"/>
+                <a:ea typeface="Trebuchet MS" panose="020B0603020202020204"/>
+                <a:cs typeface="Trebuchet MS" panose="020B0603020202020204"/>
               </a:rPr>
               <a:t>Implementmethods</a:t>
             </a:r>
             <a:endParaRPr sz="3600" dirty="0">
-              <a:latin typeface="Trebuchet MS" panose="020B0703020202090204"/>
-              <a:ea typeface="Trebuchet MS" panose="020B0703020202090204"/>
-              <a:cs typeface="Trebuchet MS" panose="020B0703020202090204"/>
+              <a:latin typeface="Trebuchet MS" panose="020B0603020202020204"/>
+              <a:ea typeface="Trebuchet MS" panose="020B0603020202020204"/>
+              <a:cs typeface="Trebuchet MS" panose="020B0603020202020204"/>
             </a:endParaRPr>
           </a:p>
           <a:p>
@@ -14720,9 +16487,9 @@
               </a:lnSpc>
             </a:pPr>
             <a:endParaRPr sz="1000" dirty="0">
-              <a:latin typeface="Arial" panose="020B0604020202090204"/>
-              <a:ea typeface="Arial" panose="020B0604020202090204"/>
-              <a:cs typeface="Arial" panose="020B0604020202090204"/>
+              <a:latin typeface="Arial" panose="020B0604020202020204"/>
+              <a:ea typeface="Arial" panose="020B0604020202020204"/>
+              <a:cs typeface="Arial" panose="020B0604020202020204"/>
             </a:endParaRPr>
           </a:p>
           <a:p>
@@ -14732,9 +16499,9 @@
               </a:lnSpc>
             </a:pPr>
             <a:endParaRPr sz="1000" dirty="0">
-              <a:latin typeface="Arial" panose="020B0604020202090204"/>
-              <a:ea typeface="Arial" panose="020B0604020202090204"/>
-              <a:cs typeface="Arial" panose="020B0604020202090204"/>
+              <a:latin typeface="Arial" panose="020B0604020202020204"/>
+              <a:ea typeface="Arial" panose="020B0604020202020204"/>
+              <a:cs typeface="Arial" panose="020B0604020202020204"/>
             </a:endParaRPr>
           </a:p>
           <a:p>
@@ -14753,9 +16520,9 @@
                     <a:alpha val="100000"/>
                   </a:srgbClr>
                 </a:solidFill>
-                <a:latin typeface="Trebuchet MS" panose="020B0703020202090204"/>
-                <a:ea typeface="Trebuchet MS" panose="020B0703020202090204"/>
-                <a:cs typeface="Trebuchet MS" panose="020B0703020202090204"/>
+                <a:latin typeface="Trebuchet MS" panose="020B0603020202020204"/>
+                <a:ea typeface="Trebuchet MS" panose="020B0603020202020204"/>
+                <a:cs typeface="Trebuchet MS" panose="020B0603020202020204"/>
               </a:rPr>
               <a:t>3.</a:t>
             </a:r>
@@ -14766,9 +16533,9 @@
                     <a:alpha val="100000"/>
                   </a:srgbClr>
                 </a:solidFill>
-                <a:latin typeface="Trebuchet MS" panose="020B0703020202090204"/>
-                <a:ea typeface="Trebuchet MS" panose="020B0703020202090204"/>
-                <a:cs typeface="Trebuchet MS" panose="020B0703020202090204"/>
+                <a:latin typeface="Trebuchet MS" panose="020B0603020202020204"/>
+                <a:ea typeface="Trebuchet MS" panose="020B0603020202020204"/>
+                <a:cs typeface="Trebuchet MS" panose="020B0603020202020204"/>
               </a:rPr>
               <a:t> </a:t>
             </a:r>
@@ -14779,16 +16546,16 @@
                     <a:alpha val="100000"/>
                   </a:srgbClr>
                 </a:solidFill>
-                <a:latin typeface="Trebuchet MS" panose="020B0703020202090204"/>
-                <a:ea typeface="Trebuchet MS" panose="020B0703020202090204"/>
-                <a:cs typeface="Trebuchet MS" panose="020B0703020202090204"/>
+                <a:latin typeface="Trebuchet MS" panose="020B0603020202020204"/>
+                <a:ea typeface="Trebuchet MS" panose="020B0603020202020204"/>
+                <a:cs typeface="Trebuchet MS" panose="020B0603020202020204"/>
               </a:rPr>
               <a:t>Inference</a:t>
             </a:r>
             <a:endParaRPr sz="2300" dirty="0">
-              <a:latin typeface="Trebuchet MS" panose="020B0703020202090204"/>
-              <a:ea typeface="Trebuchet MS" panose="020B0703020202090204"/>
-              <a:cs typeface="Trebuchet MS" panose="020B0703020202090204"/>
+              <a:latin typeface="Trebuchet MS" panose="020B0603020202020204"/>
+              <a:ea typeface="Trebuchet MS" panose="020B0603020202020204"/>
+              <a:cs typeface="Trebuchet MS" panose="020B0603020202020204"/>
             </a:endParaRPr>
           </a:p>
           <a:p>
@@ -14798,9 +16565,9 @@
               </a:lnSpc>
             </a:pPr>
             <a:endParaRPr sz="1000" dirty="0">
-              <a:latin typeface="Arial" panose="020B0604020202090204"/>
-              <a:ea typeface="Arial" panose="020B0604020202090204"/>
-              <a:cs typeface="Arial" panose="020B0604020202090204"/>
+              <a:latin typeface="Arial" panose="020B0604020202020204"/>
+              <a:ea typeface="Arial" panose="020B0604020202020204"/>
+              <a:cs typeface="Arial" panose="020B0604020202020204"/>
             </a:endParaRPr>
           </a:p>
           <a:p>
@@ -14822,9 +16589,9 @@
                     <a:alpha val="100000"/>
                   </a:srgbClr>
                 </a:solidFill>
-                <a:latin typeface="Trebuchet MS" panose="020B0703020202090204"/>
-                <a:ea typeface="Trebuchet MS" panose="020B0703020202090204"/>
-                <a:cs typeface="Trebuchet MS" panose="020B0703020202090204"/>
+                <a:latin typeface="Trebuchet MS" panose="020B0603020202020204"/>
+                <a:ea typeface="Trebuchet MS" panose="020B0603020202020204"/>
+                <a:cs typeface="Trebuchet MS" panose="020B0603020202020204"/>
               </a:rPr>
               <a:t>	</a:t>
             </a:r>
@@ -14835,9 +16602,9 @@
                     <a:alpha val="100000"/>
                   </a:srgbClr>
                 </a:solidFill>
-                <a:latin typeface="Trebuchet MS" panose="020B0703020202090204"/>
-                <a:ea typeface="Trebuchet MS" panose="020B0703020202090204"/>
-                <a:cs typeface="Trebuchet MS" panose="020B0703020202090204"/>
+                <a:latin typeface="Trebuchet MS" panose="020B0603020202020204"/>
+                <a:ea typeface="Trebuchet MS" panose="020B0603020202020204"/>
+                <a:cs typeface="Trebuchet MS" panose="020B0603020202020204"/>
               </a:rPr>
               <a:t>Exact</a:t>
             </a:r>
@@ -14848,9 +16615,9 @@
                     <a:alpha val="100000"/>
                   </a:srgbClr>
                 </a:solidFill>
-                <a:latin typeface="Trebuchet MS" panose="020B0703020202090204"/>
-                <a:ea typeface="Trebuchet MS" panose="020B0703020202090204"/>
-                <a:cs typeface="Trebuchet MS" panose="020B0703020202090204"/>
+                <a:latin typeface="Trebuchet MS" panose="020B0603020202020204"/>
+                <a:ea typeface="Trebuchet MS" panose="020B0603020202020204"/>
+                <a:cs typeface="Trebuchet MS" panose="020B0603020202020204"/>
               </a:rPr>
               <a:t> </a:t>
             </a:r>
@@ -14861,9 +16628,9 @@
                     <a:alpha val="100000"/>
                   </a:srgbClr>
                 </a:solidFill>
-                <a:latin typeface="Trebuchet MS" panose="020B0703020202090204"/>
-                <a:ea typeface="Trebuchet MS" panose="020B0703020202090204"/>
-                <a:cs typeface="Trebuchet MS" panose="020B0703020202090204"/>
+                <a:latin typeface="Trebuchet MS" panose="020B0603020202020204"/>
+                <a:ea typeface="Trebuchet MS" panose="020B0603020202020204"/>
+                <a:cs typeface="Trebuchet MS" panose="020B0603020202020204"/>
               </a:rPr>
               <a:t>Infe</a:t>
             </a:r>
@@ -14874,16 +16641,16 @@
                     <a:alpha val="100000"/>
                   </a:srgbClr>
                 </a:solidFill>
-                <a:latin typeface="Trebuchet MS" panose="020B0703020202090204"/>
-                <a:ea typeface="Trebuchet MS" panose="020B0703020202090204"/>
-                <a:cs typeface="Trebuchet MS" panose="020B0703020202090204"/>
+                <a:latin typeface="Trebuchet MS" panose="020B0603020202020204"/>
+                <a:ea typeface="Trebuchet MS" panose="020B0603020202020204"/>
+                <a:cs typeface="Trebuchet MS" panose="020B0603020202020204"/>
               </a:rPr>
               <a:t>rence</a:t>
             </a:r>
             <a:endParaRPr sz="2100" dirty="0">
-              <a:latin typeface="Trebuchet MS" panose="020B0703020202090204"/>
-              <a:ea typeface="Trebuchet MS" panose="020B0703020202090204"/>
-              <a:cs typeface="Trebuchet MS" panose="020B0703020202090204"/>
+              <a:latin typeface="Trebuchet MS" panose="020B0603020202020204"/>
+              <a:ea typeface="Trebuchet MS" panose="020B0603020202020204"/>
+              <a:cs typeface="Trebuchet MS" panose="020B0603020202020204"/>
             </a:endParaRPr>
           </a:p>
           <a:p>
@@ -15071,9 +16838,9 @@
                     <a:alpha val="100000"/>
                   </a:srgbClr>
                 </a:solidFill>
-                <a:latin typeface="Trebuchet MS" panose="020B0703020202090204"/>
-                <a:ea typeface="Trebuchet MS" panose="020B0703020202090204"/>
-                <a:cs typeface="Trebuchet MS" panose="020B0703020202090204"/>
+                <a:latin typeface="Trebuchet MS" panose="020B0603020202020204"/>
+                <a:ea typeface="Trebuchet MS" panose="020B0603020202020204"/>
+                <a:cs typeface="Trebuchet MS" panose="020B0603020202020204"/>
               </a:rPr>
               <a:t>	</a:t>
             </a:r>
@@ -15084,9 +16851,9 @@
                     <a:alpha val="100000"/>
                   </a:srgbClr>
                 </a:solidFill>
-                <a:latin typeface="Trebuchet MS" panose="020B0703020202090204"/>
-                <a:ea typeface="Trebuchet MS" panose="020B0703020202090204"/>
-                <a:cs typeface="Trebuchet MS" panose="020B0703020202090204"/>
+                <a:latin typeface="Trebuchet MS" panose="020B0603020202020204"/>
+                <a:ea typeface="Trebuchet MS" panose="020B0603020202020204"/>
+                <a:cs typeface="Trebuchet MS" panose="020B0603020202020204"/>
               </a:rPr>
               <a:t>Approximate</a:t>
             </a:r>
@@ -15097,9 +16864,9 @@
                     <a:alpha val="100000"/>
                   </a:srgbClr>
                 </a:solidFill>
-                <a:latin typeface="Trebuchet MS" panose="020B0703020202090204"/>
-                <a:ea typeface="Trebuchet MS" panose="020B0703020202090204"/>
-                <a:cs typeface="Trebuchet MS" panose="020B0703020202090204"/>
+                <a:latin typeface="Trebuchet MS" panose="020B0603020202020204"/>
+                <a:ea typeface="Trebuchet MS" panose="020B0603020202020204"/>
+                <a:cs typeface="Trebuchet MS" panose="020B0603020202020204"/>
               </a:rPr>
               <a:t> </a:t>
             </a:r>
@@ -15110,16 +16877,16 @@
                     <a:alpha val="100000"/>
                   </a:srgbClr>
                 </a:solidFill>
-                <a:latin typeface="Trebuchet MS" panose="020B0703020202090204"/>
-                <a:ea typeface="Trebuchet MS" panose="020B0703020202090204"/>
-                <a:cs typeface="Trebuchet MS" panose="020B0703020202090204"/>
+                <a:latin typeface="Trebuchet MS" panose="020B0603020202020204"/>
+                <a:ea typeface="Trebuchet MS" panose="020B0603020202020204"/>
+                <a:cs typeface="Trebuchet MS" panose="020B0603020202020204"/>
               </a:rPr>
               <a:t>Inference</a:t>
             </a:r>
             <a:endParaRPr sz="2100" dirty="0">
-              <a:latin typeface="Trebuchet MS" panose="020B0703020202090204"/>
-              <a:ea typeface="Trebuchet MS" panose="020B0703020202090204"/>
-              <a:cs typeface="Trebuchet MS" panose="020B0703020202090204"/>
+              <a:latin typeface="Trebuchet MS" panose="020B0603020202020204"/>
+              <a:ea typeface="Trebuchet MS" panose="020B0603020202020204"/>
+              <a:cs typeface="Trebuchet MS" panose="020B0603020202020204"/>
             </a:endParaRPr>
           </a:p>
           <a:p>
@@ -15243,9 +17010,9 @@
               </a:lnSpc>
             </a:pPr>
             <a:endParaRPr sz="1200" dirty="0">
-              <a:latin typeface="Arial" panose="020B0604020202090204"/>
-              <a:ea typeface="Arial" panose="020B0604020202090204"/>
-              <a:cs typeface="Arial" panose="020B0604020202090204"/>
+              <a:latin typeface="Arial" panose="020B0604020202020204"/>
+              <a:ea typeface="Arial" panose="020B0604020202020204"/>
+              <a:cs typeface="Arial" panose="020B0604020202020204"/>
             </a:endParaRPr>
           </a:p>
           <a:p>
@@ -15255,9 +17022,9 @@
               </a:lnSpc>
             </a:pPr>
             <a:endParaRPr sz="100" dirty="0">
-              <a:latin typeface="Arial" panose="020B0604020202090204"/>
-              <a:ea typeface="Arial" panose="020B0604020202090204"/>
-              <a:cs typeface="Arial" panose="020B0604020202090204"/>
+              <a:latin typeface="Arial" panose="020B0604020202020204"/>
+              <a:ea typeface="Arial" panose="020B0604020202020204"/>
+              <a:cs typeface="Arial" panose="020B0604020202020204"/>
             </a:endParaRPr>
           </a:p>
           <a:p>
@@ -16036,9 +17803,9 @@
               </a:lnSpc>
             </a:pPr>
             <a:endParaRPr sz="100" dirty="0">
-              <a:latin typeface="Arial" panose="020B0604020202090204"/>
-              <a:ea typeface="Arial" panose="020B0604020202090204"/>
-              <a:cs typeface="Arial" panose="020B0604020202090204"/>
+              <a:latin typeface="Arial" panose="020B0604020202020204"/>
+              <a:ea typeface="Arial" panose="020B0604020202020204"/>
+              <a:cs typeface="Arial" panose="020B0604020202020204"/>
             </a:endParaRPr>
           </a:p>
           <a:p>
@@ -16138,9 +17905,9 @@
               </a:lnSpc>
             </a:pPr>
             <a:endParaRPr sz="100" dirty="0">
-              <a:latin typeface="Arial" panose="020B0604020202090204"/>
-              <a:ea typeface="Arial" panose="020B0604020202090204"/>
-              <a:cs typeface="Arial" panose="020B0604020202090204"/>
+              <a:latin typeface="Arial" panose="020B0604020202020204"/>
+              <a:ea typeface="Arial" panose="020B0604020202020204"/>
+              <a:cs typeface="Arial" panose="020B0604020202020204"/>
             </a:endParaRPr>
           </a:p>
           <a:p>
@@ -16453,4 +18220,263 @@
     </a:ext>
   </a:extLst>
 </a:theme>
+</file>
+
+<file path=ppt/theme/theme2.xml><?xml version="1.0" encoding="utf-8"?>
+<a:theme xmlns:a="http://schemas.openxmlformats.org/drawingml/2006/main" name="Office 主题">
+  <a:themeElements>
+    <a:clrScheme name="Office">
+      <a:dk1>
+        <a:sysClr val="windowText" lastClr="000000"/>
+      </a:dk1>
+      <a:lt1>
+        <a:sysClr val="window" lastClr="FFFFFF"/>
+      </a:lt1>
+      <a:dk2>
+        <a:srgbClr val="44546A"/>
+      </a:dk2>
+      <a:lt2>
+        <a:srgbClr val="E7E6E6"/>
+      </a:lt2>
+      <a:accent1>
+        <a:srgbClr val="5B9BD5"/>
+      </a:accent1>
+      <a:accent2>
+        <a:srgbClr val="ED7D31"/>
+      </a:accent2>
+      <a:accent3>
+        <a:srgbClr val="A5A5A5"/>
+      </a:accent3>
+      <a:accent4>
+        <a:srgbClr val="FFC000"/>
+      </a:accent4>
+      <a:accent5>
+        <a:srgbClr val="4472C4"/>
+      </a:accent5>
+      <a:accent6>
+        <a:srgbClr val="70AD47"/>
+      </a:accent6>
+      <a:hlink>
+        <a:srgbClr val="0563C1"/>
+      </a:hlink>
+      <a:folHlink>
+        <a:srgbClr val="954F72"/>
+      </a:folHlink>
+    </a:clrScheme>
+    <a:fontScheme name="Office">
+      <a:majorFont>
+        <a:latin typeface="Calibri Light"/>
+        <a:ea typeface=""/>
+        <a:cs typeface=""/>
+        <a:font script="Jpan" typeface="ＭＳ Ｐゴシック"/>
+        <a:font script="Hang" typeface="맑은 고딕"/>
+        <a:font script="Hans" typeface="宋体"/>
+        <a:font script="Hant" typeface="新細明體"/>
+        <a:font script="Arab" typeface="Times New Roman"/>
+        <a:font script="Hebr" typeface="Times New Roman"/>
+        <a:font script="Thai" typeface="Angsana New"/>
+        <a:font script="Ethi" typeface="Nyala"/>
+        <a:font script="Beng" typeface="Vrinda"/>
+        <a:font script="Gujr" typeface="Shruti"/>
+        <a:font script="Khmr" typeface="MoolBoran"/>
+        <a:font script="Knda" typeface="Tunga"/>
+        <a:font script="Guru" typeface="Raavi"/>
+        <a:font script="Cans" typeface="Euphemia"/>
+        <a:font script="Cher" typeface="Plantagenet Cherokee"/>
+        <a:font script="Yiii" typeface="Microsoft Yi Baiti"/>
+        <a:font script="Tibt" typeface="Microsoft Himalaya"/>
+        <a:font script="Thaa" typeface="MV Boli"/>
+        <a:font script="Deva" typeface="Mangal"/>
+        <a:font script="Telu" typeface="Gautami"/>
+        <a:font script="Taml" typeface="Latha"/>
+        <a:font script="Syrc" typeface="Estrangelo Edessa"/>
+        <a:font script="Orya" typeface="Kalinga"/>
+        <a:font script="Mlym" typeface="Kartika"/>
+        <a:font script="Laoo" typeface="DokChampa"/>
+        <a:font script="Sinh" typeface="Iskoola Pota"/>
+        <a:font script="Mong" typeface="Mongolian Baiti"/>
+        <a:font script="Viet" typeface="Times New Roman"/>
+        <a:font script="Uigh" typeface="Microsoft Uighur"/>
+        <a:font script="Geor" typeface="Sylfaen"/>
+      </a:majorFont>
+      <a:minorFont>
+        <a:latin typeface="Calibri"/>
+        <a:ea typeface=""/>
+        <a:cs typeface=""/>
+        <a:font script="Jpan" typeface="ＭＳ Ｐゴシック"/>
+        <a:font script="Hang" typeface="맑은 고딕"/>
+        <a:font script="Hans" typeface="宋体"/>
+        <a:font script="Hant" typeface="新細明體"/>
+        <a:font script="Arab" typeface="Arial"/>
+        <a:font script="Hebr" typeface="Arial"/>
+        <a:font script="Thai" typeface="Cordia New"/>
+        <a:font script="Ethi" typeface="Nyala"/>
+        <a:font script="Beng" typeface="Vrinda"/>
+        <a:font script="Gujr" typeface="Shruti"/>
+        <a:font script="Khmr" typeface="DaunPenh"/>
+        <a:font script="Knda" typeface="Tunga"/>
+        <a:font script="Guru" typeface="Raavi"/>
+        <a:font script="Cans" typeface="Euphemia"/>
+        <a:font script="Cher" typeface="Plantagenet Cherokee"/>
+        <a:font script="Yiii" typeface="Microsoft Yi Baiti"/>
+        <a:font script="Tibt" typeface="Microsoft Himalaya"/>
+        <a:font script="Thaa" typeface="MV Boli"/>
+        <a:font script="Deva" typeface="Mangal"/>
+        <a:font script="Telu" typeface="Gautami"/>
+        <a:font script="Taml" typeface="Latha"/>
+        <a:font script="Syrc" typeface="Estrangelo Edessa"/>
+        <a:font script="Orya" typeface="Kalinga"/>
+        <a:font script="Mlym" typeface="Kartika"/>
+        <a:font script="Laoo" typeface="DokChampa"/>
+        <a:font script="Sinh" typeface="Iskoola Pota"/>
+        <a:font script="Mong" typeface="Mongolian Baiti"/>
+        <a:font script="Viet" typeface="Arial"/>
+        <a:font script="Uigh" typeface="Microsoft Uighur"/>
+        <a:font script="Geor" typeface="Sylfaen"/>
+      </a:minorFont>
+    </a:fontScheme>
+    <a:fmtScheme name="Office">
+      <a:fillStyleLst>
+        <a:solidFill>
+          <a:schemeClr val="phClr"/>
+        </a:solidFill>
+        <a:gradFill rotWithShape="1">
+          <a:gsLst>
+            <a:gs pos="0">
+              <a:schemeClr val="phClr">
+                <a:lumMod val="110000"/>
+                <a:satMod val="105000"/>
+                <a:tint val="67000"/>
+              </a:schemeClr>
+            </a:gs>
+            <a:gs pos="50000">
+              <a:schemeClr val="phClr">
+                <a:lumMod val="105000"/>
+                <a:satMod val="103000"/>
+                <a:tint val="73000"/>
+              </a:schemeClr>
+            </a:gs>
+            <a:gs pos="100000">
+              <a:schemeClr val="phClr">
+                <a:lumMod val="105000"/>
+                <a:satMod val="109000"/>
+                <a:tint val="81000"/>
+              </a:schemeClr>
+            </a:gs>
+          </a:gsLst>
+          <a:lin ang="5400000" scaled="0"/>
+        </a:gradFill>
+        <a:gradFill rotWithShape="1">
+          <a:gsLst>
+            <a:gs pos="0">
+              <a:schemeClr val="phClr">
+                <a:satMod val="103000"/>
+                <a:lumMod val="102000"/>
+                <a:tint val="94000"/>
+              </a:schemeClr>
+            </a:gs>
+            <a:gs pos="50000">
+              <a:schemeClr val="phClr">
+                <a:satMod val="110000"/>
+                <a:lumMod val="100000"/>
+                <a:shade val="100000"/>
+              </a:schemeClr>
+            </a:gs>
+            <a:gs pos="100000">
+              <a:schemeClr val="phClr">
+                <a:lumMod val="99000"/>
+                <a:satMod val="120000"/>
+                <a:shade val="78000"/>
+              </a:schemeClr>
+            </a:gs>
+          </a:gsLst>
+          <a:lin ang="5400000" scaled="0"/>
+        </a:gradFill>
+      </a:fillStyleLst>
+      <a:lnStyleLst>
+        <a:ln w="6350" cap="flat" cmpd="sng" algn="ctr">
+          <a:solidFill>
+            <a:schemeClr val="phClr"/>
+          </a:solidFill>
+          <a:prstDash val="solid"/>
+          <a:miter lim="800000"/>
+        </a:ln>
+        <a:ln w="12700" cap="flat" cmpd="sng" algn="ctr">
+          <a:solidFill>
+            <a:schemeClr val="phClr"/>
+          </a:solidFill>
+          <a:prstDash val="solid"/>
+          <a:miter lim="800000"/>
+        </a:ln>
+        <a:ln w="19050" cap="flat" cmpd="sng" algn="ctr">
+          <a:solidFill>
+            <a:schemeClr val="phClr"/>
+          </a:solidFill>
+          <a:prstDash val="solid"/>
+          <a:miter lim="800000"/>
+        </a:ln>
+      </a:lnStyleLst>
+      <a:effectStyleLst>
+        <a:effectStyle>
+          <a:effectLst/>
+        </a:effectStyle>
+        <a:effectStyle>
+          <a:effectLst/>
+        </a:effectStyle>
+        <a:effectStyle>
+          <a:effectLst>
+            <a:outerShdw blurRad="57150" dist="19050" dir="5400000" algn="ctr" rotWithShape="0">
+              <a:srgbClr val="000000">
+                <a:alpha val="63000"/>
+              </a:srgbClr>
+            </a:outerShdw>
+          </a:effectLst>
+        </a:effectStyle>
+      </a:effectStyleLst>
+      <a:bgFillStyleLst>
+        <a:solidFill>
+          <a:schemeClr val="phClr"/>
+        </a:solidFill>
+        <a:solidFill>
+          <a:schemeClr val="phClr">
+            <a:tint val="95000"/>
+            <a:satMod val="170000"/>
+          </a:schemeClr>
+        </a:solidFill>
+        <a:gradFill rotWithShape="1">
+          <a:gsLst>
+            <a:gs pos="0">
+              <a:schemeClr val="phClr">
+                <a:tint val="93000"/>
+                <a:satMod val="150000"/>
+                <a:shade val="98000"/>
+                <a:lumMod val="102000"/>
+              </a:schemeClr>
+            </a:gs>
+            <a:gs pos="50000">
+              <a:schemeClr val="phClr">
+                <a:tint val="98000"/>
+                <a:satMod val="130000"/>
+                <a:shade val="90000"/>
+                <a:lumMod val="103000"/>
+              </a:schemeClr>
+            </a:gs>
+            <a:gs pos="100000">
+              <a:schemeClr val="phClr">
+                <a:shade val="63000"/>
+                <a:satMod val="120000"/>
+              </a:schemeClr>
+            </a:gs>
+          </a:gsLst>
+          <a:lin ang="5400000" scaled="0"/>
+        </a:gradFill>
+      </a:bgFillStyleLst>
+    </a:fmtScheme>
+  </a:themeElements>
+  <a:extLst>
+    <a:ext uri="{05A4C25C-085E-4340-85A3-A5531E510DB2}">
+      <thm15:themeFamily xmlns:thm15="http://schemas.microsoft.com/office/thememl/2012/main" name="Office Theme" id="{62F939B6-93AF-4DB8-9C6B-D6C7DFDC589F}" vid="{4A3C46E8-61CC-4603-A589-7422A47A8E4A}"/>
+    </a:ext>
+  </a:extLst>
+</a:theme>
 </file>